--- a/Overtime_User_Manual.pptx
+++ b/Overtime_User_Manual.pptx
@@ -3171,7 +3171,7 @@
               </a:defRPr>
             </a:pPr>
             <a:r>
-              <a:t>SMART OVERTIME SYSTEM v1.36  |  일반 사원 전용 간편 매뉴얼</a:t>
+              <a:t>SMART OVERTIME SYSTEM v1.37  |  일반 사원 전용 간편 매뉴얼</a:t>
             </a:r>
           </a:p>
           <a:p>
@@ -3190,7 +3190,7 @@
             </a:r>
             <a:br/>
             <a:r>
-              <a:t>사용자 전용 기능 매뉴얼 (v1.36)</a:t>
+              <a:t>사용자 전용 기능 매뉴얼 (v1.37)</a:t>
             </a:r>
           </a:p>
           <a:p>
@@ -3217,7 +3217,7 @@
               </a:defRPr>
             </a:pPr>
             <a:r>
-              <a:t>배포 버전: v1.36 (2026-09-17)  |  PC 모니터 &amp; 스마트폰(모바일) 완벽 지원</a:t>
+              <a:t>배포 버전: v1.37 (2026-09-17)  |  PC 모니터 &amp; 스마트폰(모바일) 완벽 지원</a:t>
             </a:r>
           </a:p>
         </p:txBody>
@@ -3377,7 +3377,7 @@
               </a:defRPr>
             </a:pPr>
             <a:r>
-              <a:t>① v1.36 버전 뱃지 확인</a:t>
+              <a:t>① v1.37 버전 뱃지 확인</a:t>
             </a:r>
           </a:p>
           <a:p>
@@ -3392,7 +3392,7 @@
               </a:defRPr>
             </a:pPr>
             <a:r>
-              <a:t>화면 오른쪽 위에 파란색 [v1.36] 뱃지가 보이면 최신 버전입니다. 클릭 시 신규 릴리즈 이력이 표시됩니다.</a:t>
+              <a:t>화면 오른쪽 위에 파란색 [v1.37] 뱃지가 보이면 최신 버전입니다. 클릭 시 신규 릴리즈 이력이 표시됩니다.</a:t>
             </a:r>
           </a:p>
           <a:p>

--- a/Overtime_User_Manual.pptx
+++ b/Overtime_User_Manual.pptx
@@ -3171,7 +3171,7 @@
               </a:defRPr>
             </a:pPr>
             <a:r>
-              <a:t>SMART OVERTIME SYSTEM v1.37  |  일반 사원 전용 간편 매뉴얼</a:t>
+              <a:t>SMART OVERTIME SYSTEM v1.38  |  일반 사원 전용 간편 매뉴얼</a:t>
             </a:r>
           </a:p>
           <a:p>
@@ -3190,7 +3190,7 @@
             </a:r>
             <a:br/>
             <a:r>
-              <a:t>사용자 전용 기능 매뉴얼 (v1.37)</a:t>
+              <a:t>사용자 전용 기능 매뉴얼 (v1.38)</a:t>
             </a:r>
           </a:p>
           <a:p>
@@ -3205,7 +3205,7 @@
               </a:defRPr>
             </a:pPr>
             <a:r>
-              <a:t>사원번호 간편 입장, 스마트 달력 신청, 다차원 검색 및 개인 달력 조회까지 누구나 쉽게 따라 할 수 있는 사용자 공식 가이드입니다.</a:t>
+              <a:t>사원번호 간편 입장, 스마트 달력 신청, 실시간 진행 스피너 및 개인 달력 조회까지 누구나 쉽게 따라 할 수 있는 사용자 공식 가이드입니다.</a:t>
             </a:r>
           </a:p>
           <a:p>
@@ -3217,7 +3217,7 @@
               </a:defRPr>
             </a:pPr>
             <a:r>
-              <a:t>배포 버전: v1.37 (2026-09-17)  |  PC 모니터 &amp; 스마트폰(모바일) 완벽 지원</a:t>
+              <a:t>배포 버전: v1.38 (2026-09-17)  |  PC 모니터 &amp; 스마트폰(모바일) 완벽 지원</a:t>
             </a:r>
           </a:p>
         </p:txBody>
@@ -3377,7 +3377,7 @@
               </a:defRPr>
             </a:pPr>
             <a:r>
-              <a:t>① v1.37 버전 뱃지 확인</a:t>
+              <a:t>① v1.38 버전 뱃지 확인</a:t>
             </a:r>
           </a:p>
           <a:p>
@@ -3392,7 +3392,7 @@
               </a:defRPr>
             </a:pPr>
             <a:r>
-              <a:t>화면 오른쪽 위에 파란색 [v1.37] 뱃지가 보이면 최신 버전입니다. 클릭 시 신규 릴리즈 이력이 표시됩니다.</a:t>
+              <a:t>화면 오른쪽 위에 파란색 [v1.38] 뱃지가 보이면 최신 버전입니다. 클릭 시 신규 릴리즈 이력이 표시됩니다.</a:t>
             </a:r>
           </a:p>
           <a:p>

--- a/Overtime_User_Manual.pptx
+++ b/Overtime_User_Manual.pptx
@@ -3171,7 +3171,7 @@
               </a:defRPr>
             </a:pPr>
             <a:r>
-              <a:t>SMART OVERTIME SYSTEM v1.38  |  일반 사원 전용 간편 매뉴얼</a:t>
+              <a:t>SMART OVERTIME SYSTEM v1.40  |  일반 사원 전용 간편 매뉴얼</a:t>
             </a:r>
           </a:p>
           <a:p>
@@ -3190,7 +3190,7 @@
             </a:r>
             <a:br/>
             <a:r>
-              <a:t>사용자 전용 기능 매뉴얼 (v1.38)</a:t>
+              <a:t>사용자 전용 기능 매뉴얼 (v1.40)</a:t>
             </a:r>
           </a:p>
           <a:p>
@@ -3205,7 +3205,7 @@
               </a:defRPr>
             </a:pPr>
             <a:r>
-              <a:t>사원번호 간편 입장, 스마트 달력 신청, 실시간 진행 스피너 및 개인 달력 조회까지 누구나 쉽게 따라 할 수 있는 사용자 공식 가이드입니다.</a:t>
+              <a:t>사원번호 간편 입장, 스마트 달력 신청, 승인 특근 보안 격리 및 개인 달력 조회까지 누구나 쉽게 따라 할 수 있는 사용자 공식 가이드입니다.</a:t>
             </a:r>
           </a:p>
           <a:p>
@@ -3217,7 +3217,7 @@
               </a:defRPr>
             </a:pPr>
             <a:r>
-              <a:t>배포 버전: v1.38 (2026-09-17)  |  PC 모니터 &amp; 스마트폰(모바일) 완벽 지원</a:t>
+              <a:t>배포 버전: v1.40 (2026-09-18)  |  PC 모니터 &amp; 스마트폰(모바일) 완벽 지원</a:t>
             </a:r>
           </a:p>
         </p:txBody>
@@ -3377,7 +3377,7 @@
               </a:defRPr>
             </a:pPr>
             <a:r>
-              <a:t>① v1.38 버전 뱃지 확인</a:t>
+              <a:t>① v1.40 버전 뱃지 확인</a:t>
             </a:r>
           </a:p>
           <a:p>
@@ -3392,7 +3392,7 @@
               </a:defRPr>
             </a:pPr>
             <a:r>
-              <a:t>화면 오른쪽 위에 파란색 [v1.38] 뱃지가 보이면 최신 버전입니다. 클릭 시 신규 릴리즈 이력이 표시됩니다.</a:t>
+              <a:t>화면 오른쪽 위에 파란색 [v1.40] 뱃지가 보이면 최신 버전입니다. 클릭 시 신규 릴리즈 이력이 표시됩니다.</a:t>
             </a:r>
           </a:p>
           <a:p>

--- a/Overtime_User_Manual.pptx
+++ b/Overtime_User_Manual.pptx
@@ -3171,7 +3171,7 @@
               </a:defRPr>
             </a:pPr>
             <a:r>
-              <a:t>SMART OVERTIME SYSTEM v1.40  |  일반 사원 전용 간편 매뉴얼</a:t>
+              <a:t>SMART OVERTIME SYSTEM v1.41  |  일반 사원 전용 간편 매뉴얼</a:t>
             </a:r>
           </a:p>
           <a:p>
@@ -3190,7 +3190,7 @@
             </a:r>
             <a:br/>
             <a:r>
-              <a:t>사용자 전용 기능 매뉴얼 (v1.40)</a:t>
+              <a:t>사용자 전용 기능 매뉴얼 (v1.41)</a:t>
             </a:r>
           </a:p>
           <a:p>
@@ -3205,7 +3205,7 @@
               </a:defRPr>
             </a:pPr>
             <a:r>
-              <a:t>사원번호 간편 입장, 스마트 달력 신청, 승인 특근 보안 격리 및 개인 달력 조회까지 누구나 쉽게 따라 할 수 있는 사용자 공식 가이드입니다.</a:t>
+              <a:t>사원번호 간편 입장, 신청 정보 자동완성, 승인 특근 보안 격리 및 개인 달력 조회까지 누구나 쉽게 따라 할 수 있는 사용자 공식 가이드입니다.</a:t>
             </a:r>
           </a:p>
           <a:p>
@@ -3217,7 +3217,7 @@
               </a:defRPr>
             </a:pPr>
             <a:r>
-              <a:t>배포 버전: v1.40 (2026-09-18)  |  PC 모니터 &amp; 스마트폰(모바일) 완벽 지원</a:t>
+              <a:t>배포 버전: v1.41 (2026-09-18)  |  PC 모니터 &amp; 스마트폰(모바일) 완벽 지원</a:t>
             </a:r>
           </a:p>
         </p:txBody>
@@ -3377,7 +3377,7 @@
               </a:defRPr>
             </a:pPr>
             <a:r>
-              <a:t>① v1.40 버전 뱃지 확인</a:t>
+              <a:t>① v1.41 버전 뱃지 확인</a:t>
             </a:r>
           </a:p>
           <a:p>
@@ -3392,7 +3392,7 @@
               </a:defRPr>
             </a:pPr>
             <a:r>
-              <a:t>화면 오른쪽 위에 파란색 [v1.40] 뱃지가 보이면 최신 버전입니다. 클릭 시 신규 릴리즈 이력이 표시됩니다.</a:t>
+              <a:t>화면 오른쪽 위에 파란색 [v1.41] 뱃지가 보이면 최신 버전입니다. 클릭 시 신규 릴리즈 이력이 표시됩니다.</a:t>
             </a:r>
           </a:p>
           <a:p>

--- a/Overtime_User_Manual.pptx
+++ b/Overtime_User_Manual.pptx
@@ -3171,7 +3171,7 @@
               </a:defRPr>
             </a:pPr>
             <a:r>
-              <a:t>SMART OVERTIME SYSTEM v1.41  |  일반 사원 전용 간편 매뉴얼</a:t>
+              <a:t>SMART OVERTIME SYSTEM v1.42  |  일반 사원 전용 간편 매뉴얼</a:t>
             </a:r>
           </a:p>
           <a:p>
@@ -3190,7 +3190,7 @@
             </a:r>
             <a:br/>
             <a:r>
-              <a:t>사용자 전용 기능 매뉴얼 (v1.41)</a:t>
+              <a:t>사용자 전용 기능 매뉴얼 (v1.42)</a:t>
             </a:r>
           </a:p>
           <a:p>
@@ -3217,7 +3217,7 @@
               </a:defRPr>
             </a:pPr>
             <a:r>
-              <a:t>배포 버전: v1.41 (2026-09-18)  |  PC 모니터 &amp; 스마트폰(모바일) 완벽 지원</a:t>
+              <a:t>배포 버전: v1.42 (2026-09-18)  |  PC 모니터 &amp; 스마트폰(모바일) 완벽 지원</a:t>
             </a:r>
           </a:p>
         </p:txBody>
@@ -3377,7 +3377,7 @@
               </a:defRPr>
             </a:pPr>
             <a:r>
-              <a:t>① v1.41 버전 뱃지 확인</a:t>
+              <a:t>① v1.42 버전 뱃지 확인</a:t>
             </a:r>
           </a:p>
           <a:p>
@@ -3392,7 +3392,7 @@
               </a:defRPr>
             </a:pPr>
             <a:r>
-              <a:t>화면 오른쪽 위에 파란색 [v1.41] 뱃지가 보이면 최신 버전입니다. 클릭 시 신규 릴리즈 이력이 표시됩니다.</a:t>
+              <a:t>화면 오른쪽 위에 파란색 [v1.42] 뱃지가 보이면 최신 버전입니다. 클릭 시 신규 릴리즈 이력이 표시됩니다.</a:t>
             </a:r>
           </a:p>
           <a:p>

--- a/Overtime_User_Manual.pptx
+++ b/Overtime_User_Manual.pptx
@@ -3171,7 +3171,7 @@
               </a:defRPr>
             </a:pPr>
             <a:r>
-              <a:t>SMART OVERTIME SYSTEM v1.42  |  일반 사원 전용 간편 매뉴얼</a:t>
+              <a:t>SMART OVERTIME SYSTEM v1.43  |  일반 사원 전용 간편 매뉴얼</a:t>
             </a:r>
           </a:p>
           <a:p>
@@ -3190,7 +3190,7 @@
             </a:r>
             <a:br/>
             <a:r>
-              <a:t>사용자 전용 기능 매뉴얼 (v1.42)</a:t>
+              <a:t>사용자 전용 기능 매뉴얼 (v1.43)</a:t>
             </a:r>
           </a:p>
           <a:p>
@@ -3205,7 +3205,7 @@
               </a:defRPr>
             </a:pPr>
             <a:r>
-              <a:t>사원번호 간편 입장, 신청 정보 자동완성, 승인 특근 보안 격리 및 개인 달력 조회까지 누구나 쉽게 따라 할 수 있는 사용자 공식 가이드입니다.</a:t>
+              <a:t>사원번호 간편 입장, 신청 정보 자동완성, 사용자/관리자 수정 모달 분리 및 개인 달력 조회까지 누구나 쉽게 따라 할 수 있는 사용자 공식 가이드입니다.</a:t>
             </a:r>
           </a:p>
           <a:p>
@@ -3217,7 +3217,7 @@
               </a:defRPr>
             </a:pPr>
             <a:r>
-              <a:t>배포 버전: v1.42 (2026-09-18)  |  PC 모니터 &amp; 스마트폰(모바일) 완벽 지원</a:t>
+              <a:t>배포 버전: v1.43 (2026-09-18)  |  PC 모니터 &amp; 스마트폰(모바일) 완벽 지원</a:t>
             </a:r>
           </a:p>
         </p:txBody>
@@ -3377,7 +3377,7 @@
               </a:defRPr>
             </a:pPr>
             <a:r>
-              <a:t>① v1.42 버전 뱃지 확인</a:t>
+              <a:t>① v1.43 버전 뱃지 확인</a:t>
             </a:r>
           </a:p>
           <a:p>
@@ -3392,7 +3392,7 @@
               </a:defRPr>
             </a:pPr>
             <a:r>
-              <a:t>화면 오른쪽 위에 파란색 [v1.42] 뱃지가 보이면 최신 버전입니다. 클릭 시 신규 릴리즈 이력이 표시됩니다.</a:t>
+              <a:t>화면 오른쪽 위에 파란색 [v1.43] 뱃지가 보이면 최신 버전입니다. 클릭 시 신규 릴리즈 이력이 표시됩니다.</a:t>
             </a:r>
           </a:p>
           <a:p>

--- a/Overtime_User_Manual.pptx
+++ b/Overtime_User_Manual.pptx
@@ -11,6 +11,11 @@
     <p:sldId id="259" r:id="rId10"/>
     <p:sldId id="260" r:id="rId11"/>
     <p:sldId id="261" r:id="rId12"/>
+    <p:sldId id="262" r:id="rId13"/>
+    <p:sldId id="263" r:id="rId14"/>
+    <p:sldId id="264" r:id="rId15"/>
+    <p:sldId id="265" r:id="rId16"/>
+    <p:sldId id="266" r:id="rId17"/>
   </p:sldIdLst>
   <p:sldSz cx="12191695" cy="6858000" type="screen4x3"/>
   <p:notesSz cx="6858000" cy="9144000"/>
@@ -3146,8 +3151,8 @@
         </p:nvSpPr>
         <p:spPr>
           <a:xfrm>
-            <a:off x="914400" y="1371600"/>
-            <a:ext cx="10332720" cy="4114800"/>
+            <a:off x="914400" y="1280160"/>
+            <a:ext cx="10332720" cy="4297680"/>
           </a:xfrm>
           <a:prstGeom prst="rect">
             <a:avLst/>
@@ -3171,13 +3176,13 @@
               </a:defRPr>
             </a:pPr>
             <a:r>
-              <a:t>SMART OVERTIME SYSTEM v1.43  |  일반 사원 전용 간편 매뉴얼</a:t>
+              <a:t>SMART OVERTIME SYSTEM v1.44  |  일반 사원 전용 공식 매뉴얼</a:t>
             </a:r>
           </a:p>
           <a:p>
             <a:pPr>
               <a:spcAft>
-                <a:spcPts val="2000"/>
+                <a:spcPts val="1800"/>
               </a:spcAft>
               <a:defRPr sz="3600" b="1">
                 <a:solidFill>
@@ -3190,13 +3195,13 @@
             </a:r>
             <a:br/>
             <a:r>
-              <a:t>사용자 전용 기능 매뉴얼 (v1.43)</a:t>
+              <a:t>사용자 전용 기능 매뉴얼 (v1.44)</a:t>
             </a:r>
           </a:p>
           <a:p>
             <a:pPr>
               <a:spcAft>
-                <a:spcPts val="2800"/>
+                <a:spcPts val="2400"/>
               </a:spcAft>
               <a:defRPr sz="1500">
                 <a:solidFill>
@@ -3205,7 +3210,7 @@
               </a:defRPr>
             </a:pPr>
             <a:r>
-              <a:t>사원번호 간편 입장, 신청 정보 자동완성, 사용자/관리자 수정 모달 분리 및 개인 달력 조회까지 누구나 쉽게 따라 할 수 있는 사용자 공식 가이드입니다.</a:t>
+              <a:t>특근 완료 확정 피드백(3단계), 100% 무기명 건의 소통함, 접속 주소 및 접속 방법, 서버 초기화 대기 안내, 사원번호 간편 입장, 스마트 달력 신청까지 누구나 쉽게 따라 할 수 있는 사용자 공식 가이드입니다.</a:t>
             </a:r>
           </a:p>
           <a:p>
@@ -3217,7 +3222,1260 @@
               </a:defRPr>
             </a:pPr>
             <a:r>
-              <a:t>배포 버전: v1.43 (2026-09-18)  |  PC 모니터 &amp; 스마트폰(모바일) 완벽 지원</a:t>
+              <a:t>배포 버전: v1.44 (2026-09-21)  |  PC 모니터 &amp; 스마트폰(모바일) 완벽 지원</a:t>
+            </a:r>
+          </a:p>
+        </p:txBody>
+      </p:sp>
+    </p:spTree>
+  </p:cSld>
+  <p:clrMapOvr>
+    <a:masterClrMapping/>
+  </p:clrMapOvr>
+</p:sld>
+</file>
+
+<file path=ppt/slides/slide10.xml><?xml version="1.0" encoding="utf-8"?>
+<p:sld xmlns:a="http://schemas.openxmlformats.org/drawingml/2006/main" xmlns:p="http://schemas.openxmlformats.org/presentationml/2006/main" xmlns:r="http://schemas.openxmlformats.org/officeDocument/2006/relationships">
+  <p:cSld>
+    <p:spTree>
+      <p:nvGrpSpPr>
+        <p:cNvPr id="1" name=""/>
+        <p:cNvGrpSpPr/>
+        <p:nvPr/>
+      </p:nvGrpSpPr>
+      <p:grpSpPr/>
+      <p:sp>
+        <p:nvSpPr>
+          <p:cNvPr id="2" name="TextBox 1"/>
+          <p:cNvSpPr txBox="1"/>
+          <p:nvPr/>
+        </p:nvSpPr>
+        <p:spPr>
+          <a:xfrm>
+            <a:off x="731520" y="365760"/>
+            <a:ext cx="10698480" cy="1005840"/>
+          </a:xfrm>
+          <a:prstGeom prst="rect">
+            <a:avLst/>
+          </a:prstGeom>
+          <a:noFill/>
+        </p:spPr>
+        <p:txBody>
+          <a:bodyPr wrap="square">
+            <a:spAutoFit/>
+          </a:bodyPr>
+          <a:lstStyle/>
+          <a:p>
+            <a:pPr>
+              <a:defRPr sz="1200" b="1">
+                <a:solidFill>
+                  <a:srgbClr val="EA580C"/>
+                </a:solidFill>
+              </a:defRPr>
+            </a:pPr>
+            <a:r>
+              <a:t>STEP 09  |  스마트폰 모바일 및 외부망 접속 심화</a:t>
+            </a:r>
+          </a:p>
+          <a:p>
+            <a:pPr>
+              <a:defRPr sz="2200" b="1">
+                <a:solidFill>
+                  <a:srgbClr val="1E3A8A"/>
+                </a:solidFill>
+              </a:defRPr>
+            </a:pPr>
+            <a:r>
+              <a:t>모바일 및 외부망(LTE/5G/사외) 스마트 활용</a:t>
+            </a:r>
+          </a:p>
+          <a:p>
+            <a:pPr>
+              <a:defRPr sz="1300">
+                <a:solidFill>
+                  <a:srgbClr val="64748B"/>
+                </a:solidFill>
+              </a:defRPr>
+            </a:pPr>
+            <a:r>
+              <a:t>PC 앞이 아니어도 스마트폰으로 특근을 신청하고 실시간 승인 현황을 확인할 수 있습니다.</a:t>
+            </a:r>
+          </a:p>
+        </p:txBody>
+      </p:sp>
+      <p:sp>
+        <p:nvSpPr>
+          <p:cNvPr id="3" name="Rounded Rectangle 2"/>
+          <p:cNvSpPr/>
+          <p:nvPr/>
+        </p:nvSpPr>
+        <p:spPr>
+          <a:xfrm>
+            <a:off x="731520" y="1645920"/>
+            <a:ext cx="3383280" cy="4389120"/>
+          </a:xfrm>
+          <a:prstGeom prst="roundRect">
+            <a:avLst/>
+          </a:prstGeom>
+          <a:solidFill>
+            <a:srgbClr val="FFFFFF"/>
+          </a:solidFill>
+          <a:ln w="25400">
+            <a:solidFill>
+              <a:srgbClr val="CBD5E1"/>
+            </a:solidFill>
+          </a:ln>
+        </p:spPr>
+        <p:style>
+          <a:lnRef idx="1">
+            <a:schemeClr val="accent1"/>
+          </a:lnRef>
+          <a:fillRef idx="3">
+            <a:schemeClr val="accent1"/>
+          </a:fillRef>
+          <a:effectRef idx="2">
+            <a:schemeClr val="accent1"/>
+          </a:effectRef>
+          <a:fontRef idx="minor">
+            <a:schemeClr val="lt1"/>
+          </a:fontRef>
+        </p:style>
+        <p:txBody>
+          <a:bodyPr rtlCol="0" anchor="ctr"/>
+          <a:lstStyle/>
+          <a:p>
+            <a:pPr algn="ctr"/>
+          </a:p>
+        </p:txBody>
+      </p:sp>
+      <p:sp>
+        <p:nvSpPr>
+          <p:cNvPr id="4" name="TextBox 3"/>
+          <p:cNvSpPr txBox="1"/>
+          <p:nvPr/>
+        </p:nvSpPr>
+        <p:spPr>
+          <a:xfrm>
+            <a:off x="914400" y="1828800"/>
+            <a:ext cx="3017520" cy="3931920"/>
+          </a:xfrm>
+          <a:prstGeom prst="rect">
+            <a:avLst/>
+          </a:prstGeom>
+          <a:noFill/>
+        </p:spPr>
+        <p:txBody>
+          <a:bodyPr wrap="square">
+            <a:spAutoFit/>
+          </a:bodyPr>
+          <a:lstStyle/>
+          <a:p>
+            <a:pPr>
+              <a:spcAft>
+                <a:spcPts val="800"/>
+              </a:spcAft>
+              <a:defRPr sz="1200" b="1">
+                <a:solidFill>
+                  <a:srgbClr val="EA580C"/>
+                </a:solidFill>
+              </a:defRPr>
+            </a:pPr>
+            <a:r>
+              <a:t>단계 01</a:t>
+            </a:r>
+          </a:p>
+          <a:p>
+            <a:pPr>
+              <a:spcAft>
+                <a:spcPts val="1400"/>
+              </a:spcAft>
+              <a:defRPr sz="1800" b="1">
+                <a:solidFill>
+                  <a:srgbClr val="1E3A8A"/>
+                </a:solidFill>
+              </a:defRPr>
+            </a:pPr>
+            <a:r>
+              <a:t>1. 외부 접속용 모바일 QR 확인</a:t>
+            </a:r>
+          </a:p>
+          <a:p>
+            <a:pPr>
+              <a:lnSpc>
+                <a:spcPct val="130000"/>
+              </a:lnSpc>
+              <a:defRPr sz="1300">
+                <a:solidFill>
+                  <a:srgbClr val="0F172A"/>
+                </a:solidFill>
+              </a:defRPr>
+            </a:pPr>
+            <a:r>
+              <a:t>화면 상단 [📱 모바일 접속 QR]을 누르면 스마트폰 카메라(LTE/5G)로 즉시 스캔 가능한 외부망 전용 QR 코드가 표시됩니다.</a:t>
+            </a:r>
+          </a:p>
+        </p:txBody>
+      </p:sp>
+      <p:sp>
+        <p:nvSpPr>
+          <p:cNvPr id="5" name="Rounded Rectangle 4"/>
+          <p:cNvSpPr/>
+          <p:nvPr/>
+        </p:nvSpPr>
+        <p:spPr>
+          <a:xfrm>
+            <a:off x="4389120" y="1645920"/>
+            <a:ext cx="3383280" cy="4389120"/>
+          </a:xfrm>
+          <a:prstGeom prst="roundRect">
+            <a:avLst/>
+          </a:prstGeom>
+          <a:solidFill>
+            <a:srgbClr val="FFFFFF"/>
+          </a:solidFill>
+          <a:ln w="25400">
+            <a:solidFill>
+              <a:srgbClr val="CBD5E1"/>
+            </a:solidFill>
+          </a:ln>
+        </p:spPr>
+        <p:style>
+          <a:lnRef idx="1">
+            <a:schemeClr val="accent1"/>
+          </a:lnRef>
+          <a:fillRef idx="3">
+            <a:schemeClr val="accent1"/>
+          </a:fillRef>
+          <a:effectRef idx="2">
+            <a:schemeClr val="accent1"/>
+          </a:effectRef>
+          <a:fontRef idx="minor">
+            <a:schemeClr val="lt1"/>
+          </a:fontRef>
+        </p:style>
+        <p:txBody>
+          <a:bodyPr rtlCol="0" anchor="ctr"/>
+          <a:lstStyle/>
+          <a:p>
+            <a:pPr algn="ctr"/>
+          </a:p>
+        </p:txBody>
+      </p:sp>
+      <p:sp>
+        <p:nvSpPr>
+          <p:cNvPr id="6" name="TextBox 5"/>
+          <p:cNvSpPr txBox="1"/>
+          <p:nvPr/>
+        </p:nvSpPr>
+        <p:spPr>
+          <a:xfrm>
+            <a:off x="4572000" y="1828800"/>
+            <a:ext cx="3017520" cy="3931920"/>
+          </a:xfrm>
+          <a:prstGeom prst="rect">
+            <a:avLst/>
+          </a:prstGeom>
+          <a:noFill/>
+        </p:spPr>
+        <p:txBody>
+          <a:bodyPr wrap="square">
+            <a:spAutoFit/>
+          </a:bodyPr>
+          <a:lstStyle/>
+          <a:p>
+            <a:pPr>
+              <a:spcAft>
+                <a:spcPts val="800"/>
+              </a:spcAft>
+              <a:defRPr sz="1200" b="1">
+                <a:solidFill>
+                  <a:srgbClr val="EA580C"/>
+                </a:solidFill>
+              </a:defRPr>
+            </a:pPr>
+            <a:r>
+              <a:t>단계 02</a:t>
+            </a:r>
+          </a:p>
+          <a:p>
+            <a:pPr>
+              <a:spcAft>
+                <a:spcPts val="1400"/>
+              </a:spcAft>
+              <a:defRPr sz="1800" b="1">
+                <a:solidFill>
+                  <a:srgbClr val="1E3A8A"/>
+                </a:solidFill>
+              </a:defRPr>
+            </a:pPr>
+            <a:r>
+              <a:t>2. 암호화(HTTPS) 보안 터널</a:t>
+            </a:r>
+          </a:p>
+          <a:p>
+            <a:pPr>
+              <a:lnSpc>
+                <a:spcPct val="130000"/>
+              </a:lnSpc>
+              <a:defRPr sz="1300">
+                <a:solidFill>
+                  <a:srgbClr val="0F172A"/>
+                </a:solidFill>
+              </a:defRPr>
+            </a:pPr>
+            <a:r>
+              <a:t>외부 보안 터널(Cloudflare)을 통해 모든 통신이 전송 암호화(SSL/TLS)되어 사외에서도 안전하게 신청할 수 있습니다.</a:t>
+            </a:r>
+          </a:p>
+        </p:txBody>
+      </p:sp>
+      <p:sp>
+        <p:nvSpPr>
+          <p:cNvPr id="7" name="Rounded Rectangle 6"/>
+          <p:cNvSpPr/>
+          <p:nvPr/>
+        </p:nvSpPr>
+        <p:spPr>
+          <a:xfrm>
+            <a:off x="8046720" y="1645920"/>
+            <a:ext cx="3383280" cy="4389120"/>
+          </a:xfrm>
+          <a:prstGeom prst="roundRect">
+            <a:avLst/>
+          </a:prstGeom>
+          <a:solidFill>
+            <a:srgbClr val="FFFFFF"/>
+          </a:solidFill>
+          <a:ln w="25400">
+            <a:solidFill>
+              <a:srgbClr val="CBD5E1"/>
+            </a:solidFill>
+          </a:ln>
+        </p:spPr>
+        <p:style>
+          <a:lnRef idx="1">
+            <a:schemeClr val="accent1"/>
+          </a:lnRef>
+          <a:fillRef idx="3">
+            <a:schemeClr val="accent1"/>
+          </a:fillRef>
+          <a:effectRef idx="2">
+            <a:schemeClr val="accent1"/>
+          </a:effectRef>
+          <a:fontRef idx="minor">
+            <a:schemeClr val="lt1"/>
+          </a:fontRef>
+        </p:style>
+        <p:txBody>
+          <a:bodyPr rtlCol="0" anchor="ctr"/>
+          <a:lstStyle/>
+          <a:p>
+            <a:pPr algn="ctr"/>
+          </a:p>
+        </p:txBody>
+      </p:sp>
+      <p:sp>
+        <p:nvSpPr>
+          <p:cNvPr id="8" name="TextBox 7"/>
+          <p:cNvSpPr txBox="1"/>
+          <p:nvPr/>
+        </p:nvSpPr>
+        <p:spPr>
+          <a:xfrm>
+            <a:off x="8229600" y="1828800"/>
+            <a:ext cx="3017520" cy="3931920"/>
+          </a:xfrm>
+          <a:prstGeom prst="rect">
+            <a:avLst/>
+          </a:prstGeom>
+          <a:noFill/>
+        </p:spPr>
+        <p:txBody>
+          <a:bodyPr wrap="square">
+            <a:spAutoFit/>
+          </a:bodyPr>
+          <a:lstStyle/>
+          <a:p>
+            <a:pPr>
+              <a:spcAft>
+                <a:spcPts val="800"/>
+              </a:spcAft>
+              <a:defRPr sz="1200" b="1">
+                <a:solidFill>
+                  <a:srgbClr val="EA580C"/>
+                </a:solidFill>
+              </a:defRPr>
+            </a:pPr>
+            <a:r>
+              <a:t>단계 03</a:t>
+            </a:r>
+          </a:p>
+          <a:p>
+            <a:pPr>
+              <a:spcAft>
+                <a:spcPts val="1400"/>
+              </a:spcAft>
+              <a:defRPr sz="1800" b="1">
+                <a:solidFill>
+                  <a:srgbClr val="1E3A8A"/>
+                </a:solidFill>
+              </a:defRPr>
+            </a:pPr>
+            <a:r>
+              <a:t>3. 세션 유지 &amp; 홈 화면 추가</a:t>
+            </a:r>
+          </a:p>
+          <a:p>
+            <a:pPr>
+              <a:lnSpc>
+                <a:spcPct val="130000"/>
+              </a:lnSpc>
+              <a:defRPr sz="1300">
+                <a:solidFill>
+                  <a:srgbClr val="0F172A"/>
+                </a:solidFill>
+              </a:defRPr>
+            </a:pPr>
+            <a:r>
+              <a:t>스마트폰 브라우저에서 '홈 화면에 추가'를 누르면 전용 앱처럼 등록되며 24시간 언제 어디서든 즉시 접속됩니다.</a:t>
+            </a:r>
+          </a:p>
+        </p:txBody>
+      </p:sp>
+    </p:spTree>
+  </p:cSld>
+  <p:clrMapOvr>
+    <a:masterClrMapping/>
+  </p:clrMapOvr>
+</p:sld>
+</file>
+
+<file path=ppt/slides/slide11.xml><?xml version="1.0" encoding="utf-8"?>
+<p:sld xmlns:a="http://schemas.openxmlformats.org/drawingml/2006/main" xmlns:p="http://schemas.openxmlformats.org/presentationml/2006/main" xmlns:r="http://schemas.openxmlformats.org/officeDocument/2006/relationships">
+  <p:cSld>
+    <p:spTree>
+      <p:nvGrpSpPr>
+        <p:cNvPr id="1" name=""/>
+        <p:cNvGrpSpPr/>
+        <p:nvPr/>
+      </p:nvGrpSpPr>
+      <p:grpSpPr/>
+      <p:sp>
+        <p:nvSpPr>
+          <p:cNvPr id="2" name="TextBox 1"/>
+          <p:cNvSpPr txBox="1"/>
+          <p:nvPr/>
+        </p:nvSpPr>
+        <p:spPr>
+          <a:xfrm>
+            <a:off x="731520" y="320040"/>
+            <a:ext cx="10698480" cy="914400"/>
+          </a:xfrm>
+          <a:prstGeom prst="rect">
+            <a:avLst/>
+          </a:prstGeom>
+          <a:noFill/>
+        </p:spPr>
+        <p:txBody>
+          <a:bodyPr wrap="square">
+            <a:spAutoFit/>
+          </a:bodyPr>
+          <a:lstStyle/>
+          <a:p>
+            <a:pPr>
+              <a:defRPr sz="1200" b="1">
+                <a:solidFill>
+                  <a:srgbClr val="EA580C"/>
+                </a:solidFill>
+              </a:defRPr>
+            </a:pPr>
+            <a:r>
+              <a:t>SUMMARY &amp; Q&amp;A  |  사용자 자주 묻는 질문 답변 (v1.44)</a:t>
+            </a:r>
+          </a:p>
+          <a:p>
+            <a:pPr>
+              <a:defRPr sz="2200" b="1">
+                <a:solidFill>
+                  <a:srgbClr val="1E3A8A"/>
+                </a:solidFill>
+              </a:defRPr>
+            </a:pPr>
+            <a:r>
+              <a:t>자주 묻는 질문(Q&amp;A)과 사용자 꿀팁 총정리</a:t>
+            </a:r>
+          </a:p>
+          <a:p>
+            <a:pPr>
+              <a:defRPr sz="1250">
+                <a:solidFill>
+                  <a:srgbClr val="64748B"/>
+                </a:solidFill>
+              </a:defRPr>
+            </a:pPr>
+            <a:r>
+              <a:t>궁금한 사항이 있으실 때는 언제든 상단의 [📖 사용자 매뉴얼]을 다운로드하여 확인하세요.</a:t>
+            </a:r>
+          </a:p>
+        </p:txBody>
+      </p:sp>
+      <p:sp>
+        <p:nvSpPr>
+          <p:cNvPr id="3" name="Rounded Rectangle 2"/>
+          <p:cNvSpPr/>
+          <p:nvPr/>
+        </p:nvSpPr>
+        <p:spPr>
+          <a:xfrm>
+            <a:off x="731520" y="1371600"/>
+            <a:ext cx="10728655" cy="603504"/>
+          </a:xfrm>
+          <a:prstGeom prst="roundRect">
+            <a:avLst/>
+          </a:prstGeom>
+          <a:solidFill>
+            <a:srgbClr val="F8FAFC"/>
+          </a:solidFill>
+          <a:ln>
+            <a:solidFill>
+              <a:srgbClr val="E2E8F0"/>
+            </a:solidFill>
+          </a:ln>
+        </p:spPr>
+        <p:style>
+          <a:lnRef idx="1">
+            <a:schemeClr val="accent1"/>
+          </a:lnRef>
+          <a:fillRef idx="3">
+            <a:schemeClr val="accent1"/>
+          </a:fillRef>
+          <a:effectRef idx="2">
+            <a:schemeClr val="accent1"/>
+          </a:effectRef>
+          <a:fontRef idx="minor">
+            <a:schemeClr val="lt1"/>
+          </a:fontRef>
+        </p:style>
+        <p:txBody>
+          <a:bodyPr rtlCol="0" anchor="ctr"/>
+          <a:lstStyle/>
+          <a:p>
+            <a:pPr algn="ctr"/>
+          </a:p>
+        </p:txBody>
+      </p:sp>
+      <p:sp>
+        <p:nvSpPr>
+          <p:cNvPr id="4" name="TextBox 3"/>
+          <p:cNvSpPr txBox="1"/>
+          <p:nvPr/>
+        </p:nvSpPr>
+        <p:spPr>
+          <a:xfrm>
+            <a:off x="914400" y="1408176"/>
+            <a:ext cx="10332720" cy="530352"/>
+          </a:xfrm>
+          <a:prstGeom prst="rect">
+            <a:avLst/>
+          </a:prstGeom>
+          <a:noFill/>
+        </p:spPr>
+        <p:txBody>
+          <a:bodyPr wrap="square">
+            <a:spAutoFit/>
+          </a:bodyPr>
+          <a:lstStyle/>
+          <a:p>
+            <a:pPr>
+              <a:spcAft>
+                <a:spcPts val="100"/>
+              </a:spcAft>
+              <a:defRPr sz="1150" b="1">
+                <a:solidFill>
+                  <a:srgbClr val="1E3A8A"/>
+                </a:solidFill>
+              </a:defRPr>
+            </a:pPr>
+            <a:r>
+              <a:t>Q1. 외부 접속망 주소와 모바일 접속 방법은 어떻게 되나요?</a:t>
+            </a:r>
+          </a:p>
+          <a:p>
+            <a:pPr>
+              <a:defRPr sz="1000">
+                <a:solidFill>
+                  <a:srgbClr val="EA580C"/>
+                </a:solidFill>
+              </a:defRPr>
+            </a:pPr>
+            <a:r>
+              <a:t>👉 관리자가 배포한 외부 보안 주소(https://xxxx.trycloudflare.com)로 접속하거나, 화면 상단 [모바일 접속 QR]을 스마트폰 카메라로 스캔하여 LTE/5G 어디서나 간편하게 접속합니다.</a:t>
+            </a:r>
+          </a:p>
+        </p:txBody>
+      </p:sp>
+      <p:sp>
+        <p:nvSpPr>
+          <p:cNvPr id="5" name="Rounded Rectangle 4"/>
+          <p:cNvSpPr/>
+          <p:nvPr/>
+        </p:nvSpPr>
+        <p:spPr>
+          <a:xfrm>
+            <a:off x="731520" y="2011680"/>
+            <a:ext cx="10728655" cy="603504"/>
+          </a:xfrm>
+          <a:prstGeom prst="roundRect">
+            <a:avLst/>
+          </a:prstGeom>
+          <a:solidFill>
+            <a:srgbClr val="F8FAFC"/>
+          </a:solidFill>
+          <a:ln>
+            <a:solidFill>
+              <a:srgbClr val="E2E8F0"/>
+            </a:solidFill>
+          </a:ln>
+        </p:spPr>
+        <p:style>
+          <a:lnRef idx="1">
+            <a:schemeClr val="accent1"/>
+          </a:lnRef>
+          <a:fillRef idx="3">
+            <a:schemeClr val="accent1"/>
+          </a:fillRef>
+          <a:effectRef idx="2">
+            <a:schemeClr val="accent1"/>
+          </a:effectRef>
+          <a:fontRef idx="minor">
+            <a:schemeClr val="lt1"/>
+          </a:fontRef>
+        </p:style>
+        <p:txBody>
+          <a:bodyPr rtlCol="0" anchor="ctr"/>
+          <a:lstStyle/>
+          <a:p>
+            <a:pPr algn="ctr"/>
+          </a:p>
+        </p:txBody>
+      </p:sp>
+      <p:sp>
+        <p:nvSpPr>
+          <p:cNvPr id="6" name="TextBox 5"/>
+          <p:cNvSpPr txBox="1"/>
+          <p:nvPr/>
+        </p:nvSpPr>
+        <p:spPr>
+          <a:xfrm>
+            <a:off x="914400" y="2048256"/>
+            <a:ext cx="10332720" cy="530352"/>
+          </a:xfrm>
+          <a:prstGeom prst="rect">
+            <a:avLst/>
+          </a:prstGeom>
+          <a:noFill/>
+        </p:spPr>
+        <p:txBody>
+          <a:bodyPr wrap="square">
+            <a:spAutoFit/>
+          </a:bodyPr>
+          <a:lstStyle/>
+          <a:p>
+            <a:pPr>
+              <a:spcAft>
+                <a:spcPts val="100"/>
+              </a:spcAft>
+              <a:defRPr sz="1150" b="1">
+                <a:solidFill>
+                  <a:srgbClr val="1E3A8A"/>
+                </a:solidFill>
+              </a:defRPr>
+            </a:pPr>
+            <a:r>
+              <a:t>Q2. 서버 리부팅 직후 접속이 왜 바로 안 되고 로딩이 도나요?</a:t>
+            </a:r>
+          </a:p>
+          <a:p>
+            <a:pPr>
+              <a:defRPr sz="1000">
+                <a:solidFill>
+                  <a:srgbClr val="EA580C"/>
+                </a:solidFill>
+              </a:defRPr>
+            </a:pPr>
+            <a:r>
+              <a:t>👉 서버 최초 기동 및 리부팅 시에는 데이터베이스 무결성 검증과 자동 백업 생성을 위해 약 10~20초 초기화가 진행되니 새로고침 연타 없이 잠시 대기해주세요.</a:t>
+            </a:r>
+          </a:p>
+        </p:txBody>
+      </p:sp>
+      <p:sp>
+        <p:nvSpPr>
+          <p:cNvPr id="7" name="Rounded Rectangle 6"/>
+          <p:cNvSpPr/>
+          <p:nvPr/>
+        </p:nvSpPr>
+        <p:spPr>
+          <a:xfrm>
+            <a:off x="731520" y="2651760"/>
+            <a:ext cx="10728655" cy="603504"/>
+          </a:xfrm>
+          <a:prstGeom prst="roundRect">
+            <a:avLst/>
+          </a:prstGeom>
+          <a:solidFill>
+            <a:srgbClr val="F8FAFC"/>
+          </a:solidFill>
+          <a:ln>
+            <a:solidFill>
+              <a:srgbClr val="E2E8F0"/>
+            </a:solidFill>
+          </a:ln>
+        </p:spPr>
+        <p:style>
+          <a:lnRef idx="1">
+            <a:schemeClr val="accent1"/>
+          </a:lnRef>
+          <a:fillRef idx="3">
+            <a:schemeClr val="accent1"/>
+          </a:fillRef>
+          <a:effectRef idx="2">
+            <a:schemeClr val="accent1"/>
+          </a:effectRef>
+          <a:fontRef idx="minor">
+            <a:schemeClr val="lt1"/>
+          </a:fontRef>
+        </p:style>
+        <p:txBody>
+          <a:bodyPr rtlCol="0" anchor="ctr"/>
+          <a:lstStyle/>
+          <a:p>
+            <a:pPr algn="ctr"/>
+          </a:p>
+        </p:txBody>
+      </p:sp>
+      <p:sp>
+        <p:nvSpPr>
+          <p:cNvPr id="8" name="TextBox 7"/>
+          <p:cNvSpPr txBox="1"/>
+          <p:nvPr/>
+        </p:nvSpPr>
+        <p:spPr>
+          <a:xfrm>
+            <a:off x="914400" y="2688336"/>
+            <a:ext cx="10332720" cy="530352"/>
+          </a:xfrm>
+          <a:prstGeom prst="rect">
+            <a:avLst/>
+          </a:prstGeom>
+          <a:noFill/>
+        </p:spPr>
+        <p:txBody>
+          <a:bodyPr wrap="square">
+            <a:spAutoFit/>
+          </a:bodyPr>
+          <a:lstStyle/>
+          <a:p>
+            <a:pPr>
+              <a:spcAft>
+                <a:spcPts val="100"/>
+              </a:spcAft>
+              <a:defRPr sz="1150" b="1">
+                <a:solidFill>
+                  <a:srgbClr val="1E3A8A"/>
+                </a:solidFill>
+              </a:defRPr>
+            </a:pPr>
+            <a:r>
+              <a:t>Q3. 재입장할 때 사번을 매번 다시 입력해야 하나요?</a:t>
+            </a:r>
+          </a:p>
+          <a:p>
+            <a:pPr>
+              <a:defRPr sz="1000">
+                <a:solidFill>
+                  <a:srgbClr val="EA580C"/>
+                </a:solidFill>
+              </a:defRPr>
+            </a:pPr>
+            <a:r>
+              <a:t>👉 아닙니다. 브라우저가 사번을 안전하게 기억하고 있으므로 [입장하기] 버튼만 누르면 1초 만에 바로 입장됩니다.</a:t>
+            </a:r>
+          </a:p>
+        </p:txBody>
+      </p:sp>
+      <p:sp>
+        <p:nvSpPr>
+          <p:cNvPr id="9" name="Rounded Rectangle 8"/>
+          <p:cNvSpPr/>
+          <p:nvPr/>
+        </p:nvSpPr>
+        <p:spPr>
+          <a:xfrm>
+            <a:off x="731520" y="3291839"/>
+            <a:ext cx="10728655" cy="603504"/>
+          </a:xfrm>
+          <a:prstGeom prst="roundRect">
+            <a:avLst/>
+          </a:prstGeom>
+          <a:solidFill>
+            <a:srgbClr val="F8FAFC"/>
+          </a:solidFill>
+          <a:ln>
+            <a:solidFill>
+              <a:srgbClr val="E2E8F0"/>
+            </a:solidFill>
+          </a:ln>
+        </p:spPr>
+        <p:style>
+          <a:lnRef idx="1">
+            <a:schemeClr val="accent1"/>
+          </a:lnRef>
+          <a:fillRef idx="3">
+            <a:schemeClr val="accent1"/>
+          </a:fillRef>
+          <a:effectRef idx="2">
+            <a:schemeClr val="accent1"/>
+          </a:effectRef>
+          <a:fontRef idx="minor">
+            <a:schemeClr val="lt1"/>
+          </a:fontRef>
+        </p:style>
+        <p:txBody>
+          <a:bodyPr rtlCol="0" anchor="ctr"/>
+          <a:lstStyle/>
+          <a:p>
+            <a:pPr algn="ctr"/>
+          </a:p>
+        </p:txBody>
+      </p:sp>
+      <p:sp>
+        <p:nvSpPr>
+          <p:cNvPr id="10" name="TextBox 9"/>
+          <p:cNvSpPr txBox="1"/>
+          <p:nvPr/>
+        </p:nvSpPr>
+        <p:spPr>
+          <a:xfrm>
+            <a:off x="914400" y="3328415"/>
+            <a:ext cx="10332720" cy="530352"/>
+          </a:xfrm>
+          <a:prstGeom prst="rect">
+            <a:avLst/>
+          </a:prstGeom>
+          <a:noFill/>
+        </p:spPr>
+        <p:txBody>
+          <a:bodyPr wrap="square">
+            <a:spAutoFit/>
+          </a:bodyPr>
+          <a:lstStyle/>
+          <a:p>
+            <a:pPr>
+              <a:spcAft>
+                <a:spcPts val="100"/>
+              </a:spcAft>
+              <a:defRPr sz="1150" b="1">
+                <a:solidFill>
+                  <a:srgbClr val="1E3A8A"/>
+                </a:solidFill>
+              </a:defRPr>
+            </a:pPr>
+            <a:r>
+              <a:t>Q4. 스마트폰 모바일에서 신청해도 회사 PC와 연동되나요?</a:t>
+            </a:r>
+          </a:p>
+          <a:p>
+            <a:pPr>
+              <a:defRPr sz="1000">
+                <a:solidFill>
+                  <a:srgbClr val="EA580C"/>
+                </a:solidFill>
+              </a:defRPr>
+            </a:pPr>
+            <a:r>
+              <a:t>👉 네, 모바일과 PC는 동일한 중앙 데이터베이스를 공유하므로 사번만 넣으면 100% 실시간 자동 연동됩니다.</a:t>
+            </a:r>
+          </a:p>
+        </p:txBody>
+      </p:sp>
+      <p:sp>
+        <p:nvSpPr>
+          <p:cNvPr id="11" name="Rounded Rectangle 10"/>
+          <p:cNvSpPr/>
+          <p:nvPr/>
+        </p:nvSpPr>
+        <p:spPr>
+          <a:xfrm>
+            <a:off x="731520" y="3931920"/>
+            <a:ext cx="10728655" cy="603504"/>
+          </a:xfrm>
+          <a:prstGeom prst="roundRect">
+            <a:avLst/>
+          </a:prstGeom>
+          <a:solidFill>
+            <a:srgbClr val="F8FAFC"/>
+          </a:solidFill>
+          <a:ln>
+            <a:solidFill>
+              <a:srgbClr val="E2E8F0"/>
+            </a:solidFill>
+          </a:ln>
+        </p:spPr>
+        <p:style>
+          <a:lnRef idx="1">
+            <a:schemeClr val="accent1"/>
+          </a:lnRef>
+          <a:fillRef idx="3">
+            <a:schemeClr val="accent1"/>
+          </a:fillRef>
+          <a:effectRef idx="2">
+            <a:schemeClr val="accent1"/>
+          </a:effectRef>
+          <a:fontRef idx="minor">
+            <a:schemeClr val="lt1"/>
+          </a:fontRef>
+        </p:style>
+        <p:txBody>
+          <a:bodyPr rtlCol="0" anchor="ctr"/>
+          <a:lstStyle/>
+          <a:p>
+            <a:pPr algn="ctr"/>
+          </a:p>
+        </p:txBody>
+      </p:sp>
+      <p:sp>
+        <p:nvSpPr>
+          <p:cNvPr id="12" name="TextBox 11"/>
+          <p:cNvSpPr txBox="1"/>
+          <p:nvPr/>
+        </p:nvSpPr>
+        <p:spPr>
+          <a:xfrm>
+            <a:off x="914400" y="3968496"/>
+            <a:ext cx="10332720" cy="530352"/>
+          </a:xfrm>
+          <a:prstGeom prst="rect">
+            <a:avLst/>
+          </a:prstGeom>
+          <a:noFill/>
+        </p:spPr>
+        <p:txBody>
+          <a:bodyPr wrap="square">
+            <a:spAutoFit/>
+          </a:bodyPr>
+          <a:lstStyle/>
+          <a:p>
+            <a:pPr>
+              <a:spcAft>
+                <a:spcPts val="100"/>
+              </a:spcAft>
+              <a:defRPr sz="1150" b="1">
+                <a:solidFill>
+                  <a:srgbClr val="1E3A8A"/>
+                </a:solidFill>
+              </a:defRPr>
+            </a:pPr>
+            <a:r>
+              <a:t>Q5. 실수로 같은 날짜에 중복 신청하면 어떻게 되나요?</a:t>
+            </a:r>
+          </a:p>
+          <a:p>
+            <a:pPr>
+              <a:defRPr sz="1000">
+                <a:solidFill>
+                  <a:srgbClr val="EA580C"/>
+                </a:solidFill>
+              </a:defRPr>
+            </a:pPr>
+            <a:r>
+              <a:t>👉 시스템에서 동일 날짜 중복 신청을 사전에 감지하여 경고창과 함께 안전하게 차단하므로 안심하셔도 됩니다.</a:t>
+            </a:r>
+          </a:p>
+        </p:txBody>
+      </p:sp>
+      <p:sp>
+        <p:nvSpPr>
+          <p:cNvPr id="13" name="Rounded Rectangle 12"/>
+          <p:cNvSpPr/>
+          <p:nvPr/>
+        </p:nvSpPr>
+        <p:spPr>
+          <a:xfrm>
+            <a:off x="731520" y="4572000"/>
+            <a:ext cx="10728655" cy="603504"/>
+          </a:xfrm>
+          <a:prstGeom prst="roundRect">
+            <a:avLst/>
+          </a:prstGeom>
+          <a:solidFill>
+            <a:srgbClr val="F8FAFC"/>
+          </a:solidFill>
+          <a:ln>
+            <a:solidFill>
+              <a:srgbClr val="E2E8F0"/>
+            </a:solidFill>
+          </a:ln>
+        </p:spPr>
+        <p:style>
+          <a:lnRef idx="1">
+            <a:schemeClr val="accent1"/>
+          </a:lnRef>
+          <a:fillRef idx="3">
+            <a:schemeClr val="accent1"/>
+          </a:fillRef>
+          <a:effectRef idx="2">
+            <a:schemeClr val="accent1"/>
+          </a:effectRef>
+          <a:fontRef idx="minor">
+            <a:schemeClr val="lt1"/>
+          </a:fontRef>
+        </p:style>
+        <p:txBody>
+          <a:bodyPr rtlCol="0" anchor="ctr"/>
+          <a:lstStyle/>
+          <a:p>
+            <a:pPr algn="ctr"/>
+          </a:p>
+        </p:txBody>
+      </p:sp>
+      <p:sp>
+        <p:nvSpPr>
+          <p:cNvPr id="14" name="TextBox 13"/>
+          <p:cNvSpPr txBox="1"/>
+          <p:nvPr/>
+        </p:nvSpPr>
+        <p:spPr>
+          <a:xfrm>
+            <a:off x="914400" y="4608576"/>
+            <a:ext cx="10332720" cy="530352"/>
+          </a:xfrm>
+          <a:prstGeom prst="rect">
+            <a:avLst/>
+          </a:prstGeom>
+          <a:noFill/>
+        </p:spPr>
+        <p:txBody>
+          <a:bodyPr wrap="square">
+            <a:spAutoFit/>
+          </a:bodyPr>
+          <a:lstStyle/>
+          <a:p>
+            <a:pPr>
+              <a:spcAft>
+                <a:spcPts val="100"/>
+              </a:spcAft>
+              <a:defRPr sz="1150" b="1">
+                <a:solidFill>
+                  <a:srgbClr val="1E3A8A"/>
+                </a:solidFill>
+              </a:defRPr>
+            </a:pPr>
+            <a:r>
+              <a:t>Q6. 관리자 승인 여부를 실시간으로 어떻게 확인하나요?</a:t>
+            </a:r>
+          </a:p>
+          <a:p>
+            <a:pPr>
+              <a:defRPr sz="1000">
+                <a:solidFill>
+                  <a:srgbClr val="EA580C"/>
+                </a:solidFill>
+              </a:defRPr>
+            </a:pPr>
+            <a:r>
+              <a:t>👉 '내 신청 내역' 카드에서 초록색 [✓ 확인완료] 도장을 확인하실 수 있으며, 상단 [새로고침]을 누르면 실시간 반영됩니다.</a:t>
+            </a:r>
+          </a:p>
+        </p:txBody>
+      </p:sp>
+      <p:sp>
+        <p:nvSpPr>
+          <p:cNvPr id="15" name="Rounded Rectangle 14"/>
+          <p:cNvSpPr/>
+          <p:nvPr/>
+        </p:nvSpPr>
+        <p:spPr>
+          <a:xfrm>
+            <a:off x="731520" y="5212079"/>
+            <a:ext cx="10728655" cy="603504"/>
+          </a:xfrm>
+          <a:prstGeom prst="roundRect">
+            <a:avLst/>
+          </a:prstGeom>
+          <a:solidFill>
+            <a:srgbClr val="F8FAFC"/>
+          </a:solidFill>
+          <a:ln>
+            <a:solidFill>
+              <a:srgbClr val="E2E8F0"/>
+            </a:solidFill>
+          </a:ln>
+        </p:spPr>
+        <p:style>
+          <a:lnRef idx="1">
+            <a:schemeClr val="accent1"/>
+          </a:lnRef>
+          <a:fillRef idx="3">
+            <a:schemeClr val="accent1"/>
+          </a:fillRef>
+          <a:effectRef idx="2">
+            <a:schemeClr val="accent1"/>
+          </a:effectRef>
+          <a:fontRef idx="minor">
+            <a:schemeClr val="lt1"/>
+          </a:fontRef>
+        </p:style>
+        <p:txBody>
+          <a:bodyPr rtlCol="0" anchor="ctr"/>
+          <a:lstStyle/>
+          <a:p>
+            <a:pPr algn="ctr"/>
+          </a:p>
+        </p:txBody>
+      </p:sp>
+      <p:sp>
+        <p:nvSpPr>
+          <p:cNvPr id="16" name="TextBox 15"/>
+          <p:cNvSpPr txBox="1"/>
+          <p:nvPr/>
+        </p:nvSpPr>
+        <p:spPr>
+          <a:xfrm>
+            <a:off x="914400" y="5248655"/>
+            <a:ext cx="10332720" cy="530352"/>
+          </a:xfrm>
+          <a:prstGeom prst="rect">
+            <a:avLst/>
+          </a:prstGeom>
+          <a:noFill/>
+        </p:spPr>
+        <p:txBody>
+          <a:bodyPr wrap="square">
+            <a:spAutoFit/>
+          </a:bodyPr>
+          <a:lstStyle/>
+          <a:p>
+            <a:pPr>
+              <a:spcAft>
+                <a:spcPts val="100"/>
+              </a:spcAft>
+              <a:defRPr sz="1150" b="1">
+                <a:solidFill>
+                  <a:srgbClr val="1E3A8A"/>
+                </a:solidFill>
+              </a:defRPr>
+            </a:pPr>
+            <a:r>
+              <a:t>Q7. 실제 특근 후 [🎯 특근완료 확정] 버튼은 언제 누르나요?</a:t>
+            </a:r>
+          </a:p>
+          <a:p>
+            <a:pPr>
+              <a:defRPr sz="1000">
+                <a:solidFill>
+                  <a:srgbClr val="EA580C"/>
+                </a:solidFill>
+              </a:defRPr>
+            </a:pPr>
+            <a:r>
+              <a:t>👉 관리자가 사전 승인한 특근에 대해 실제 휴일 근무를 마친 후 '내 신청 내역'에서 [🎯 특근완료 확정]을 누르면 관리자에게 완료 피드백이 전송됩니다.</a:t>
+            </a:r>
+          </a:p>
+        </p:txBody>
+      </p:sp>
+      <p:sp>
+        <p:nvSpPr>
+          <p:cNvPr id="17" name="Rounded Rectangle 16"/>
+          <p:cNvSpPr/>
+          <p:nvPr/>
+        </p:nvSpPr>
+        <p:spPr>
+          <a:xfrm>
+            <a:off x="731520" y="5852159"/>
+            <a:ext cx="10728655" cy="603504"/>
+          </a:xfrm>
+          <a:prstGeom prst="roundRect">
+            <a:avLst/>
+          </a:prstGeom>
+          <a:solidFill>
+            <a:srgbClr val="F8FAFC"/>
+          </a:solidFill>
+          <a:ln>
+            <a:solidFill>
+              <a:srgbClr val="E2E8F0"/>
+            </a:solidFill>
+          </a:ln>
+        </p:spPr>
+        <p:style>
+          <a:lnRef idx="1">
+            <a:schemeClr val="accent1"/>
+          </a:lnRef>
+          <a:fillRef idx="3">
+            <a:schemeClr val="accent1"/>
+          </a:fillRef>
+          <a:effectRef idx="2">
+            <a:schemeClr val="accent1"/>
+          </a:effectRef>
+          <a:fontRef idx="minor">
+            <a:schemeClr val="lt1"/>
+          </a:fontRef>
+        </p:style>
+        <p:txBody>
+          <a:bodyPr rtlCol="0" anchor="ctr"/>
+          <a:lstStyle/>
+          <a:p>
+            <a:pPr algn="ctr"/>
+          </a:p>
+        </p:txBody>
+      </p:sp>
+      <p:sp>
+        <p:nvSpPr>
+          <p:cNvPr id="18" name="TextBox 17"/>
+          <p:cNvSpPr txBox="1"/>
+          <p:nvPr/>
+        </p:nvSpPr>
+        <p:spPr>
+          <a:xfrm>
+            <a:off x="914400" y="5888735"/>
+            <a:ext cx="10332720" cy="530352"/>
+          </a:xfrm>
+          <a:prstGeom prst="rect">
+            <a:avLst/>
+          </a:prstGeom>
+          <a:noFill/>
+        </p:spPr>
+        <p:txBody>
+          <a:bodyPr wrap="square">
+            <a:spAutoFit/>
+          </a:bodyPr>
+          <a:lstStyle/>
+          <a:p>
+            <a:pPr>
+              <a:spcAft>
+                <a:spcPts val="100"/>
+              </a:spcAft>
+              <a:defRPr sz="1150" b="1">
+                <a:solidFill>
+                  <a:srgbClr val="1E3A8A"/>
+                </a:solidFill>
+              </a:defRPr>
+            </a:pPr>
+            <a:r>
+              <a:t>Q8. 건의사항 소통함은 정말로 작성자가 누구인지 알 수 없나요?</a:t>
+            </a:r>
+          </a:p>
+          <a:p>
+            <a:pPr>
+              <a:defRPr sz="1000">
+                <a:solidFill>
+                  <a:srgbClr val="EA580C"/>
+                </a:solidFill>
+              </a:defRPr>
+            </a:pPr>
+            <a:r>
+              <a:t>👉 네, 100% 무기명입니다! 데이터베이스에 사번, 성명, IP 등 사용자 식별 컬럼이 아예 존재하지 않도록 설계되어 절대 추적되지 않습니다.</a:t>
             </a:r>
           </a:p>
         </p:txBody>
@@ -3270,7 +4528,7 @@
               </a:defRPr>
             </a:pPr>
             <a:r>
-              <a:t>STEP 01  |  화면 구성 및 번호별 기능 가이드</a:t>
+              <a:t>STEP 01  |  외부 접속망(HTTPS) 및 모바일 접속 가이드</a:t>
             </a:r>
           </a:p>
           <a:p>
@@ -3282,7 +4540,7 @@
               </a:defRPr>
             </a:pPr>
             <a:r>
-              <a:t>사원번호로 간편 입장하기</a:t>
+              <a:t>외부 접속망(HTTPS) 및 모바일 전용 QR 접속 가이드</a:t>
             </a:r>
           </a:p>
           <a:p>
@@ -3294,7 +4552,7 @@
               </a:defRPr>
             </a:pPr>
             <a:r>
-              <a:t>비밀번호 없이 사원번호 입력만으로 빠르고 안전하게 입장합니다.</a:t>
+              <a:t>사내외 어디서나(LTE/5G/자택/PC) 지정된 외부 보안 링크와 전용 QR 코드로 간편하게 접속합니다.</a:t>
             </a:r>
           </a:p>
         </p:txBody>
@@ -3308,17 +4566,17 @@
         <p:spPr>
           <a:xfrm>
             <a:off x="731520" y="1508760"/>
-            <a:ext cx="4480560" cy="4937760"/>
+            <a:ext cx="3383280" cy="4937760"/>
           </a:xfrm>
           <a:prstGeom prst="roundRect">
             <a:avLst/>
           </a:prstGeom>
           <a:solidFill>
-            <a:srgbClr val="F8FAFC"/>
+            <a:srgbClr val="FFFFFF"/>
           </a:solidFill>
-          <a:ln>
+          <a:ln w="25400">
             <a:solidFill>
-              <a:srgbClr val="E2E8F0"/>
+              <a:srgbClr val="CBD5E1"/>
             </a:solidFill>
           </a:ln>
         </p:spPr>
@@ -3346,14 +4604,68 @@
       </p:sp>
       <p:sp>
         <p:nvSpPr>
-          <p:cNvPr id="4" name="TextBox 3"/>
+          <p:cNvPr id="4" name="Rounded Rectangle 3"/>
+          <p:cNvSpPr/>
+          <p:nvPr/>
+        </p:nvSpPr>
+        <p:spPr>
+          <a:xfrm>
+            <a:off x="960120" y="1691640"/>
+            <a:ext cx="2926080" cy="411480"/>
+          </a:xfrm>
+          <a:prstGeom prst="roundRect">
+            <a:avLst/>
+          </a:prstGeom>
+          <a:solidFill>
+            <a:srgbClr val="F1F5F9"/>
+          </a:solidFill>
+          <a:ln>
+            <a:solidFill>
+              <a:srgbClr val="CBD5E1"/>
+            </a:solidFill>
+          </a:ln>
+        </p:spPr>
+        <p:style>
+          <a:lnRef idx="1">
+            <a:schemeClr val="accent1"/>
+          </a:lnRef>
+          <a:fillRef idx="3">
+            <a:schemeClr val="accent1"/>
+          </a:fillRef>
+          <a:effectRef idx="2">
+            <a:schemeClr val="accent1"/>
+          </a:effectRef>
+          <a:fontRef idx="minor">
+            <a:schemeClr val="lt1"/>
+          </a:fontRef>
+        </p:style>
+        <p:txBody>
+          <a:bodyPr rtlCol="0" anchor="ctr"/>
+          <a:lstStyle/>
+          <a:p>
+            <a:pPr algn="ctr">
+              <a:defRPr sz="1100" b="1">
+                <a:solidFill>
+                  <a:srgbClr val="EA580C"/>
+                </a:solidFill>
+              </a:defRPr>
+            </a:pPr>
+            <a:r>
+              <a:t>접속 방법 01</a:t>
+            </a:r>
+          </a:p>
+        </p:txBody>
+      </p:sp>
+      <p:sp>
+        <p:nvSpPr>
+          <p:cNvPr id="5" name="TextBox 4"/>
           <p:cNvSpPr txBox="1"/>
           <p:nvPr/>
         </p:nvSpPr>
         <p:spPr>
           <a:xfrm>
-            <a:off x="914400" y="1645920"/>
-            <a:ext cx="4114800" cy="4663440"/>
+            <a:off x="914400" y="2194560"/>
+            <a:ext cx="3017520" cy="4114800"/>
           </a:xfrm>
           <a:prstGeom prst="rect">
             <a:avLst/>
@@ -3368,149 +4680,420 @@
           <a:p>
             <a:pPr>
               <a:spcAft>
-                <a:spcPts val="200"/>
+                <a:spcPts val="1000"/>
               </a:spcAft>
-              <a:defRPr sz="1300" b="1">
+              <a:defRPr sz="1700" b="1">
+                <a:solidFill>
+                  <a:srgbClr val="1E3A8A"/>
+                </a:solidFill>
+              </a:defRPr>
+            </a:pPr>
+            <a:r>
+              <a:t>1. 외부 보안 링크 접속 (PC / 태블릿)</a:t>
+            </a:r>
+          </a:p>
+          <a:p>
+            <a:pPr>
+              <a:spcAft>
+                <a:spcPts val="1200"/>
+              </a:spcAft>
+              <a:defRPr sz="1200" b="1">
+                <a:solidFill>
+                  <a:srgbClr val="2563EB"/>
+                </a:solidFill>
+              </a:defRPr>
+            </a:pPr>
+            <a:r>
+              <a:t>▶ https://xxxx.trycloudflare.com</a:t>
+            </a:r>
+            <a:br/>
+            <a:r>
+              <a:t>(관리자 발급 공식 외부 보안 링크)</a:t>
+            </a:r>
+          </a:p>
+          <a:p>
+            <a:pPr>
+              <a:lnSpc>
+                <a:spcPct val="135000"/>
+              </a:lnSpc>
+              <a:defRPr sz="1150">
+                <a:solidFill>
+                  <a:srgbClr val="0F172A"/>
+                </a:solidFill>
+              </a:defRPr>
+            </a:pPr>
+            <a:r>
+              <a:t>• 사내외 어디서나 PC 및 노트북 웹브라우저(Chrome, Edge 권장) 주소창에 보안 HTTPS 링크를 입력하여 접속합니다.</a:t>
+            </a:r>
+            <a:br/>
+            <a:r>
+              <a:t>• 별도의 사내망 연결이나 VPN 설치 없이 24시간 안전한 전송 구간 암호화(HTTPS) 터널을 통해 어디서든 열립니다.</a:t>
+            </a:r>
+            <a:br/>
+            <a:r>
+              <a:t>• 브라우저 상단 즐겨찾기(북마크 ★)에 등록해 두시면 매번 주소를 입력하지 않고 원클릭으로 즉시 접속됩니다.</a:t>
+            </a:r>
+          </a:p>
+        </p:txBody>
+      </p:sp>
+      <p:sp>
+        <p:nvSpPr>
+          <p:cNvPr id="6" name="Rounded Rectangle 5"/>
+          <p:cNvSpPr/>
+          <p:nvPr/>
+        </p:nvSpPr>
+        <p:spPr>
+          <a:xfrm>
+            <a:off x="4389120" y="1508760"/>
+            <a:ext cx="3383280" cy="4937760"/>
+          </a:xfrm>
+          <a:prstGeom prst="roundRect">
+            <a:avLst/>
+          </a:prstGeom>
+          <a:solidFill>
+            <a:srgbClr val="FFFFFF"/>
+          </a:solidFill>
+          <a:ln w="25400">
+            <a:solidFill>
+              <a:srgbClr val="CBD5E1"/>
+            </a:solidFill>
+          </a:ln>
+        </p:spPr>
+        <p:style>
+          <a:lnRef idx="1">
+            <a:schemeClr val="accent1"/>
+          </a:lnRef>
+          <a:fillRef idx="3">
+            <a:schemeClr val="accent1"/>
+          </a:fillRef>
+          <a:effectRef idx="2">
+            <a:schemeClr val="accent1"/>
+          </a:effectRef>
+          <a:fontRef idx="minor">
+            <a:schemeClr val="lt1"/>
+          </a:fontRef>
+        </p:style>
+        <p:txBody>
+          <a:bodyPr rtlCol="0" anchor="ctr"/>
+          <a:lstStyle/>
+          <a:p>
+            <a:pPr algn="ctr"/>
+          </a:p>
+        </p:txBody>
+      </p:sp>
+      <p:sp>
+        <p:nvSpPr>
+          <p:cNvPr id="7" name="Rounded Rectangle 6"/>
+          <p:cNvSpPr/>
+          <p:nvPr/>
+        </p:nvSpPr>
+        <p:spPr>
+          <a:xfrm>
+            <a:off x="4617720" y="1691640"/>
+            <a:ext cx="2926080" cy="411480"/>
+          </a:xfrm>
+          <a:prstGeom prst="roundRect">
+            <a:avLst/>
+          </a:prstGeom>
+          <a:solidFill>
+            <a:srgbClr val="F1F5F9"/>
+          </a:solidFill>
+          <a:ln>
+            <a:solidFill>
+              <a:srgbClr val="CBD5E1"/>
+            </a:solidFill>
+          </a:ln>
+        </p:spPr>
+        <p:style>
+          <a:lnRef idx="1">
+            <a:schemeClr val="accent1"/>
+          </a:lnRef>
+          <a:fillRef idx="3">
+            <a:schemeClr val="accent1"/>
+          </a:fillRef>
+          <a:effectRef idx="2">
+            <a:schemeClr val="accent1"/>
+          </a:effectRef>
+          <a:fontRef idx="minor">
+            <a:schemeClr val="lt1"/>
+          </a:fontRef>
+        </p:style>
+        <p:txBody>
+          <a:bodyPr rtlCol="0" anchor="ctr"/>
+          <a:lstStyle/>
+          <a:p>
+            <a:pPr algn="ctr">
+              <a:defRPr sz="1100" b="1">
                 <a:solidFill>
                   <a:srgbClr val="EA580C"/>
                 </a:solidFill>
               </a:defRPr>
             </a:pPr>
             <a:r>
-              <a:t>① v1.43 버전 뱃지 확인</a:t>
-            </a:r>
-          </a:p>
+              <a:t>접속 방법 02</a:t>
+            </a:r>
+          </a:p>
+        </p:txBody>
+      </p:sp>
+      <p:sp>
+        <p:nvSpPr>
+          <p:cNvPr id="8" name="TextBox 7"/>
+          <p:cNvSpPr txBox="1"/>
+          <p:nvPr/>
+        </p:nvSpPr>
+        <p:spPr>
+          <a:xfrm>
+            <a:off x="4572000" y="2194560"/>
+            <a:ext cx="3017520" cy="4114800"/>
+          </a:xfrm>
+          <a:prstGeom prst="rect">
+            <a:avLst/>
+          </a:prstGeom>
+          <a:noFill/>
+        </p:spPr>
+        <p:txBody>
+          <a:bodyPr wrap="square">
+            <a:spAutoFit/>
+          </a:bodyPr>
+          <a:lstStyle/>
           <a:p>
             <a:pPr>
               <a:spcAft>
                 <a:spcPts val="1000"/>
               </a:spcAft>
-              <a:defRPr sz="1100">
+              <a:defRPr sz="1700" b="1">
+                <a:solidFill>
+                  <a:srgbClr val="1E3A8A"/>
+                </a:solidFill>
+              </a:defRPr>
+            </a:pPr>
+            <a:r>
+              <a:t>2. 외부 모바일 QR 스캔 접속</a:t>
+            </a:r>
+          </a:p>
+          <a:p>
+            <a:pPr>
+              <a:spcAft>
+                <a:spcPts val="1200"/>
+              </a:spcAft>
+              <a:defRPr sz="1200" b="1">
+                <a:solidFill>
+                  <a:srgbClr val="2563EB"/>
+                </a:solidFill>
+              </a:defRPr>
+            </a:pPr>
+            <a:r>
+              <a:t>▶ 화면 상단 [📱 모바일 QR] 스캔</a:t>
+            </a:r>
+            <a:br/>
+            <a:r>
+              <a:t>(스마트폰 LTE / 5G 전용)</a:t>
+            </a:r>
+          </a:p>
+          <a:p>
+            <a:pPr>
+              <a:lnSpc>
+                <a:spcPct val="135000"/>
+              </a:lnSpc>
+              <a:defRPr sz="1150">
                 <a:solidFill>
                   <a:srgbClr val="0F172A"/>
                 </a:solidFill>
               </a:defRPr>
             </a:pPr>
             <a:r>
-              <a:t>화면 오른쪽 위에 파란색 [v1.43] 뱃지가 보이면 최신 버전입니다. 클릭 시 신규 릴리즈 이력이 표시됩니다.</a:t>
-            </a:r>
-          </a:p>
-          <a:p>
-            <a:pPr>
-              <a:spcAft>
-                <a:spcPts val="200"/>
-              </a:spcAft>
-              <a:defRPr sz="1300" b="1">
+              <a:t>• 스마트폰 기본 카메라 앱을 켜고 화면 상단 [📱 모바일 접속 QR]을 비추면 외부망 접속 링크가 즉시 나타납니다.</a:t>
+            </a:r>
+            <a:br/>
+            <a:r>
+              <a:t>• 사내 Wi-Fi 연결 여부와 상관없이 LTE/5G 데이터망으로 언제 어디서나 이동 중에도 특근 신청 및 조회가 가능합니다.</a:t>
+            </a:r>
+            <a:br/>
+            <a:r>
+              <a:t>• 스마트폰에서 신청한 내역은 PC 관리자 화면 및 대시보드와 100% 실시간 동일하게 동기화됩니다.</a:t>
+            </a:r>
+          </a:p>
+        </p:txBody>
+      </p:sp>
+      <p:sp>
+        <p:nvSpPr>
+          <p:cNvPr id="9" name="Rounded Rectangle 8"/>
+          <p:cNvSpPr/>
+          <p:nvPr/>
+        </p:nvSpPr>
+        <p:spPr>
+          <a:xfrm>
+            <a:off x="8046720" y="1508760"/>
+            <a:ext cx="3383280" cy="4937760"/>
+          </a:xfrm>
+          <a:prstGeom prst="roundRect">
+            <a:avLst/>
+          </a:prstGeom>
+          <a:solidFill>
+            <a:srgbClr val="FFFFFF"/>
+          </a:solidFill>
+          <a:ln w="25400">
+            <a:solidFill>
+              <a:srgbClr val="CBD5E1"/>
+            </a:solidFill>
+          </a:ln>
+        </p:spPr>
+        <p:style>
+          <a:lnRef idx="1">
+            <a:schemeClr val="accent1"/>
+          </a:lnRef>
+          <a:fillRef idx="3">
+            <a:schemeClr val="accent1"/>
+          </a:fillRef>
+          <a:effectRef idx="2">
+            <a:schemeClr val="accent1"/>
+          </a:effectRef>
+          <a:fontRef idx="minor">
+            <a:schemeClr val="lt1"/>
+          </a:fontRef>
+        </p:style>
+        <p:txBody>
+          <a:bodyPr rtlCol="0" anchor="ctr"/>
+          <a:lstStyle/>
+          <a:p>
+            <a:pPr algn="ctr"/>
+          </a:p>
+        </p:txBody>
+      </p:sp>
+      <p:sp>
+        <p:nvSpPr>
+          <p:cNvPr id="10" name="Rounded Rectangle 9"/>
+          <p:cNvSpPr/>
+          <p:nvPr/>
+        </p:nvSpPr>
+        <p:spPr>
+          <a:xfrm>
+            <a:off x="8275320" y="1691640"/>
+            <a:ext cx="2926080" cy="411480"/>
+          </a:xfrm>
+          <a:prstGeom prst="roundRect">
+            <a:avLst/>
+          </a:prstGeom>
+          <a:solidFill>
+            <a:srgbClr val="F1F5F9"/>
+          </a:solidFill>
+          <a:ln>
+            <a:solidFill>
+              <a:srgbClr val="CBD5E1"/>
+            </a:solidFill>
+          </a:ln>
+        </p:spPr>
+        <p:style>
+          <a:lnRef idx="1">
+            <a:schemeClr val="accent1"/>
+          </a:lnRef>
+          <a:fillRef idx="3">
+            <a:schemeClr val="accent1"/>
+          </a:fillRef>
+          <a:effectRef idx="2">
+            <a:schemeClr val="accent1"/>
+          </a:effectRef>
+          <a:fontRef idx="minor">
+            <a:schemeClr val="lt1"/>
+          </a:fontRef>
+        </p:style>
+        <p:txBody>
+          <a:bodyPr rtlCol="0" anchor="ctr"/>
+          <a:lstStyle/>
+          <a:p>
+            <a:pPr algn="ctr">
+              <a:defRPr sz="1100" b="1">
                 <a:solidFill>
                   <a:srgbClr val="EA580C"/>
                 </a:solidFill>
               </a:defRPr>
             </a:pPr>
             <a:r>
-              <a:t>② 사원번호 간편 입력</a:t>
-            </a:r>
-          </a:p>
+              <a:t>접속 방법 03</a:t>
+            </a:r>
+          </a:p>
+        </p:txBody>
+      </p:sp>
+      <p:sp>
+        <p:nvSpPr>
+          <p:cNvPr id="11" name="TextBox 10"/>
+          <p:cNvSpPr txBox="1"/>
+          <p:nvPr/>
+        </p:nvSpPr>
+        <p:spPr>
+          <a:xfrm>
+            <a:off x="8229600" y="2194560"/>
+            <a:ext cx="3017520" cy="4114800"/>
+          </a:xfrm>
+          <a:prstGeom prst="rect">
+            <a:avLst/>
+          </a:prstGeom>
+          <a:noFill/>
+        </p:spPr>
+        <p:txBody>
+          <a:bodyPr wrap="square">
+            <a:spAutoFit/>
+          </a:bodyPr>
+          <a:lstStyle/>
           <a:p>
             <a:pPr>
               <a:spcAft>
                 <a:spcPts val="1000"/>
               </a:spcAft>
-              <a:defRPr sz="1100">
+              <a:defRPr sz="1700" b="1">
+                <a:solidFill>
+                  <a:srgbClr val="1E3A8A"/>
+                </a:solidFill>
+              </a:defRPr>
+            </a:pPr>
+            <a:r>
+              <a:t>3. 스마트폰 홈 화면 추가 (앱 모드)</a:t>
+            </a:r>
+          </a:p>
+          <a:p>
+            <a:pPr>
+              <a:spcAft>
+                <a:spcPts val="1200"/>
+              </a:spcAft>
+              <a:defRPr sz="1200" b="1">
+                <a:solidFill>
+                  <a:srgbClr val="2563EB"/>
+                </a:solidFill>
+              </a:defRPr>
+            </a:pPr>
+            <a:r>
+              <a:t>▶ 브라우저 메뉴 ▶ [홈 화면에 추가]</a:t>
+            </a:r>
+            <a:br/>
+            <a:r>
+              <a:t>(바탕화면 원클릭 간편 실행)</a:t>
+            </a:r>
+          </a:p>
+          <a:p>
+            <a:pPr>
+              <a:lnSpc>
+                <a:spcPct val="135000"/>
+              </a:lnSpc>
+              <a:defRPr sz="1150">
                 <a:solidFill>
                   <a:srgbClr val="0F172A"/>
                 </a:solidFill>
               </a:defRPr>
             </a:pPr>
             <a:r>
-              <a:t>본인의 사원번호를 입력합니다. 복잡한 비밀번호 없이 빠르게 입장 가능합니다.</a:t>
-            </a:r>
-          </a:p>
-          <a:p>
-            <a:pPr>
-              <a:spcAft>
-                <a:spcPts val="200"/>
-              </a:spcAft>
-              <a:defRPr sz="1300" b="1">
-                <a:solidFill>
-                  <a:srgbClr val="EA580C"/>
-                </a:solidFill>
-              </a:defRPr>
-            </a:pPr>
-            <a:r>
-              <a:t>③ [입장하기] 버튼 클릭</a:t>
-            </a:r>
-          </a:p>
-          <a:p>
-            <a:pPr>
-              <a:spcAft>
-                <a:spcPts val="1000"/>
-              </a:spcAft>
-              <a:defRPr sz="1100">
-                <a:solidFill>
-                  <a:srgbClr val="0F172A"/>
-                </a:solidFill>
-              </a:defRPr>
-            </a:pPr>
-            <a:r>
-              <a:t>등록된 사원은 이름과 소속팀이 자동 조회되어 즉시 메인 대시보드로 이동합니다.</a:t>
-            </a:r>
-          </a:p>
-          <a:p>
-            <a:pPr>
-              <a:spcAft>
-                <a:spcPts val="200"/>
-              </a:spcAft>
-              <a:defRPr sz="1300" b="1">
-                <a:solidFill>
-                  <a:srgbClr val="EA580C"/>
-                </a:solidFill>
-              </a:defRPr>
-            </a:pPr>
-            <a:r>
-              <a:t>④ 미등록 사번 즉시 등록</a:t>
-            </a:r>
-          </a:p>
-          <a:p>
-            <a:pPr>
-              <a:spcAft>
-                <a:spcPts val="1000"/>
-              </a:spcAft>
-              <a:defRPr sz="1100">
-                <a:solidFill>
-                  <a:srgbClr val="0F172A"/>
-                </a:solidFill>
-              </a:defRPr>
-            </a:pPr>
-            <a:r>
-              <a:t>처음 방문한 사번은 신규 등록창이 나타나며, 성명과 소속팀을 선택하면 즉시 등록되어 입장합니다.</a:t>
-            </a:r>
-          </a:p>
-        </p:txBody>
-      </p:sp>
-      <p:pic>
-        <p:nvPicPr>
-          <p:cNvPr id="5" name="Picture 4" descr="mockup_login.png"/>
-          <p:cNvPicPr>
-            <a:picLocks noChangeAspect="1"/>
-          </p:cNvPicPr>
-          <p:nvPr/>
-        </p:nvPicPr>
-        <p:blipFill>
-          <a:blip r:embed="rId2"/>
-          <a:stretch>
-            <a:fillRect/>
-          </a:stretch>
-        </p:blipFill>
-        <p:spPr>
-          <a:xfrm>
-            <a:off x="5394960" y="1508760"/>
-            <a:ext cx="6035040" cy="3745887"/>
-          </a:xfrm>
-          <a:prstGeom prst="rect">
-            <a:avLst/>
-          </a:prstGeom>
-        </p:spPr>
-      </p:pic>
+              <a:t>• 스마트폰 브라우저 메뉴에서 [홈 화면에 추가]를 터치하시면 스마트폰 바탕화면에 전용 앱 아이콘이 생성됩니다.</a:t>
+            </a:r>
+            <a:br/>
+            <a:r>
+              <a:t>• 매번 주소를 치거나 QR을 찍을 필요 없이 앱처럼 터치 한 번으로 1초 만에 시스템에 바로 입장할 수 있습니다.</a:t>
+            </a:r>
+            <a:br/>
+            <a:r>
+              <a:t>• 로그인 세션이 안전하게 유지되어 언제든 빠르게 본인 특근 일정과 승인 도장을 확인하실 수 있습니다.</a:t>
+            </a:r>
+          </a:p>
+        </p:txBody>
+      </p:sp>
     </p:spTree>
   </p:cSld>
   <p:clrMapOvr>
@@ -3537,8 +5120,8 @@
         </p:nvSpPr>
         <p:spPr>
           <a:xfrm>
-            <a:off x="731520" y="365760"/>
-            <a:ext cx="10698480" cy="1005840"/>
+            <a:off x="548640" y="320040"/>
+            <a:ext cx="11155680" cy="1005840"/>
           </a:xfrm>
           <a:prstGeom prst="rect">
             <a:avLst/>
@@ -3571,7 +5154,7 @@
               </a:defRPr>
             </a:pPr>
             <a:r>
-              <a:t>스마트 달력 기반 특근 신청</a:t>
+              <a:t>최초 접속 및 서버 리부팅 시 초기화 대기 안내</a:t>
             </a:r>
           </a:p>
           <a:p>
@@ -3583,7 +5166,7 @@
               </a:defRPr>
             </a:pPr>
             <a:r>
-              <a:t>일반휴일 및 이번 주 토요일이 기본 선택되어 몇 초 만에 신청이 완료됩니다.</a:t>
+              <a:t>서버 최초 기동 또는 리부팅 직후에는 약 10~20초 동안 안전 초기화가 진행되므로 잠시 기다려주세요.</a:t>
             </a:r>
           </a:p>
         </p:txBody>
@@ -3596,8 +5179,8 @@
         </p:nvSpPr>
         <p:spPr>
           <a:xfrm>
-            <a:off x="731520" y="1508760"/>
-            <a:ext cx="4480560" cy="4937760"/>
+            <a:off x="548640" y="1417320"/>
+            <a:ext cx="3474720" cy="5166360"/>
           </a:xfrm>
           <a:prstGeom prst="roundRect">
             <a:avLst/>
@@ -3641,8 +5224,8 @@
         </p:nvSpPr>
         <p:spPr>
           <a:xfrm>
-            <a:off x="914400" y="1645920"/>
-            <a:ext cx="4114800" cy="4663440"/>
+            <a:off x="685800" y="1554480"/>
+            <a:ext cx="3200400" cy="4892040"/>
           </a:xfrm>
           <a:prstGeom prst="rect">
             <a:avLst/>
@@ -3659,29 +5242,29 @@
               <a:spcAft>
                 <a:spcPts val="200"/>
               </a:spcAft>
-              <a:defRPr sz="1300" b="1">
+              <a:defRPr sz="1250" b="1">
                 <a:solidFill>
                   <a:srgbClr val="EA580C"/>
                 </a:solidFill>
               </a:defRPr>
             </a:pPr>
             <a:r>
-              <a:t>① [일반휴일] 기본 선택 &amp; 토요일 자동 세팅</a:t>
+              <a:t>① 외부 보안 접속 주소 입력 &amp; 연결</a:t>
             </a:r>
           </a:p>
           <a:p>
             <a:pPr>
               <a:spcAft>
-                <a:spcPts val="1000"/>
+                <a:spcPts val="800"/>
               </a:spcAft>
-              <a:defRPr sz="1100">
+              <a:defRPr sz="1050">
                 <a:solidFill>
                   <a:srgbClr val="0F172A"/>
                 </a:solidFill>
               </a:defRPr>
             </a:pPr>
             <a:r>
-              <a:t>주말 특근에 가장 많이 쓰이는 '일반휴일'이 디폴트로 선택되며, 시작일/종료일이 이번 주 토요일로 자동 설정됩니다.</a:t>
+              <a:t>배포된 외부 보안 링크(HTTPS)를 브라우저에 입력하여 첫 접속을 시작합니다.</a:t>
             </a:r>
           </a:p>
           <a:p>
@@ -3689,29 +5272,29 @@
               <a:spcAft>
                 <a:spcPts val="200"/>
               </a:spcAft>
-              <a:defRPr sz="1300" b="1">
+              <a:defRPr sz="1250" b="1">
                 <a:solidFill>
                   <a:srgbClr val="EA580C"/>
                 </a:solidFill>
               </a:defRPr>
             </a:pPr>
             <a:r>
-              <a:t>② 시작일/종료일 상호 자동 동기화 (v1.35 신규)</a:t>
+              <a:t>② 약 10~20초 초기 구동 대기</a:t>
             </a:r>
           </a:p>
           <a:p>
             <a:pPr>
               <a:spcAft>
-                <a:spcPts val="1000"/>
+                <a:spcPts val="800"/>
               </a:spcAft>
-              <a:defRPr sz="1100">
+              <a:defRPr sz="1050">
                 <a:solidFill>
                   <a:srgbClr val="0F172A"/>
                 </a:solidFill>
               </a:defRPr>
             </a:pPr>
             <a:r>
-              <a:t>시작일(또는 종료일)을 선택하면 다른 날짜도 동일하게 자동 변경되며, 이후 두 번째 날짜를 변경해 2단계로 자유롭게 범위를 설정합니다.</a:t>
+              <a:t>서버 최초 기동 또는 PC 리부팅 직후 1회에 한해 보안 터널 및 DB 초기화(약 10~20초) 대기 시간이 발생합니다.</a:t>
             </a:r>
           </a:p>
           <a:p>
@@ -3719,29 +5302,29 @@
               <a:spcAft>
                 <a:spcPts val="200"/>
               </a:spcAft>
-              <a:defRPr sz="1300" b="1">
+              <a:defRPr sz="1250" b="1">
                 <a:solidFill>
                   <a:srgbClr val="EA580C"/>
                 </a:solidFill>
               </a:defRPr>
             </a:pPr>
             <a:r>
-              <a:t>③ 프로젝트번호/장소/사유 입력 가이드</a:t>
+              <a:t>③ DB 무결성 &amp; 자동 백업 진행</a:t>
             </a:r>
           </a:p>
           <a:p>
             <a:pPr>
               <a:spcAft>
-                <a:spcPts val="1000"/>
+                <a:spcPts val="800"/>
               </a:spcAft>
-              <a:defRPr sz="1100">
+              <a:defRPr sz="1050">
                 <a:solidFill>
                   <a:srgbClr val="0F172A"/>
                 </a:solidFill>
               </a:defRPr>
             </a:pPr>
             <a:r>
-              <a:t>프로젝트번호(예: BT2601-L1), 근무장소(예: 본사5층), 특근사유(예: 프로그램 개발) 예시 가이드가 기본 제공됩니다.</a:t>
+              <a:t>데이터 유실 방지를 위한 SQLite WAL 무결성 검증 및 백업이 안전하게 수행됩니다.</a:t>
             </a:r>
           </a:p>
           <a:p>
@@ -3749,36 +5332,36 @@
               <a:spcAft>
                 <a:spcPts val="200"/>
               </a:spcAft>
-              <a:defRPr sz="1300" b="1">
+              <a:defRPr sz="1250" b="1">
                 <a:solidFill>
                   <a:srgbClr val="EA580C"/>
                 </a:solidFill>
               </a:defRPr>
             </a:pPr>
             <a:r>
-              <a:t>④ 달력 인터랙티브 날짜 선택 &amp; 중복 방지</a:t>
+              <a:t>④ 새로고침(F5) 연타 금지!</a:t>
             </a:r>
           </a:p>
           <a:p>
             <a:pPr>
               <a:spcAft>
-                <a:spcPts val="1000"/>
+                <a:spcPts val="800"/>
               </a:spcAft>
-              <a:defRPr sz="1100">
+              <a:defRPr sz="1050">
                 <a:solidFill>
                   <a:srgbClr val="0F172A"/>
                 </a:solidFill>
               </a:defRPr>
             </a:pPr>
             <a:r>
-              <a:t>오른쪽 달력에서 날짜를 터치하여 선택할 수 있으며, 동일한 날짜에 중복 신청하는 실수를 사전에 원천 차단합니다.</a:t>
+              <a:t>외부망 연결 초기화 중 새로고침을 연타하지 마시고 잠시 대기하시면 로그인 화면으로 자동 전환됩니다.</a:t>
             </a:r>
           </a:p>
         </p:txBody>
       </p:sp>
       <p:pic>
         <p:nvPicPr>
-          <p:cNvPr id="5" name="Picture 4" descr="mockup_apply.png"/>
+          <p:cNvPr id="5" name="Picture 4" descr="mockup_server_init.png"/>
           <p:cNvPicPr>
             <a:picLocks noChangeAspect="1"/>
           </p:cNvPicPr>
@@ -3792,8 +5375,8 @@
         </p:blipFill>
         <p:spPr>
           <a:xfrm>
-            <a:off x="5394960" y="1508760"/>
-            <a:ext cx="6035040" cy="3745887"/>
+            <a:off x="4160520" y="1417320"/>
+            <a:ext cx="7543800" cy="5166360"/>
           </a:xfrm>
           <a:prstGeom prst="rect">
             <a:avLst/>
@@ -3826,8 +5409,8 @@
         </p:nvSpPr>
         <p:spPr>
           <a:xfrm>
-            <a:off x="731520" y="365760"/>
-            <a:ext cx="10698480" cy="1005840"/>
+            <a:off x="548640" y="320040"/>
+            <a:ext cx="11155680" cy="1005840"/>
           </a:xfrm>
           <a:prstGeom prst="rect">
             <a:avLst/>
@@ -3860,7 +5443,7 @@
               </a:defRPr>
             </a:pPr>
             <a:r>
-              <a:t>나의 특근 신청 내역 및 다차원 검색</a:t>
+              <a:t>사원번호로 간편 입장하기</a:t>
             </a:r>
           </a:p>
           <a:p>
@@ -3872,7 +5455,7 @@
               </a:defRPr>
             </a:pPr>
             <a:r>
-              <a:t>다양한 검색 조건과 개인 달력 뷰로 본인의 특근 일정을 편리하게 확인합니다.</a:t>
+              <a:t>비밀번호 없이 사원번호 6자리 입력만으로 빠르고 안전하게 입장합니다.</a:t>
             </a:r>
           </a:p>
         </p:txBody>
@@ -3885,8 +5468,8 @@
         </p:nvSpPr>
         <p:spPr>
           <a:xfrm>
-            <a:off x="731520" y="1508760"/>
-            <a:ext cx="4480560" cy="4937760"/>
+            <a:off x="548640" y="1417320"/>
+            <a:ext cx="3474720" cy="5166360"/>
           </a:xfrm>
           <a:prstGeom prst="roundRect">
             <a:avLst/>
@@ -3930,8 +5513,8 @@
         </p:nvSpPr>
         <p:spPr>
           <a:xfrm>
-            <a:off x="914400" y="1645920"/>
-            <a:ext cx="4114800" cy="4663440"/>
+            <a:off x="685800" y="1554480"/>
+            <a:ext cx="3200400" cy="4892040"/>
           </a:xfrm>
           <a:prstGeom prst="rect">
             <a:avLst/>
@@ -3948,29 +5531,29 @@
               <a:spcAft>
                 <a:spcPts val="200"/>
               </a:spcAft>
-              <a:defRPr sz="1300" b="1">
+              <a:defRPr sz="1250" b="1">
                 <a:solidFill>
                   <a:srgbClr val="EA580C"/>
                 </a:solidFill>
               </a:defRPr>
             </a:pPr>
             <a:r>
-              <a:t>① 실시간 검색 결과 통계 요약 바 (v1.35 신규)</a:t>
+              <a:t>① v1.44 최신 버전 배지 확인</a:t>
             </a:r>
           </a:p>
           <a:p>
             <a:pPr>
               <a:spcAft>
-                <a:spcPts val="1000"/>
+                <a:spcPts val="800"/>
               </a:spcAft>
-              <a:defRPr sz="1100">
+              <a:defRPr sz="1050">
                 <a:solidFill>
                   <a:srgbClr val="0F172A"/>
                 </a:solidFill>
               </a:defRPr>
             </a:pPr>
             <a:r>
-              <a:t>검색 조건에 맞춰 총 건수(총 일수), 승인완료/대기 건수, 일반/법정/대체근무별 수량이 미니 통계 칩으로 실시간 집계 표시됩니다.</a:t>
+              <a:t>화면 오른쪽 위에 파란색 [v1.43] 배지가 보이면 최신 버전입니다. 클릭 시 신규 릴리즈 이력이 표시됩니다.</a:t>
             </a:r>
           </a:p>
           <a:p>
@@ -3978,29 +5561,29 @@
               <a:spcAft>
                 <a:spcPts val="200"/>
               </a:spcAft>
-              <a:defRPr sz="1300" b="1">
+              <a:defRPr sz="1250" b="1">
                 <a:solidFill>
                   <a:srgbClr val="EA580C"/>
                 </a:solidFill>
               </a:defRPr>
             </a:pPr>
             <a:r>
-              <a:t>② 다차원 검색 필터 (요구사항 5)</a:t>
+              <a:t>② 사원번호 6자리 숫자 입력</a:t>
             </a:r>
           </a:p>
           <a:p>
             <a:pPr>
               <a:spcAft>
-                <a:spcPts val="1000"/>
+                <a:spcPts val="800"/>
               </a:spcAft>
-              <a:defRPr sz="1100">
+              <a:defRPr sz="1050">
                 <a:solidFill>
                   <a:srgbClr val="0F172A"/>
                 </a:solidFill>
               </a:defRPr>
             </a:pPr>
             <a:r>
-              <a:t>조회기간, 특근구분, 승인상태 및 프로젝트/장소/사유 통합 키워드 검색으로 원하는 특근을 즉시 찾습니다.</a:t>
+              <a:t>본인의 6자리 사원번호를 입력창에 기재합니다. 복잡한 비밀번호 없이 빠르게 입장 가능합니다.</a:t>
             </a:r>
           </a:p>
           <a:p>
@@ -4008,29 +5591,29 @@
               <a:spcAft>
                 <a:spcPts val="200"/>
               </a:spcAft>
-              <a:defRPr sz="1300" b="1">
+              <a:defRPr sz="1250" b="1">
                 <a:solidFill>
                   <a:srgbClr val="EA580C"/>
                 </a:solidFill>
               </a:defRPr>
             </a:pPr>
             <a:r>
-              <a:t>③ 목록 보기 ↔ 개인 달력 보기 전환</a:t>
+              <a:t>③ [입장하기] 원클릭 이동</a:t>
             </a:r>
           </a:p>
           <a:p>
             <a:pPr>
               <a:spcAft>
-                <a:spcPts val="1000"/>
+                <a:spcPts val="800"/>
               </a:spcAft>
-              <a:defRPr sz="1100">
+              <a:defRPr sz="1050">
                 <a:solidFill>
                   <a:srgbClr val="0F172A"/>
                 </a:solidFill>
               </a:defRPr>
             </a:pPr>
             <a:r>
-              <a:t>신청 내역을 카드 리스트 형태뿐만 아니라 개인 전용 월간 달력 형태로도 한눈에 확인할 수 있습니다.</a:t>
+              <a:t>입력 후 [입장하기]를 누르면 등록된 이름과 소속팀이 자동 확인되어 대시보드로 즉시 입장합니다.</a:t>
             </a:r>
           </a:p>
           <a:p>
@@ -4038,36 +5621,36 @@
               <a:spcAft>
                 <a:spcPts val="200"/>
               </a:spcAft>
-              <a:defRPr sz="1300" b="1">
+              <a:defRPr sz="1250" b="1">
                 <a:solidFill>
                   <a:srgbClr val="EA580C"/>
                 </a:solidFill>
               </a:defRPr>
             </a:pPr>
             <a:r>
-              <a:t>④ 승인 상태 및 대체휴일 명확 표시 &amp; 수정/취소</a:t>
+              <a:t>④ 미등록 사번 1초 즉시 등록</a:t>
             </a:r>
           </a:p>
           <a:p>
             <a:pPr>
               <a:spcAft>
-                <a:spcPts val="1000"/>
+                <a:spcPts val="800"/>
               </a:spcAft>
-              <a:defRPr sz="1100">
+              <a:defRPr sz="1050">
                 <a:solidFill>
                   <a:srgbClr val="0F172A"/>
                 </a:solidFill>
               </a:defRPr>
             </a:pPr>
             <a:r>
-              <a:t>관리자 승인 시 [✓ 확인완료] 표시, 대휴 일수 안내, 일정 변경 시 [수정], 취소 시 [삭제] 및 이력이 안전 보존됩니다.</a:t>
+              <a:t>처음 방문한 사번은 신규 등록창이 나타나며, 성명과 소속 부서를 선택하면 즉시 등록되어 입장합니다.</a:t>
             </a:r>
           </a:p>
         </p:txBody>
       </p:sp>
       <p:pic>
         <p:nvPicPr>
-          <p:cNvPr id="5" name="Picture 4" descr="mockup_my.png"/>
+          <p:cNvPr id="5" name="Picture 4" descr="mockup_login.png"/>
           <p:cNvPicPr>
             <a:picLocks noChangeAspect="1"/>
           </p:cNvPicPr>
@@ -4081,8 +5664,8 @@
         </p:blipFill>
         <p:spPr>
           <a:xfrm>
-            <a:off x="5394960" y="1508760"/>
-            <a:ext cx="6035040" cy="3745887"/>
+            <a:off x="4160520" y="1417320"/>
+            <a:ext cx="7543800" cy="5166360"/>
           </a:xfrm>
           <a:prstGeom prst="rect">
             <a:avLst/>
@@ -4137,7 +5720,7 @@
               </a:defRPr>
             </a:pPr>
             <a:r>
-              <a:t>STEP 04  |  스마트폰 모바일 및 외부망 접속 가이드</a:t>
+              <a:t>STEP 04  |  재입장(재접속) 시 핵심 유의사항 가이드</a:t>
             </a:r>
           </a:p>
           <a:p>
@@ -4149,7 +5732,7 @@
               </a:defRPr>
             </a:pPr>
             <a:r>
-              <a:t>모바일 및 외부망(LTE/5G/사외) 간편 접속</a:t>
+              <a:t>다시 접속(재입장)할 때 꼭 알아두어야 할 4대 핵심 가이드</a:t>
             </a:r>
           </a:p>
           <a:p>
@@ -4161,7 +5744,7 @@
               </a:defRPr>
             </a:pPr>
             <a:r>
-              <a:t>PC 앞이 아니어도 스마트폰으로 특근을 신청하고 실시간 승인 현황을 확인할 수 있습니다.</a:t>
+              <a:t>사번 자동 완성, 멀티 디바이스 실시간 동기화, 최신 상태 갱신 및 공용 PC 보안 수칙을 확인하세요.</a:t>
             </a:r>
           </a:p>
         </p:txBody>
@@ -4174,8 +5757,8 @@
         </p:nvSpPr>
         <p:spPr>
           <a:xfrm>
-            <a:off x="731520" y="1645920"/>
-            <a:ext cx="3383280" cy="4389120"/>
+            <a:off x="731520" y="1508760"/>
+            <a:ext cx="5212080" cy="2377440"/>
           </a:xfrm>
           <a:prstGeom prst="roundRect">
             <a:avLst/>
@@ -4183,7 +5766,7 @@
           <a:solidFill>
             <a:srgbClr val="FFFFFF"/>
           </a:solidFill>
-          <a:ln w="25400">
+          <a:ln w="19050">
             <a:solidFill>
               <a:srgbClr val="CBD5E1"/>
             </a:solidFill>
@@ -4219,8 +5802,8 @@
         </p:nvSpPr>
         <p:spPr>
           <a:xfrm>
-            <a:off x="914400" y="1828800"/>
-            <a:ext cx="3017520" cy="3931920"/>
+            <a:off x="914400" y="1645920"/>
+            <a:ext cx="4846320" cy="2103120"/>
           </a:xfrm>
           <a:prstGeom prst="rect">
             <a:avLst/>
@@ -4237,29 +5820,14 @@
               <a:spcAft>
                 <a:spcPts val="800"/>
               </a:spcAft>
-              <a:defRPr sz="1200" b="1">
-                <a:solidFill>
-                  <a:srgbClr val="EA580C"/>
-                </a:solidFill>
-              </a:defRPr>
-            </a:pPr>
-            <a:r>
-              <a:t>단계 01</a:t>
-            </a:r>
-          </a:p>
-          <a:p>
-            <a:pPr>
-              <a:spcAft>
-                <a:spcPts val="1400"/>
-              </a:spcAft>
-              <a:defRPr sz="1800" b="1">
+              <a:defRPr sz="1500" b="1">
                 <a:solidFill>
                   <a:srgbClr val="1E3A8A"/>
                 </a:solidFill>
               </a:defRPr>
             </a:pPr>
             <a:r>
-              <a:t>1. 모바일 접속 QR 확인</a:t>
+              <a:t>유의사항 01  |  1. 사원번호 자동 완성 (원클릭 재입장)</a:t>
             </a:r>
           </a:p>
           <a:p>
@@ -4267,14 +5835,22 @@
               <a:lnSpc>
                 <a:spcPct val="130000"/>
               </a:lnSpc>
-              <a:defRPr sz="1300">
+              <a:defRPr sz="1150">
                 <a:solidFill>
                   <a:srgbClr val="0F172A"/>
                 </a:solidFill>
               </a:defRPr>
             </a:pPr>
             <a:r>
-              <a:t>상단 [📱 모바일 접속 QR]을 누르면 스마트폰으로 스캔할 수 있는 고해상도 QR 코드가 표시됩니다.</a:t>
+              <a:t>• 브라우저 로컬 저장소(LocalStorage)에 직전에 로그인했던 본인 사번 6자리가 안전하게 기억됩니다.</a:t>
+            </a:r>
+            <a:br/>
+            <a:r>
+              <a:t>• 창을 닫았다가 다시 열었을 때 사번을 재입력할 필요 없이 [입장하기] 버튼만 누르면 1초 만에 바로 진입합니다.</a:t>
+            </a:r>
+            <a:br/>
+            <a:r>
+              <a:t>• 다른 사번으로 로그인해야 할 때는 입력창의 숫자를 지우고 새 사번을 입력하시면 됩니다.</a:t>
             </a:r>
           </a:p>
         </p:txBody>
@@ -4287,8 +5863,8 @@
         </p:nvSpPr>
         <p:spPr>
           <a:xfrm>
-            <a:off x="4389120" y="1645920"/>
-            <a:ext cx="3383280" cy="4389120"/>
+            <a:off x="6217920" y="1508760"/>
+            <a:ext cx="5212080" cy="2377440"/>
           </a:xfrm>
           <a:prstGeom prst="roundRect">
             <a:avLst/>
@@ -4296,7 +5872,7 @@
           <a:solidFill>
             <a:srgbClr val="FFFFFF"/>
           </a:solidFill>
-          <a:ln w="25400">
+          <a:ln w="19050">
             <a:solidFill>
               <a:srgbClr val="CBD5E1"/>
             </a:solidFill>
@@ -4332,8 +5908,8 @@
         </p:nvSpPr>
         <p:spPr>
           <a:xfrm>
-            <a:off x="4572000" y="1828800"/>
-            <a:ext cx="3017520" cy="3931920"/>
+            <a:off x="6400800" y="1645920"/>
+            <a:ext cx="4846320" cy="2103120"/>
           </a:xfrm>
           <a:prstGeom prst="rect">
             <a:avLst/>
@@ -4350,29 +5926,14 @@
               <a:spcAft>
                 <a:spcPts val="800"/>
               </a:spcAft>
-              <a:defRPr sz="1200" b="1">
-                <a:solidFill>
-                  <a:srgbClr val="EA580C"/>
-                </a:solidFill>
-              </a:defRPr>
-            </a:pPr>
-            <a:r>
-              <a:t>단계 02</a:t>
-            </a:r>
-          </a:p>
-          <a:p>
-            <a:pPr>
-              <a:spcAft>
-                <a:spcPts val="1400"/>
-              </a:spcAft>
-              <a:defRPr sz="1800" b="1">
+              <a:defRPr sz="1500" b="1">
                 <a:solidFill>
                   <a:srgbClr val="1E3A8A"/>
                 </a:solidFill>
               </a:defRPr>
             </a:pPr>
             <a:r>
-              <a:t>2. 외부망 URL QR 생성</a:t>
+              <a:t>유의사항 02  |  2. PC ↔ 스마트폰 실시간 100% 동기화</a:t>
             </a:r>
           </a:p>
           <a:p>
@@ -4380,14 +5941,22 @@
               <a:lnSpc>
                 <a:spcPct val="130000"/>
               </a:lnSpc>
-              <a:defRPr sz="1300">
+              <a:defRPr sz="1150">
                 <a:solidFill>
                   <a:srgbClr val="0F172A"/>
                 </a:solidFill>
               </a:defRPr>
             </a:pPr>
             <a:r>
-              <a:t>사외나 자택(LTE/5G)에서 접속할 경우 외부 공개 주소를 입력하여 전용 QR 코드를 즉시 생성할 수 있습니다.</a:t>
+              <a:t>• 스마트폰(모바일)에서 신청한 내역을 회사 PC에서 열어도, 반대로 PC에서 신청한 내역을 폰에서 열어도 동일합니다.</a:t>
+            </a:r>
+            <a:br/>
+            <a:r>
+              <a:t>• 중앙 데이터베이스(data/overtime.db)를 실시간 공유하므로 어떤 기기에서 재입장하더라도 본인 데이터가 완벽 유지됩니다.</a:t>
+            </a:r>
+            <a:br/>
+            <a:r>
+              <a:t>• 기기를 교체하더라도 회원가입 없이 본인 사번만 입력하면 기존 내역을 즉시 조회할 수 있습니다.</a:t>
             </a:r>
           </a:p>
         </p:txBody>
@@ -4400,8 +5969,8 @@
         </p:nvSpPr>
         <p:spPr>
           <a:xfrm>
-            <a:off x="8046720" y="1645920"/>
-            <a:ext cx="3383280" cy="4389120"/>
+            <a:off x="731520" y="4069080"/>
+            <a:ext cx="5212080" cy="2377440"/>
           </a:xfrm>
           <a:prstGeom prst="roundRect">
             <a:avLst/>
@@ -4409,7 +5978,7 @@
           <a:solidFill>
             <a:srgbClr val="FFFFFF"/>
           </a:solidFill>
-          <a:ln w="25400">
+          <a:ln w="19050">
             <a:solidFill>
               <a:srgbClr val="CBD5E1"/>
             </a:solidFill>
@@ -4445,8 +6014,8 @@
         </p:nvSpPr>
         <p:spPr>
           <a:xfrm>
-            <a:off x="8229600" y="1828800"/>
-            <a:ext cx="3017520" cy="3931920"/>
+            <a:off x="914400" y="4206240"/>
+            <a:ext cx="4846320" cy="2103120"/>
           </a:xfrm>
           <a:prstGeom prst="rect">
             <a:avLst/>
@@ -4463,29 +6032,14 @@
               <a:spcAft>
                 <a:spcPts val="800"/>
               </a:spcAft>
-              <a:defRPr sz="1200" b="1">
-                <a:solidFill>
-                  <a:srgbClr val="EA580C"/>
-                </a:solidFill>
-              </a:defRPr>
-            </a:pPr>
-            <a:r>
-              <a:t>단계 03</a:t>
-            </a:r>
-          </a:p>
-          <a:p>
-            <a:pPr>
-              <a:spcAft>
-                <a:spcPts val="1400"/>
-              </a:spcAft>
-              <a:defRPr sz="1800" b="1">
+              <a:defRPr sz="1500" b="1">
                 <a:solidFill>
                   <a:srgbClr val="1E3A8A"/>
                 </a:solidFill>
               </a:defRPr>
             </a:pPr>
             <a:r>
-              <a:t>3. 세션 유지 &amp; 홈 화면 추가</a:t>
+              <a:t>유의사항 03  |  3. 재입장 시 [새로고침] 1회 권장 (상태 동기화)</a:t>
             </a:r>
           </a:p>
           <a:p>
@@ -4493,14 +6047,128 @@
               <a:lnSpc>
                 <a:spcPct val="130000"/>
               </a:lnSpc>
-              <a:defRPr sz="1300">
+              <a:defRPr sz="1150">
                 <a:solidFill>
                   <a:srgbClr val="0F172A"/>
                 </a:solidFill>
               </a:defRPr>
             </a:pPr>
             <a:r>
-              <a:t>스마트폰 브라우저에서 '홈 화면에 추가'를 누르면 앱처럼 등록되며, 세션이 영구 보존되어 편리하게 이용됩니다.</a:t>
+              <a:t>• 브라우저 탭을 백그라운드에 켜두었거나 다시 접속했을 때는 화면 상단 [🔄 새로고침] 버튼 또는 F5를 1회 눌러주세요.</a:t>
+            </a:r>
+            <a:br/>
+            <a:r>
+              <a:t>• 부서 관리자가 승인 도장을 새로 찍었거나 팀원 일정이 변경되었을 때 1초 만에 최신 상태로 화면이 새로고침됩니다.</a:t>
+            </a:r>
+            <a:br/>
+            <a:r>
+              <a:t>• 네트워크 일시 지연이 발생할 때도 상단 새로고침 버튼을 누르면 즉시 정상 회복됩니다.</a:t>
+            </a:r>
+          </a:p>
+        </p:txBody>
+      </p:sp>
+      <p:sp>
+        <p:nvSpPr>
+          <p:cNvPr id="9" name="Rounded Rectangle 8"/>
+          <p:cNvSpPr/>
+          <p:nvPr/>
+        </p:nvSpPr>
+        <p:spPr>
+          <a:xfrm>
+            <a:off x="6217920" y="4069080"/>
+            <a:ext cx="5212080" cy="2377440"/>
+          </a:xfrm>
+          <a:prstGeom prst="roundRect">
+            <a:avLst/>
+          </a:prstGeom>
+          <a:solidFill>
+            <a:srgbClr val="FFFFFF"/>
+          </a:solidFill>
+          <a:ln w="19050">
+            <a:solidFill>
+              <a:srgbClr val="CBD5E1"/>
+            </a:solidFill>
+          </a:ln>
+        </p:spPr>
+        <p:style>
+          <a:lnRef idx="1">
+            <a:schemeClr val="accent1"/>
+          </a:lnRef>
+          <a:fillRef idx="3">
+            <a:schemeClr val="accent1"/>
+          </a:fillRef>
+          <a:effectRef idx="2">
+            <a:schemeClr val="accent1"/>
+          </a:effectRef>
+          <a:fontRef idx="minor">
+            <a:schemeClr val="lt1"/>
+          </a:fontRef>
+        </p:style>
+        <p:txBody>
+          <a:bodyPr rtlCol="0" anchor="ctr"/>
+          <a:lstStyle/>
+          <a:p>
+            <a:pPr algn="ctr"/>
+          </a:p>
+        </p:txBody>
+      </p:sp>
+      <p:sp>
+        <p:nvSpPr>
+          <p:cNvPr id="10" name="TextBox 9"/>
+          <p:cNvSpPr txBox="1"/>
+          <p:nvPr/>
+        </p:nvSpPr>
+        <p:spPr>
+          <a:xfrm>
+            <a:off x="6400800" y="4206240"/>
+            <a:ext cx="4846320" cy="2103120"/>
+          </a:xfrm>
+          <a:prstGeom prst="rect">
+            <a:avLst/>
+          </a:prstGeom>
+          <a:noFill/>
+        </p:spPr>
+        <p:txBody>
+          <a:bodyPr wrap="square">
+            <a:spAutoFit/>
+          </a:bodyPr>
+          <a:lstStyle/>
+          <a:p>
+            <a:pPr>
+              <a:spcAft>
+                <a:spcPts val="800"/>
+              </a:spcAft>
+              <a:defRPr sz="1500" b="1">
+                <a:solidFill>
+                  <a:srgbClr val="1E3A8A"/>
+                </a:solidFill>
+              </a:defRPr>
+            </a:pPr>
+            <a:r>
+              <a:t>유의사항 04  |  4. 공용 PC 보안 수칙 &amp; 중복 신청 방지 유의</a:t>
+            </a:r>
+          </a:p>
+          <a:p>
+            <a:pPr>
+              <a:lnSpc>
+                <a:spcPct val="130000"/>
+              </a:lnSpc>
+              <a:defRPr sz="1150">
+                <a:solidFill>
+                  <a:srgbClr val="0F172A"/>
+                </a:solidFill>
+              </a:defRPr>
+            </a:pPr>
+            <a:r>
+              <a:t>• 회의실, 공용 작업장 PC 등 여러 사람이 함께 쓰는 PC에서는 본인 신청 후 반드시 브라우저 탭을 닫아주세요.</a:t>
+            </a:r>
+            <a:br/>
+            <a:r>
+              <a:t>• 다른 동료가 연이어 사용할 때는 사원번호 입력창에 본인 사번을 새로 덮어쓰고 입장하도록 안내합니다.</a:t>
+            </a:r>
+            <a:br/>
+            <a:r>
+              <a:t>• 동일한 날짜에는 시스템이 중복 신청을 사전에 원천 차단하므로, 날짜 변경 시에는 '내 신청 내역'에서 [수정] 버튼을 이용하세요.</a:t>
             </a:r>
           </a:p>
         </p:txBody>
@@ -4531,8 +6199,8 @@
         </p:nvSpPr>
         <p:spPr>
           <a:xfrm>
-            <a:off x="731520" y="365760"/>
-            <a:ext cx="10698480" cy="1005840"/>
+            <a:off x="548640" y="320040"/>
+            <a:ext cx="11155680" cy="1005840"/>
           </a:xfrm>
           <a:prstGeom prst="rect">
             <a:avLst/>
@@ -4553,7 +6221,7 @@
               </a:defRPr>
             </a:pPr>
             <a:r>
-              <a:t>SUMMARY &amp; Q&amp;A  |  사용자 자주 묻는 질문 답변</a:t>
+              <a:t>STEP 05  |  화면 구성 및 번호별 기능 가이드</a:t>
             </a:r>
           </a:p>
           <a:p>
@@ -4565,7 +6233,7 @@
               </a:defRPr>
             </a:pPr>
             <a:r>
-              <a:t>자주 묻는 질문(Q&amp;A)과 사용자 꿀팁 총정리</a:t>
+              <a:t>스마트 달력 기반 특근 신청</a:t>
             </a:r>
           </a:p>
           <a:p>
@@ -4577,7 +6245,7 @@
               </a:defRPr>
             </a:pPr>
             <a:r>
-              <a:t>궁금한 사항이 있으실 때는 언제든 상단의 [📖 사용자 매뉴얼]을 다운로드하여 확인하세요.</a:t>
+              <a:t>일반휴일 및 이번 주 토요일이 기본 선택되어 몇 초 만에 신청이 완료됩니다.</a:t>
             </a:r>
           </a:p>
         </p:txBody>
@@ -4590,8 +6258,8 @@
         </p:nvSpPr>
         <p:spPr>
           <a:xfrm>
-            <a:off x="731520" y="1554480"/>
-            <a:ext cx="10728655" cy="868680"/>
+            <a:off x="548640" y="1417320"/>
+            <a:ext cx="3474720" cy="5166360"/>
           </a:xfrm>
           <a:prstGeom prst="roundRect">
             <a:avLst/>
@@ -4635,8 +6303,8 @@
         </p:nvSpPr>
         <p:spPr>
           <a:xfrm>
-            <a:off x="914400" y="1627632"/>
-            <a:ext cx="10332720" cy="731520"/>
+            <a:off x="685800" y="1554480"/>
+            <a:ext cx="3200400" cy="4892040"/>
           </a:xfrm>
           <a:prstGeom prst="rect">
             <a:avLst/>
@@ -4653,40 +6321,234 @@
               <a:spcAft>
                 <a:spcPts val="200"/>
               </a:spcAft>
-              <a:defRPr sz="1300" b="1">
+              <a:defRPr sz="1250" b="1">
+                <a:solidFill>
+                  <a:srgbClr val="EA580C"/>
+                </a:solidFill>
+              </a:defRPr>
+            </a:pPr>
+            <a:r>
+              <a:t>① [일반휴일] 기본 선택 &amp; 토요일 자동 세팅</a:t>
+            </a:r>
+          </a:p>
+          <a:p>
+            <a:pPr>
+              <a:spcAft>
+                <a:spcPts val="800"/>
+              </a:spcAft>
+              <a:defRPr sz="1050">
+                <a:solidFill>
+                  <a:srgbClr val="0F172A"/>
+                </a:solidFill>
+              </a:defRPr>
+            </a:pPr>
+            <a:r>
+              <a:t>주말 특근에 가장 많이 쓰이는 '일반휴일'이 디폴트로 선택되며, 시작일/종료일이 이번 주 토요일로 자동 설정됩니다.</a:t>
+            </a:r>
+          </a:p>
+          <a:p>
+            <a:pPr>
+              <a:spcAft>
+                <a:spcPts val="200"/>
+              </a:spcAft>
+              <a:defRPr sz="1250" b="1">
+                <a:solidFill>
+                  <a:srgbClr val="EA580C"/>
+                </a:solidFill>
+              </a:defRPr>
+            </a:pPr>
+            <a:r>
+              <a:t>② 시작일/종료일 상호 자동 동기화</a:t>
+            </a:r>
+          </a:p>
+          <a:p>
+            <a:pPr>
+              <a:spcAft>
+                <a:spcPts val="800"/>
+              </a:spcAft>
+              <a:defRPr sz="1050">
+                <a:solidFill>
+                  <a:srgbClr val="0F172A"/>
+                </a:solidFill>
+              </a:defRPr>
+            </a:pPr>
+            <a:r>
+              <a:t>시작일(또는 종료일)을 선택하면 다른 날짜도 동일하게 자동 변경되며, 이후 두 번째 날짜를 변경해 2단계로 자유롭게 범위를 설정합니다.</a:t>
+            </a:r>
+          </a:p>
+          <a:p>
+            <a:pPr>
+              <a:spcAft>
+                <a:spcPts val="200"/>
+              </a:spcAft>
+              <a:defRPr sz="1250" b="1">
+                <a:solidFill>
+                  <a:srgbClr val="EA580C"/>
+                </a:solidFill>
+              </a:defRPr>
+            </a:pPr>
+            <a:r>
+              <a:t>③ 프로젝트번호/장소/사유 입력 가이드</a:t>
+            </a:r>
+          </a:p>
+          <a:p>
+            <a:pPr>
+              <a:spcAft>
+                <a:spcPts val="800"/>
+              </a:spcAft>
+              <a:defRPr sz="1050">
+                <a:solidFill>
+                  <a:srgbClr val="0F172A"/>
+                </a:solidFill>
+              </a:defRPr>
+            </a:pPr>
+            <a:r>
+              <a:t>프로젝트번호(예: BT2601-L1), 근무장소(예: 본사5층), 특근사유(예: 프로그램 개발) 예시 가이드가 기본 제공됩니다.</a:t>
+            </a:r>
+          </a:p>
+          <a:p>
+            <a:pPr>
+              <a:spcAft>
+                <a:spcPts val="200"/>
+              </a:spcAft>
+              <a:defRPr sz="1250" b="1">
+                <a:solidFill>
+                  <a:srgbClr val="EA580C"/>
+                </a:solidFill>
+              </a:defRPr>
+            </a:pPr>
+            <a:r>
+              <a:t>④ 달력 인터랙티브 날짜 선택 &amp; 중복 방지</a:t>
+            </a:r>
+          </a:p>
+          <a:p>
+            <a:pPr>
+              <a:spcAft>
+                <a:spcPts val="800"/>
+              </a:spcAft>
+              <a:defRPr sz="1050">
+                <a:solidFill>
+                  <a:srgbClr val="0F172A"/>
+                </a:solidFill>
+              </a:defRPr>
+            </a:pPr>
+            <a:r>
+              <a:t>오른쪽 달력에서 날짜를 터치하여 선택할 수 있으며, 동일한 날짜에 중복 신청하는 실수를 사전에 원천 차단합니다.</a:t>
+            </a:r>
+          </a:p>
+        </p:txBody>
+      </p:sp>
+      <p:pic>
+        <p:nvPicPr>
+          <p:cNvPr id="5" name="Picture 4" descr="mockup_apply.png"/>
+          <p:cNvPicPr>
+            <a:picLocks noChangeAspect="1"/>
+          </p:cNvPicPr>
+          <p:nvPr/>
+        </p:nvPicPr>
+        <p:blipFill>
+          <a:blip r:embed="rId2"/>
+          <a:stretch>
+            <a:fillRect/>
+          </a:stretch>
+        </p:blipFill>
+        <p:spPr>
+          <a:xfrm>
+            <a:off x="4160520" y="1417320"/>
+            <a:ext cx="7543800" cy="5166360"/>
+          </a:xfrm>
+          <a:prstGeom prst="rect">
+            <a:avLst/>
+          </a:prstGeom>
+        </p:spPr>
+      </p:pic>
+    </p:spTree>
+  </p:cSld>
+  <p:clrMapOvr>
+    <a:masterClrMapping/>
+  </p:clrMapOvr>
+</p:sld>
+</file>
+
+<file path=ppt/slides/slide7.xml><?xml version="1.0" encoding="utf-8"?>
+<p:sld xmlns:a="http://schemas.openxmlformats.org/drawingml/2006/main" xmlns:p="http://schemas.openxmlformats.org/presentationml/2006/main" xmlns:r="http://schemas.openxmlformats.org/officeDocument/2006/relationships">
+  <p:cSld>
+    <p:spTree>
+      <p:nvGrpSpPr>
+        <p:cNvPr id="1" name=""/>
+        <p:cNvGrpSpPr/>
+        <p:nvPr/>
+      </p:nvGrpSpPr>
+      <p:grpSpPr/>
+      <p:sp>
+        <p:nvSpPr>
+          <p:cNvPr id="2" name="TextBox 1"/>
+          <p:cNvSpPr txBox="1"/>
+          <p:nvPr/>
+        </p:nvSpPr>
+        <p:spPr>
+          <a:xfrm>
+            <a:off x="548640" y="320040"/>
+            <a:ext cx="11155680" cy="1005840"/>
+          </a:xfrm>
+          <a:prstGeom prst="rect">
+            <a:avLst/>
+          </a:prstGeom>
+          <a:noFill/>
+        </p:spPr>
+        <p:txBody>
+          <a:bodyPr wrap="square">
+            <a:spAutoFit/>
+          </a:bodyPr>
+          <a:lstStyle/>
+          <a:p>
+            <a:pPr>
+              <a:defRPr sz="1200" b="1">
+                <a:solidFill>
+                  <a:srgbClr val="EA580C"/>
+                </a:solidFill>
+              </a:defRPr>
+            </a:pPr>
+            <a:r>
+              <a:t>STEP 06  |  화면 구성 및 번호별 기능 가이드</a:t>
+            </a:r>
+          </a:p>
+          <a:p>
+            <a:pPr>
+              <a:defRPr sz="2200" b="1">
                 <a:solidFill>
                   <a:srgbClr val="1E3A8A"/>
                 </a:solidFill>
               </a:defRPr>
             </a:pPr>
             <a:r>
-              <a:t>Q1. 사원번호는 어떻게 입력하나요?</a:t>
-            </a:r>
-          </a:p>
-          <a:p>
-            <a:pPr>
-              <a:defRPr sz="1100">
-                <a:solidFill>
-                  <a:srgbClr val="EA580C"/>
-                </a:solidFill>
-              </a:defRPr>
-            </a:pPr>
-            <a:r>
-              <a:t>👉 본인의 사원번호를 입력하면 비밀번호 없이 간편하게 입장하여 특근을 신청할 수 있습니다.</a:t>
-            </a:r>
-          </a:p>
-        </p:txBody>
-      </p:sp>
-      <p:sp>
-        <p:nvSpPr>
-          <p:cNvPr id="5" name="Rounded Rectangle 4"/>
+              <a:t>나의 특근 신청 내역 및 다차원 검색</a:t>
+            </a:r>
+          </a:p>
+          <a:p>
+            <a:pPr>
+              <a:defRPr sz="1300">
+                <a:solidFill>
+                  <a:srgbClr val="64748B"/>
+                </a:solidFill>
+              </a:defRPr>
+            </a:pPr>
+            <a:r>
+              <a:t>다양한 검색 조건과 개인 달력 뷰로 본인의 특근 일정을 편리하게 확인합니다.</a:t>
+            </a:r>
+          </a:p>
+        </p:txBody>
+      </p:sp>
+      <p:sp>
+        <p:nvSpPr>
+          <p:cNvPr id="3" name="Rounded Rectangle 2"/>
           <p:cNvSpPr/>
           <p:nvPr/>
         </p:nvSpPr>
         <p:spPr>
           <a:xfrm>
-            <a:off x="731520" y="2514600"/>
-            <a:ext cx="10728655" cy="868680"/>
+            <a:off x="548640" y="1417320"/>
+            <a:ext cx="3474720" cy="5166360"/>
           </a:xfrm>
           <a:prstGeom prst="roundRect">
             <a:avLst/>
@@ -4724,14 +6586,14 @@
       </p:sp>
       <p:sp>
         <p:nvSpPr>
-          <p:cNvPr id="6" name="TextBox 5"/>
+          <p:cNvPr id="4" name="TextBox 3"/>
           <p:cNvSpPr txBox="1"/>
           <p:nvPr/>
         </p:nvSpPr>
         <p:spPr>
           <a:xfrm>
-            <a:off x="914400" y="2587752"/>
-            <a:ext cx="10332720" cy="731520"/>
+            <a:off x="685800" y="1554480"/>
+            <a:ext cx="3200400" cy="4892040"/>
           </a:xfrm>
           <a:prstGeom prst="rect">
             <a:avLst/>
@@ -4748,50 +6610,244 @@
               <a:spcAft>
                 <a:spcPts val="200"/>
               </a:spcAft>
-              <a:defRPr sz="1300" b="1">
+              <a:defRPr sz="1250" b="1">
+                <a:solidFill>
+                  <a:srgbClr val="EA580C"/>
+                </a:solidFill>
+              </a:defRPr>
+            </a:pPr>
+            <a:r>
+              <a:t>① 실시간 검색 결과 통계 요약 바</a:t>
+            </a:r>
+          </a:p>
+          <a:p>
+            <a:pPr>
+              <a:spcAft>
+                <a:spcPts val="800"/>
+              </a:spcAft>
+              <a:defRPr sz="1050">
+                <a:solidFill>
+                  <a:srgbClr val="0F172A"/>
+                </a:solidFill>
+              </a:defRPr>
+            </a:pPr>
+            <a:r>
+              <a:t>검색 조건에 맞춰 총 건수(총 일수), 승인완료/대기 건수, 일반/법정/대체근무별 수량이 미니 통계 칩으로 실시간 집계 표시됩니다.</a:t>
+            </a:r>
+          </a:p>
+          <a:p>
+            <a:pPr>
+              <a:spcAft>
+                <a:spcPts val="200"/>
+              </a:spcAft>
+              <a:defRPr sz="1250" b="1">
+                <a:solidFill>
+                  <a:srgbClr val="EA580C"/>
+                </a:solidFill>
+              </a:defRPr>
+            </a:pPr>
+            <a:r>
+              <a:t>② 다차원 검색 필터</a:t>
+            </a:r>
+          </a:p>
+          <a:p>
+            <a:pPr>
+              <a:spcAft>
+                <a:spcPts val="800"/>
+              </a:spcAft>
+              <a:defRPr sz="1050">
+                <a:solidFill>
+                  <a:srgbClr val="0F172A"/>
+                </a:solidFill>
+              </a:defRPr>
+            </a:pPr>
+            <a:r>
+              <a:t>조회기간, 특근구분, 승인상태 및 프로젝트/장소/사유 통합 키워드 검색으로 원하는 특근을 즉시 찾습니다.</a:t>
+            </a:r>
+          </a:p>
+          <a:p>
+            <a:pPr>
+              <a:spcAft>
+                <a:spcPts val="200"/>
+              </a:spcAft>
+              <a:defRPr sz="1250" b="1">
+                <a:solidFill>
+                  <a:srgbClr val="EA580C"/>
+                </a:solidFill>
+              </a:defRPr>
+            </a:pPr>
+            <a:r>
+              <a:t>③ 목록 보기 ↔ 개인 달력 보기 전환</a:t>
+            </a:r>
+          </a:p>
+          <a:p>
+            <a:pPr>
+              <a:spcAft>
+                <a:spcPts val="800"/>
+              </a:spcAft>
+              <a:defRPr sz="1050">
+                <a:solidFill>
+                  <a:srgbClr val="0F172A"/>
+                </a:solidFill>
+              </a:defRPr>
+            </a:pPr>
+            <a:r>
+              <a:t>신청 내역을 카드 리스트 형태뿐만 아니라 개인 전용 월간 달력 형태로도 한눈에 확인할 수 있습니다.</a:t>
+            </a:r>
+          </a:p>
+          <a:p>
+            <a:pPr>
+              <a:spcAft>
+                <a:spcPts val="200"/>
+              </a:spcAft>
+              <a:defRPr sz="1250" b="1">
+                <a:solidFill>
+                  <a:srgbClr val="EA580C"/>
+                </a:solidFill>
+              </a:defRPr>
+            </a:pPr>
+            <a:r>
+              <a:t>④ 승인 상태 및 대체휴일 명확 표시 &amp; 수정/취소</a:t>
+            </a:r>
+          </a:p>
+          <a:p>
+            <a:pPr>
+              <a:spcAft>
+                <a:spcPts val="800"/>
+              </a:spcAft>
+              <a:defRPr sz="1050">
+                <a:solidFill>
+                  <a:srgbClr val="0F172A"/>
+                </a:solidFill>
+              </a:defRPr>
+            </a:pPr>
+            <a:r>
+              <a:t>관리자 승인 시 [✓ 확인완료] 표시, 대휴 일수 안내, 일정 변경 시 [수정], 취소 시 [삭제] 및 이력이 안전 보존됩니다.</a:t>
+            </a:r>
+          </a:p>
+        </p:txBody>
+      </p:sp>
+      <p:pic>
+        <p:nvPicPr>
+          <p:cNvPr id="5" name="Picture 4" descr="mockup_my.png"/>
+          <p:cNvPicPr>
+            <a:picLocks noChangeAspect="1"/>
+          </p:cNvPicPr>
+          <p:nvPr/>
+        </p:nvPicPr>
+        <p:blipFill>
+          <a:blip r:embed="rId2"/>
+          <a:stretch>
+            <a:fillRect/>
+          </a:stretch>
+        </p:blipFill>
+        <p:spPr>
+          <a:xfrm>
+            <a:off x="4160520" y="1417320"/>
+            <a:ext cx="7543800" cy="5166360"/>
+          </a:xfrm>
+          <a:prstGeom prst="rect">
+            <a:avLst/>
+          </a:prstGeom>
+        </p:spPr>
+      </p:pic>
+    </p:spTree>
+  </p:cSld>
+  <p:clrMapOvr>
+    <a:masterClrMapping/>
+  </p:clrMapOvr>
+</p:sld>
+</file>
+
+<file path=ppt/slides/slide8.xml><?xml version="1.0" encoding="utf-8"?>
+<p:sld xmlns:a="http://schemas.openxmlformats.org/drawingml/2006/main" xmlns:p="http://schemas.openxmlformats.org/presentationml/2006/main" xmlns:r="http://schemas.openxmlformats.org/officeDocument/2006/relationships">
+  <p:cSld>
+    <p:spTree>
+      <p:nvGrpSpPr>
+        <p:cNvPr id="1" name=""/>
+        <p:cNvGrpSpPr/>
+        <p:nvPr/>
+      </p:nvGrpSpPr>
+      <p:grpSpPr/>
+      <p:sp>
+        <p:nvSpPr>
+          <p:cNvPr id="2" name="TextBox 1"/>
+          <p:cNvSpPr txBox="1"/>
+          <p:nvPr/>
+        </p:nvSpPr>
+        <p:spPr>
+          <a:xfrm>
+            <a:off x="731520" y="365760"/>
+            <a:ext cx="10698480" cy="1005840"/>
+          </a:xfrm>
+          <a:prstGeom prst="rect">
+            <a:avLst/>
+          </a:prstGeom>
+          <a:noFill/>
+        </p:spPr>
+        <p:txBody>
+          <a:bodyPr wrap="square">
+            <a:spAutoFit/>
+          </a:bodyPr>
+          <a:lstStyle/>
+          <a:p>
+            <a:pPr>
+              <a:defRPr sz="1200" b="1">
+                <a:solidFill>
+                  <a:srgbClr val="EA580C"/>
+                </a:solidFill>
+              </a:defRPr>
+            </a:pPr>
+            <a:r>
+              <a:t>STEP 07  |  특근 4단계 라이프사이클 &amp; 사원 [확정] 피드백 (v1.44 신규)</a:t>
+            </a:r>
+          </a:p>
+          <a:p>
+            <a:pPr>
+              <a:defRPr sz="2200" b="1">
                 <a:solidFill>
                   <a:srgbClr val="1E3A8A"/>
                 </a:solidFill>
               </a:defRPr>
             </a:pPr>
             <a:r>
-              <a:t>Q2. 프로젝트번호와 사유 예시 가이드가 있나요?</a:t>
-            </a:r>
-          </a:p>
-          <a:p>
-            <a:pPr>
-              <a:defRPr sz="1100">
-                <a:solidFill>
-                  <a:srgbClr val="EA580C"/>
-                </a:solidFill>
-              </a:defRPr>
-            </a:pPr>
-            <a:r>
-              <a:t>👉 네, 프로젝트번호는 'BT2601-L1', 장소는 '본사5층', 사유는 '프로그램 개발'로 기본 예시 안내가 제공됩니다.</a:t>
-            </a:r>
-          </a:p>
-        </p:txBody>
-      </p:sp>
-      <p:sp>
-        <p:nvSpPr>
-          <p:cNvPr id="7" name="Rounded Rectangle 6"/>
+              <a:t>특근 4단계 라이프사이클 &amp; 완료 후 [확정] 피드백</a:t>
+            </a:r>
+          </a:p>
+          <a:p>
+            <a:pPr>
+              <a:defRPr sz="1300">
+                <a:solidFill>
+                  <a:srgbClr val="64748B"/>
+                </a:solidFill>
+              </a:defRPr>
+            </a:pPr>
+            <a:r>
+              <a:t>신청(1단계) ➔ 승인(2단계) ➔ 사원 확정(3단계) ➔ 관리자 검토완료(4단계)로 이어지는 투명한 특근 관리</a:t>
+            </a:r>
+          </a:p>
+        </p:txBody>
+      </p:sp>
+      <p:sp>
+        <p:nvSpPr>
+          <p:cNvPr id="3" name="Rounded Rectangle 2"/>
           <p:cNvSpPr/>
           <p:nvPr/>
         </p:nvSpPr>
         <p:spPr>
           <a:xfrm>
-            <a:off x="731520" y="3474720"/>
-            <a:ext cx="10728655" cy="868680"/>
+            <a:off x="731520" y="1645920"/>
+            <a:ext cx="3383280" cy="4389120"/>
           </a:xfrm>
           <a:prstGeom prst="roundRect">
             <a:avLst/>
           </a:prstGeom>
           <a:solidFill>
-            <a:srgbClr val="F8FAFC"/>
+            <a:srgbClr val="FFFFFF"/>
           </a:solidFill>
-          <a:ln>
+          <a:ln w="25400">
             <a:solidFill>
-              <a:srgbClr val="E2E8F0"/>
+              <a:srgbClr val="CBD5E1"/>
             </a:solidFill>
           </a:ln>
         </p:spPr>
@@ -4819,14 +6875,14 @@
       </p:sp>
       <p:sp>
         <p:nvSpPr>
-          <p:cNvPr id="8" name="TextBox 7"/>
+          <p:cNvPr id="4" name="TextBox 3"/>
           <p:cNvSpPr txBox="1"/>
           <p:nvPr/>
         </p:nvSpPr>
         <p:spPr>
           <a:xfrm>
-            <a:off x="914400" y="3547872"/>
-            <a:ext cx="10332720" cy="731520"/>
+            <a:off x="914400" y="1828800"/>
+            <a:ext cx="3017520" cy="3931920"/>
           </a:xfrm>
           <a:prstGeom prst="rect">
             <a:avLst/>
@@ -4841,52 +6897,82 @@
           <a:p>
             <a:pPr>
               <a:spcAft>
-                <a:spcPts val="200"/>
+                <a:spcPts val="800"/>
               </a:spcAft>
-              <a:defRPr sz="1300" b="1">
+              <a:defRPr sz="1200" b="1">
+                <a:solidFill>
+                  <a:srgbClr val="EA580C"/>
+                </a:solidFill>
+              </a:defRPr>
+            </a:pPr>
+            <a:r>
+              <a:t>핵심 절차 01</a:t>
+            </a:r>
+          </a:p>
+          <a:p>
+            <a:pPr>
+              <a:spcAft>
+                <a:spcPts val="1400"/>
+              </a:spcAft>
+              <a:defRPr sz="1800" b="1">
                 <a:solidFill>
                   <a:srgbClr val="1E3A8A"/>
                 </a:solidFill>
               </a:defRPr>
             </a:pPr>
             <a:r>
-              <a:t>Q3. 실수로 같은 날짜에 중복 신청하면 어떻게 되나요?</a:t>
-            </a:r>
-          </a:p>
-          <a:p>
-            <a:pPr>
-              <a:defRPr sz="1100">
-                <a:solidFill>
-                  <a:srgbClr val="EA580C"/>
-                </a:solidFill>
-              </a:defRPr>
-            </a:pPr>
-            <a:r>
-              <a:t>👉 시스템에서 동일 날짜 중복 신청을 사전에 감지하여 경고창과 함께 안전하게 차단합니다.</a:t>
-            </a:r>
-          </a:p>
-        </p:txBody>
-      </p:sp>
-      <p:sp>
-        <p:nvSpPr>
-          <p:cNvPr id="9" name="Rounded Rectangle 8"/>
+              <a:t>1. 특근 4단계 라이프사이클 체계</a:t>
+            </a:r>
+          </a:p>
+          <a:p>
+            <a:pPr>
+              <a:lnSpc>
+                <a:spcPct val="135000"/>
+              </a:lnSpc>
+              <a:defRPr sz="1250">
+                <a:solidFill>
+                  <a:srgbClr val="0F172A"/>
+                </a:solidFill>
+              </a:defRPr>
+            </a:pPr>
+            <a:r>
+              <a:t>• 1단계 [신청]: 본인이 특근 일정을 등록한 대기 상태</a:t>
+            </a:r>
+            <a:br/>
+            <a:r>
+              <a:t>• 2단계 [승인]: 부서 관리자가 계획을 승인한 상태</a:t>
+            </a:r>
+            <a:br/>
+            <a:r>
+              <a:t>• 3단계 [확정]: 실제 휴일 특근을 수행 완료했음을 피드백</a:t>
+            </a:r>
+            <a:br/>
+            <a:r>
+              <a:t>• 4단계 [검토완료]: 관리자가 최종 마감 처리한 공인 상태</a:t>
+            </a:r>
+          </a:p>
+        </p:txBody>
+      </p:sp>
+      <p:sp>
+        <p:nvSpPr>
+          <p:cNvPr id="5" name="Rounded Rectangle 4"/>
           <p:cNvSpPr/>
           <p:nvPr/>
         </p:nvSpPr>
         <p:spPr>
           <a:xfrm>
-            <a:off x="731520" y="4434840"/>
-            <a:ext cx="10728655" cy="868680"/>
+            <a:off x="4389120" y="1645920"/>
+            <a:ext cx="3383280" cy="4389120"/>
           </a:xfrm>
           <a:prstGeom prst="roundRect">
             <a:avLst/>
           </a:prstGeom>
           <a:solidFill>
-            <a:srgbClr val="F8FAFC"/>
+            <a:srgbClr val="FFFFFF"/>
           </a:solidFill>
-          <a:ln>
+          <a:ln w="25400">
             <a:solidFill>
-              <a:srgbClr val="E2E8F0"/>
+              <a:srgbClr val="CBD5E1"/>
             </a:solidFill>
           </a:ln>
         </p:spPr>
@@ -4914,14 +7000,14 @@
       </p:sp>
       <p:sp>
         <p:nvSpPr>
-          <p:cNvPr id="10" name="TextBox 9"/>
+          <p:cNvPr id="6" name="TextBox 5"/>
           <p:cNvSpPr txBox="1"/>
           <p:nvPr/>
         </p:nvSpPr>
         <p:spPr>
           <a:xfrm>
-            <a:off x="914400" y="4507992"/>
-            <a:ext cx="10332720" cy="731520"/>
+            <a:off x="4572000" y="1828800"/>
+            <a:ext cx="3017520" cy="3931920"/>
           </a:xfrm>
           <a:prstGeom prst="rect">
             <a:avLst/>
@@ -4936,52 +7022,78 @@
           <a:p>
             <a:pPr>
               <a:spcAft>
-                <a:spcPts val="200"/>
+                <a:spcPts val="800"/>
               </a:spcAft>
-              <a:defRPr sz="1300" b="1">
+              <a:defRPr sz="1200" b="1">
+                <a:solidFill>
+                  <a:srgbClr val="EA580C"/>
+                </a:solidFill>
+              </a:defRPr>
+            </a:pPr>
+            <a:r>
+              <a:t>핵심 절차 02</a:t>
+            </a:r>
+          </a:p>
+          <a:p>
+            <a:pPr>
+              <a:spcAft>
+                <a:spcPts val="1400"/>
+              </a:spcAft>
+              <a:defRPr sz="1800" b="1">
                 <a:solidFill>
                   <a:srgbClr val="1E3A8A"/>
                 </a:solidFill>
               </a:defRPr>
             </a:pPr>
             <a:r>
-              <a:t>Q4. 내가 신청한 특근을 달력 형태로도 볼 수 있나요?</a:t>
-            </a:r>
-          </a:p>
-          <a:p>
-            <a:pPr>
-              <a:defRPr sz="1100">
-                <a:solidFill>
-                  <a:srgbClr val="EA580C"/>
-                </a:solidFill>
-              </a:defRPr>
-            </a:pPr>
-            <a:r>
-              <a:t>👉 네, [📅 달력 보기] 탭을 누르면 개인 월간 달력에서 승인완료/대기 상태가 색상별로 표시됩니다.</a:t>
-            </a:r>
-          </a:p>
-        </p:txBody>
-      </p:sp>
-      <p:sp>
-        <p:nvSpPr>
-          <p:cNvPr id="11" name="Rounded Rectangle 10"/>
+              <a:t>2. 사원의 [🎯 특근완료 확정] 피드백</a:t>
+            </a:r>
+          </a:p>
+          <a:p>
+            <a:pPr>
+              <a:lnSpc>
+                <a:spcPct val="135000"/>
+              </a:lnSpc>
+              <a:defRPr sz="1250">
+                <a:solidFill>
+                  <a:srgbClr val="0F172A"/>
+                </a:solidFill>
+              </a:defRPr>
+            </a:pPr>
+            <a:r>
+              <a:t>• 주말/휴일 특근을 실제로 마치면 '내 신청 내역'으로 이동합니다.</a:t>
+            </a:r>
+            <a:br/>
+            <a:r>
+              <a:t>• 승인된 특근 카드 우측에 나타나는 [🎯 특근완료 확정] 버튼을 클릭!</a:t>
+            </a:r>
+            <a:br/>
+            <a:r>
+              <a:t>• '실제 특근을 완료하여 확정하시겠습니까?' 확인 시 즉시 확정 상태로 전환됩니다.</a:t>
+            </a:r>
+          </a:p>
+        </p:txBody>
+      </p:sp>
+      <p:sp>
+        <p:nvSpPr>
+          <p:cNvPr id="7" name="Rounded Rectangle 6"/>
           <p:cNvSpPr/>
           <p:nvPr/>
         </p:nvSpPr>
         <p:spPr>
           <a:xfrm>
-            <a:off x="731520" y="5394960"/>
-            <a:ext cx="10728655" cy="868680"/>
+            <a:off x="8046720" y="1645920"/>
+            <a:ext cx="3383280" cy="4389120"/>
           </a:xfrm>
           <a:prstGeom prst="roundRect">
             <a:avLst/>
           </a:prstGeom>
           <a:solidFill>
-            <a:srgbClr val="F8FAFC"/>
+            <a:srgbClr val="FFFFFF"/>
           </a:solidFill>
-          <a:ln>
+          <a:ln w="25400">
             <a:solidFill>
-              <a:srgbClr val="E2E8F0"/>
+              <a:srgbClr val="CBD5E1"/>
             </a:solidFill>
           </a:ln>
         </p:spPr>
@@ -5009,14 +7121,14 @@
       </p:sp>
       <p:sp>
         <p:nvSpPr>
-          <p:cNvPr id="12" name="TextBox 11"/>
+          <p:cNvPr id="8" name="TextBox 7"/>
           <p:cNvSpPr txBox="1"/>
           <p:nvPr/>
         </p:nvSpPr>
         <p:spPr>
           <a:xfrm>
-            <a:off x="914400" y="5468112"/>
-            <a:ext cx="10332720" cy="731520"/>
+            <a:off x="8229600" y="1828800"/>
+            <a:ext cx="3017520" cy="3931920"/>
           </a:xfrm>
           <a:prstGeom prst="rect">
             <a:avLst/>
@@ -5031,28 +7143,494 @@
           <a:p>
             <a:pPr>
               <a:spcAft>
-                <a:spcPts val="200"/>
+                <a:spcPts val="800"/>
               </a:spcAft>
-              <a:defRPr sz="1300" b="1">
+              <a:defRPr sz="1200" b="1">
+                <a:solidFill>
+                  <a:srgbClr val="EA580C"/>
+                </a:solidFill>
+              </a:defRPr>
+            </a:pPr>
+            <a:r>
+              <a:t>핵심 절차 03</a:t>
+            </a:r>
+          </a:p>
+          <a:p>
+            <a:pPr>
+              <a:spcAft>
+                <a:spcPts val="1400"/>
+              </a:spcAft>
+              <a:defRPr sz="1800" b="1">
                 <a:solidFill>
                   <a:srgbClr val="1E3A8A"/>
                 </a:solidFill>
               </a:defRPr>
             </a:pPr>
             <a:r>
-              <a:t>Q5. 스마트폰 모바일에서 신청해도 PC와 연동되나요?</a:t>
-            </a:r>
-          </a:p>
-          <a:p>
-            <a:pPr>
-              <a:defRPr sz="1100">
+              <a:t>3. 진행상태 배지 &amp; 최종특근일 반영</a:t>
+            </a:r>
+          </a:p>
+          <a:p>
+            <a:pPr>
+              <a:lnSpc>
+                <a:spcPct val="135000"/>
+              </a:lnSpc>
+              <a:defRPr sz="1250">
+                <a:solidFill>
+                  <a:srgbClr val="0F172A"/>
+                </a:solidFill>
+              </a:defRPr>
+            </a:pPr>
+            <a:r>
+              <a:t>• 확정 즉시 카드 상단에 주황색 [🎯 3단계:확정] 배지가 부여됩니다.</a:t>
+            </a:r>
+            <a:br/>
+            <a:r>
+              <a:t>• 관리자 화면 및 정산 엑셀 파일의 [확정단계 (일)]에 실시간 반영되어 정산 누락을 방지합니다.</a:t>
+            </a:r>
+            <a:br/>
+            <a:r>
+              <a:t>• 관리자의 최종 검토가 끝나면 [🟣 4단계:검토완료]로 최종 종결됩니다.</a:t>
+            </a:r>
+          </a:p>
+        </p:txBody>
+      </p:sp>
+    </p:spTree>
+  </p:cSld>
+  <p:clrMapOvr>
+    <a:masterClrMapping/>
+  </p:clrMapOvr>
+</p:sld>
+</file>
+
+<file path=ppt/slides/slide9.xml><?xml version="1.0" encoding="utf-8"?>
+<p:sld xmlns:a="http://schemas.openxmlformats.org/drawingml/2006/main" xmlns:p="http://schemas.openxmlformats.org/presentationml/2006/main" xmlns:r="http://schemas.openxmlformats.org/officeDocument/2006/relationships">
+  <p:cSld>
+    <p:spTree>
+      <p:nvGrpSpPr>
+        <p:cNvPr id="1" name=""/>
+        <p:cNvGrpSpPr/>
+        <p:nvPr/>
+      </p:nvGrpSpPr>
+      <p:grpSpPr/>
+      <p:sp>
+        <p:nvSpPr>
+          <p:cNvPr id="2" name="TextBox 1"/>
+          <p:cNvSpPr txBox="1"/>
+          <p:nvPr/>
+        </p:nvSpPr>
+        <p:spPr>
+          <a:xfrm>
+            <a:off x="731520" y="365760"/>
+            <a:ext cx="10698480" cy="1005840"/>
+          </a:xfrm>
+          <a:prstGeom prst="rect">
+            <a:avLst/>
+          </a:prstGeom>
+          <a:noFill/>
+        </p:spPr>
+        <p:txBody>
+          <a:bodyPr wrap="square">
+            <a:spAutoFit/>
+          </a:bodyPr>
+          <a:lstStyle/>
+          <a:p>
+            <a:pPr>
+              <a:defRPr sz="1200" b="1">
                 <a:solidFill>
                   <a:srgbClr val="EA580C"/>
                 </a:solidFill>
               </a:defRPr>
             </a:pPr>
             <a:r>
-              <a:t>👉 네, 모바일과 PC는 동일한 중앙 데이터베이스를 사용하므로 실시간 100% 자동 연동됩니다.</a:t>
+              <a:t>STEP 08  |  사원 전용 100% 무기명 건의사항 소통함 (v1.44 신규)</a:t>
+            </a:r>
+          </a:p>
+          <a:p>
+            <a:pPr>
+              <a:defRPr sz="2200" b="1">
+                <a:solidFill>
+                  <a:srgbClr val="1E3A8A"/>
+                </a:solidFill>
+              </a:defRPr>
+            </a:pPr>
+            <a:r>
+              <a:t>100% 무기명 건의사항 소통함 및 공식 답변 피드백</a:t>
+            </a:r>
+          </a:p>
+          <a:p>
+            <a:pPr>
+              <a:defRPr sz="1300">
+                <a:solidFill>
+                  <a:srgbClr val="64748B"/>
+                </a:solidFill>
+              </a:defRPr>
+            </a:pPr>
+            <a:r>
+              <a:t>사번/성명 일체 미수집 원칙! 사원들의 솔직한 불편사항과 개선 요청을 자유롭게 나눕니다.</a:t>
+            </a:r>
+          </a:p>
+        </p:txBody>
+      </p:sp>
+      <p:sp>
+        <p:nvSpPr>
+          <p:cNvPr id="3" name="Rounded Rectangle 2"/>
+          <p:cNvSpPr/>
+          <p:nvPr/>
+        </p:nvSpPr>
+        <p:spPr>
+          <a:xfrm>
+            <a:off x="731520" y="1645920"/>
+            <a:ext cx="3383280" cy="4389120"/>
+          </a:xfrm>
+          <a:prstGeom prst="roundRect">
+            <a:avLst/>
+          </a:prstGeom>
+          <a:solidFill>
+            <a:srgbClr val="FFFFFF"/>
+          </a:solidFill>
+          <a:ln w="25400">
+            <a:solidFill>
+              <a:srgbClr val="CBD5E1"/>
+            </a:solidFill>
+          </a:ln>
+        </p:spPr>
+        <p:style>
+          <a:lnRef idx="1">
+            <a:schemeClr val="accent1"/>
+          </a:lnRef>
+          <a:fillRef idx="3">
+            <a:schemeClr val="accent1"/>
+          </a:fillRef>
+          <a:effectRef idx="2">
+            <a:schemeClr val="accent1"/>
+          </a:effectRef>
+          <a:fontRef idx="minor">
+            <a:schemeClr val="lt1"/>
+          </a:fontRef>
+        </p:style>
+        <p:txBody>
+          <a:bodyPr rtlCol="0" anchor="ctr"/>
+          <a:lstStyle/>
+          <a:p>
+            <a:pPr algn="ctr"/>
+          </a:p>
+        </p:txBody>
+      </p:sp>
+      <p:sp>
+        <p:nvSpPr>
+          <p:cNvPr id="4" name="TextBox 3"/>
+          <p:cNvSpPr txBox="1"/>
+          <p:nvPr/>
+        </p:nvSpPr>
+        <p:spPr>
+          <a:xfrm>
+            <a:off x="914400" y="1828800"/>
+            <a:ext cx="3017520" cy="3931920"/>
+          </a:xfrm>
+          <a:prstGeom prst="rect">
+            <a:avLst/>
+          </a:prstGeom>
+          <a:noFill/>
+        </p:spPr>
+        <p:txBody>
+          <a:bodyPr wrap="square">
+            <a:spAutoFit/>
+          </a:bodyPr>
+          <a:lstStyle/>
+          <a:p>
+            <a:pPr>
+              <a:spcAft>
+                <a:spcPts val="800"/>
+              </a:spcAft>
+              <a:defRPr sz="1200" b="1">
+                <a:solidFill>
+                  <a:srgbClr val="EA580C"/>
+                </a:solidFill>
+              </a:defRPr>
+            </a:pPr>
+            <a:r>
+              <a:t>소통 원칙 01</a:t>
+            </a:r>
+          </a:p>
+          <a:p>
+            <a:pPr>
+              <a:spcAft>
+                <a:spcPts val="1400"/>
+              </a:spcAft>
+              <a:defRPr sz="1800" b="1">
+                <a:solidFill>
+                  <a:srgbClr val="1E3A8A"/>
+                </a:solidFill>
+              </a:defRPr>
+            </a:pPr>
+            <a:r>
+              <a:t>1. 100% 완전 무기명(익명) 보장</a:t>
+            </a:r>
+          </a:p>
+          <a:p>
+            <a:pPr>
+              <a:lnSpc>
+                <a:spcPct val="135000"/>
+              </a:lnSpc>
+              <a:defRPr sz="1250">
+                <a:solidFill>
+                  <a:srgbClr val="0F172A"/>
+                </a:solidFill>
+              </a:defRPr>
+            </a:pPr>
+            <a:r>
+              <a:t>• 시스템 DB에 사원번호, 성명, IP 등 작성자 식별 정보를 일체 저장하지 않습니다.</a:t>
+            </a:r>
+            <a:br/>
+            <a:r>
+              <a:t>• 누구의 눈치도 볼 필요 없이 시스템 오류, 근무환경 개선, 건의사항을 자유롭게 작성할 수 있습니다.</a:t>
+            </a:r>
+            <a:br/>
+            <a:r>
+              <a:t>• 오직 건의 내용과 접수 일시만 등록되므로 안심하고 이용하세요.</a:t>
+            </a:r>
+          </a:p>
+        </p:txBody>
+      </p:sp>
+      <p:sp>
+        <p:nvSpPr>
+          <p:cNvPr id="5" name="Rounded Rectangle 4"/>
+          <p:cNvSpPr/>
+          <p:nvPr/>
+        </p:nvSpPr>
+        <p:spPr>
+          <a:xfrm>
+            <a:off x="4389120" y="1645920"/>
+            <a:ext cx="3383280" cy="4389120"/>
+          </a:xfrm>
+          <a:prstGeom prst="roundRect">
+            <a:avLst/>
+          </a:prstGeom>
+          <a:solidFill>
+            <a:srgbClr val="FFFFFF"/>
+          </a:solidFill>
+          <a:ln w="25400">
+            <a:solidFill>
+              <a:srgbClr val="CBD5E1"/>
+            </a:solidFill>
+          </a:ln>
+        </p:spPr>
+        <p:style>
+          <a:lnRef idx="1">
+            <a:schemeClr val="accent1"/>
+          </a:lnRef>
+          <a:fillRef idx="3">
+            <a:schemeClr val="accent1"/>
+          </a:fillRef>
+          <a:effectRef idx="2">
+            <a:schemeClr val="accent1"/>
+          </a:effectRef>
+          <a:fontRef idx="minor">
+            <a:schemeClr val="lt1"/>
+          </a:fontRef>
+        </p:style>
+        <p:txBody>
+          <a:bodyPr rtlCol="0" anchor="ctr"/>
+          <a:lstStyle/>
+          <a:p>
+            <a:pPr algn="ctr"/>
+          </a:p>
+        </p:txBody>
+      </p:sp>
+      <p:sp>
+        <p:nvSpPr>
+          <p:cNvPr id="6" name="TextBox 5"/>
+          <p:cNvSpPr txBox="1"/>
+          <p:nvPr/>
+        </p:nvSpPr>
+        <p:spPr>
+          <a:xfrm>
+            <a:off x="4572000" y="1828800"/>
+            <a:ext cx="3017520" cy="3931920"/>
+          </a:xfrm>
+          <a:prstGeom prst="rect">
+            <a:avLst/>
+          </a:prstGeom>
+          <a:noFill/>
+        </p:spPr>
+        <p:txBody>
+          <a:bodyPr wrap="square">
+            <a:spAutoFit/>
+          </a:bodyPr>
+          <a:lstStyle/>
+          <a:p>
+            <a:pPr>
+              <a:spcAft>
+                <a:spcPts val="800"/>
+              </a:spcAft>
+              <a:defRPr sz="1200" b="1">
+                <a:solidFill>
+                  <a:srgbClr val="EA580C"/>
+                </a:solidFill>
+              </a:defRPr>
+            </a:pPr>
+            <a:r>
+              <a:t>소통 원칙 02</a:t>
+            </a:r>
+          </a:p>
+          <a:p>
+            <a:pPr>
+              <a:spcAft>
+                <a:spcPts val="1400"/>
+              </a:spcAft>
+              <a:defRPr sz="1800" b="1">
+                <a:solidFill>
+                  <a:srgbClr val="1E3A8A"/>
+                </a:solidFill>
+              </a:defRPr>
+            </a:pPr>
+            <a:r>
+              <a:t>2. [💡 건의사항 소통함] 원클릭 등록</a:t>
+            </a:r>
+          </a:p>
+          <a:p>
+            <a:pPr>
+              <a:lnSpc>
+                <a:spcPct val="135000"/>
+              </a:lnSpc>
+              <a:defRPr sz="1250">
+                <a:solidFill>
+                  <a:srgbClr val="0F172A"/>
+                </a:solidFill>
+              </a:defRPr>
+            </a:pPr>
+            <a:r>
+              <a:t>• 화면 우측 상단의 [💡 건의사항 소통함] 버튼을 클릭합니다.</a:t>
+            </a:r>
+            <a:br/>
+            <a:r>
+              <a:t>• 분류(시스템 개선, 오류/버그 신고, 근무환경/복지, 기타)를 선택하고 제목과 내용을 작성합니다.</a:t>
+            </a:r>
+            <a:br/>
+            <a:r>
+              <a:t>• [💡 무기명 건의 접수하기] 버튼을 누르면 1초 만에 즉시 등록됩니다.</a:t>
+            </a:r>
+          </a:p>
+        </p:txBody>
+      </p:sp>
+      <p:sp>
+        <p:nvSpPr>
+          <p:cNvPr id="7" name="Rounded Rectangle 6"/>
+          <p:cNvSpPr/>
+          <p:nvPr/>
+        </p:nvSpPr>
+        <p:spPr>
+          <a:xfrm>
+            <a:off x="8046720" y="1645920"/>
+            <a:ext cx="3383280" cy="4389120"/>
+          </a:xfrm>
+          <a:prstGeom prst="roundRect">
+            <a:avLst/>
+          </a:prstGeom>
+          <a:solidFill>
+            <a:srgbClr val="FFFFFF"/>
+          </a:solidFill>
+          <a:ln w="25400">
+            <a:solidFill>
+              <a:srgbClr val="CBD5E1"/>
+            </a:solidFill>
+          </a:ln>
+        </p:spPr>
+        <p:style>
+          <a:lnRef idx="1">
+            <a:schemeClr val="accent1"/>
+          </a:lnRef>
+          <a:fillRef idx="3">
+            <a:schemeClr val="accent1"/>
+          </a:fillRef>
+          <a:effectRef idx="2">
+            <a:schemeClr val="accent1"/>
+          </a:effectRef>
+          <a:fontRef idx="minor">
+            <a:schemeClr val="lt1"/>
+          </a:fontRef>
+        </p:style>
+        <p:txBody>
+          <a:bodyPr rtlCol="0" anchor="ctr"/>
+          <a:lstStyle/>
+          <a:p>
+            <a:pPr algn="ctr"/>
+          </a:p>
+        </p:txBody>
+      </p:sp>
+      <p:sp>
+        <p:nvSpPr>
+          <p:cNvPr id="8" name="TextBox 7"/>
+          <p:cNvSpPr txBox="1"/>
+          <p:nvPr/>
+        </p:nvSpPr>
+        <p:spPr>
+          <a:xfrm>
+            <a:off x="8229600" y="1828800"/>
+            <a:ext cx="3017520" cy="3931920"/>
+          </a:xfrm>
+          <a:prstGeom prst="rect">
+            <a:avLst/>
+          </a:prstGeom>
+          <a:noFill/>
+        </p:spPr>
+        <p:txBody>
+          <a:bodyPr wrap="square">
+            <a:spAutoFit/>
+          </a:bodyPr>
+          <a:lstStyle/>
+          <a:p>
+            <a:pPr>
+              <a:spcAft>
+                <a:spcPts val="800"/>
+              </a:spcAft>
+              <a:defRPr sz="1200" b="1">
+                <a:solidFill>
+                  <a:srgbClr val="EA580C"/>
+                </a:solidFill>
+              </a:defRPr>
+            </a:pPr>
+            <a:r>
+              <a:t>소통 원칙 03</a:t>
+            </a:r>
+          </a:p>
+          <a:p>
+            <a:pPr>
+              <a:spcAft>
+                <a:spcPts val="1400"/>
+              </a:spcAft>
+              <a:defRPr sz="1800" b="1">
+                <a:solidFill>
+                  <a:srgbClr val="1E3A8A"/>
+                </a:solidFill>
+              </a:defRPr>
+            </a:pPr>
+            <a:r>
+              <a:t>3. 실시간 접수 목록 &amp; 관리자 답변</a:t>
+            </a:r>
+          </a:p>
+          <a:p>
+            <a:pPr>
+              <a:lnSpc>
+                <a:spcPct val="135000"/>
+              </a:lnSpc>
+              <a:defRPr sz="1250">
+                <a:solidFill>
+                  <a:srgbClr val="0F172A"/>
+                </a:solidFill>
+              </a:defRPr>
+            </a:pPr>
+            <a:r>
+              <a:t>• 등록된 모든 건의사항은 소통함 모달 하단 목록에서 실시간으로 투명하게 열람됩니다.</a:t>
+            </a:r>
+            <a:br/>
+            <a:r>
+              <a:t>• 관리자가 조치 상태(접수완료, 검토중, 처리완료, 보류)를 갱신하고 공식 답변을 등록합니다.</a:t>
+            </a:r>
+            <a:br/>
+            <a:r>
+              <a:t>• 사원들의 목소리가 실제 시스템 및 부서 운영 개선에 즉각 반영됩니다.</a:t>
             </a:r>
           </a:p>
         </p:txBody>

--- a/Overtime_User_Manual.pptx
+++ b/Overtime_User_Manual.pptx
@@ -3176,7 +3176,7 @@
               </a:defRPr>
             </a:pPr>
             <a:r>
-              <a:t>SMART OVERTIME SYSTEM v1.44  |  일반 사원 전용 공식 매뉴얼</a:t>
+              <a:t>SMART OVERTIME SYSTEM v1.45  |  일반 사원 전용 공식 매뉴얼</a:t>
             </a:r>
           </a:p>
           <a:p>
@@ -3195,7 +3195,7 @@
             </a:r>
             <a:br/>
             <a:r>
-              <a:t>사용자 전용 기능 매뉴얼 (v1.44)</a:t>
+              <a:t>사용자 전용 기능 매뉴얼 (v1.45)</a:t>
             </a:r>
           </a:p>
           <a:p>
@@ -3210,7 +3210,7 @@
               </a:defRPr>
             </a:pPr>
             <a:r>
-              <a:t>특근 완료 확정 피드백(3단계), 100% 무기명 건의 소통함, 접속 주소 및 접속 방법, 서버 초기화 대기 안내, 사원번호 간편 입장, 스마트 달력 신청까지 누구나 쉽게 따라 할 수 있는 사용자 공식 가이드입니다.</a:t>
+              <a:t>승인/확정 독립 피드백, 100% 무기명 건의 소통함, 접속 주소 및 접속 방법, 서버 초기화 대기 안내, 사원번호 간편 입장, 스마트 달력 신청까지 누구나 쉽게 따라 할 수 있는 사용자 공식 가이드입니다.</a:t>
             </a:r>
           </a:p>
           <a:p>
@@ -3222,7 +3222,7 @@
               </a:defRPr>
             </a:pPr>
             <a:r>
-              <a:t>배포 버전: v1.44 (2026-09-21)  |  PC 모니터 &amp; 스마트폰(모바일) 완벽 지원</a:t>
+              <a:t>배포 버전: v1.45 (2026-09-21)  |  PC 모니터 &amp; 스마트폰(모바일) 완벽 지원</a:t>
             </a:r>
           </a:p>
         </p:txBody>
@@ -3691,7 +3691,7 @@
               </a:defRPr>
             </a:pPr>
             <a:r>
-              <a:t>SUMMARY &amp; Q&amp;A  |  사용자 자주 묻는 질문 답변 (v1.44)</a:t>
+              <a:t>SUMMARY &amp; Q&amp;A  |  사용자 자주 묻는 질문 답변 (v1.45)</a:t>
             </a:r>
           </a:p>
           <a:p>
@@ -5538,7 +5538,7 @@
               </a:defRPr>
             </a:pPr>
             <a:r>
-              <a:t>① v1.44 최신 버전 배지 확인</a:t>
+              <a:t>① v1.45 최신 버전 배지 확인</a:t>
             </a:r>
           </a:p>
           <a:p>
@@ -5553,7 +5553,7 @@
               </a:defRPr>
             </a:pPr>
             <a:r>
-              <a:t>화면 오른쪽 위에 파란색 [v1.43] 배지가 보이면 최신 버전입니다. 클릭 시 신규 릴리즈 이력이 표시됩니다.</a:t>
+              <a:t>화면 오른쪽 위에 청록색 [v1.45] 배지가 보이면 최신 버전입니다. 클릭 시 신규 릴리즈 이력이 표시됩니다.</a:t>
             </a:r>
           </a:p>
           <a:p>
@@ -6799,7 +6799,7 @@
               </a:defRPr>
             </a:pPr>
             <a:r>
-              <a:t>STEP 07  |  특근 4단계 라이프사이클 &amp; 사원 [확정] 피드백 (v1.44 신규)</a:t>
+              <a:t>STEP 07  |  특근 4단계 라이프사이클 &amp; 사원 [확정] 피드백 (v1.45 최신)</a:t>
             </a:r>
           </a:p>
           <a:p>
@@ -6811,7 +6811,7 @@
               </a:defRPr>
             </a:pPr>
             <a:r>
-              <a:t>특근 4단계 라이프사이클 &amp; 완료 후 [확정] 피드백</a:t>
+              <a:t>특근 4단계 라이프사이클 &amp; 승인/확정 독립 운영</a:t>
             </a:r>
           </a:p>
           <a:p>
@@ -6823,7 +6823,7 @@
               </a:defRPr>
             </a:pPr>
             <a:r>
-              <a:t>신청(1단계) ➔ 승인(2단계) ➔ 사원 확정(3단계) ➔ 관리자 검토완료(4단계)로 이어지는 투명한 특근 관리</a:t>
+              <a:t>신청 후 승인이 없어도 사원이 즉시 확정 가능! 승인과 확정이 분리된 유연한 피드백 체계</a:t>
             </a:r>
           </a:p>
         </p:txBody>
@@ -6921,7 +6921,7 @@
               </a:defRPr>
             </a:pPr>
             <a:r>
-              <a:t>1. 특근 4단계 라이프사이클 체계</a:t>
+              <a:t>1. 승인과 확정의 독립 분리 체계</a:t>
             </a:r>
           </a:p>
           <a:p>
@@ -6940,15 +6940,15 @@
             </a:r>
             <a:br/>
             <a:r>
-              <a:t>• 2단계 [승인]: 부서 관리자가 계획을 승인한 상태</a:t>
+              <a:t>• [승인]과 [확정]은 별개로 독립 관리되어 사전 승인이 없어도 사원이 직접 완료 확정 가능!</a:t>
             </a:r>
             <a:br/>
             <a:r>
-              <a:t>• 3단계 [확정]: 실제 휴일 특근을 수행 완료했음을 피드백</a:t>
+              <a:t>• 승인 상태(✅ 승인/⏳ 대기)와 확정 상태(🎯 확정/⚪ 미확정)가 개별 독립 배지로 동시 표시</a:t>
             </a:r>
             <a:br/>
             <a:r>
-              <a:t>• 4단계 [검토완료]: 관리자가 최종 마감 처리한 공인 상태</a:t>
+              <a:t>• 관리자가 최종 검토 마감하면 🟣 [검토완료] 상태로 안전하게 확정됩니다.</a:t>
             </a:r>
           </a:p>
         </p:txBody>
@@ -7061,15 +7061,19 @@
               </a:defRPr>
             </a:pPr>
             <a:r>
-              <a:t>• 주말/휴일 특근을 실제로 마치면 '내 신청 내역'으로 이동합니다.</a:t>
+              <a:t>• 실제 특근을 마치면 '내 신청 내역'으로 이동합니다.</a:t>
             </a:r>
             <a:br/>
             <a:r>
-              <a:t>• 승인된 특근 카드 우측에 나타나는 [🎯 특근완료 확정] 버튼을 클릭!</a:t>
+              <a:t>• 관리자 사전 승인 유무와 상관없이 [🎯 특근완료 확정] 버튼을 클릭!</a:t>
             </a:r>
             <a:br/>
             <a:r>
-              <a:t>• '실제 특근을 완료하여 확정하시겠습니까?' 확인 시 즉시 확정 상태로 전환됩니다.</a:t>
+              <a:t>• 확정 즉시 [🎯 특근확정] 배지가 부여되며, 잘못 누른 경우 [🎯 확정취소]로 되돌릴 수 있습니다.</a:t>
+            </a:r>
+            <a:br/>
+            <a:r>
+              <a:t>• 팝업 확인 시 오류 없이 한글 완료 메시지가 안내됩니다.</a:t>
             </a:r>
           </a:p>
         </p:txBody>
@@ -7182,15 +7186,15 @@
               </a:defRPr>
             </a:pPr>
             <a:r>
-              <a:t>• 확정 즉시 카드 상단에 주황색 [🎯 3단계:확정] 배지가 부여됩니다.</a:t>
+              <a:t>• 확정 즉시 카드 상단에 [🎯 특근확정] 배지가 부여되어 진행 현황을 즉시 파악합니다.</a:t>
             </a:r>
             <a:br/>
             <a:r>
-              <a:t>• 관리자 화면 및 정산 엑셀 파일의 [확정단계 (일)]에 실시간 반영되어 정산 누락을 방지합니다.</a:t>
+              <a:t>• 정산 엑셀 파일의 [확정단계 (일)]에 실시간 반영되어 급여/휴무 정산 누락을 방지합니다.</a:t>
             </a:r>
             <a:br/>
             <a:r>
-              <a:t>• 관리자의 최종 검토가 끝나면 [🟣 4단계:검토완료]로 최종 종결됩니다.</a:t>
+              <a:t>• 관리자의 최종 검토가 완료되면 [🟣 검토완료]로 최종 종결됩니다.</a:t>
             </a:r>
           </a:p>
         </p:txBody>
@@ -7243,7 +7247,7 @@
               </a:defRPr>
             </a:pPr>
             <a:r>
-              <a:t>STEP 08  |  사원 전용 100% 무기명 건의사항 소통함 (v1.44 신규)</a:t>
+              <a:t>STEP 08  |  사원 전용 100% 무기명 건의사항 소통함 (v1.45)</a:t>
             </a:r>
           </a:p>
           <a:p>

--- a/Overtime_User_Manual.pptx
+++ b/Overtime_User_Manual.pptx
@@ -3176,7 +3176,7 @@
               </a:defRPr>
             </a:pPr>
             <a:r>
-              <a:t>SMART OVERTIME SYSTEM v1.45  |  일반 사원 전용 공식 매뉴얼</a:t>
+              <a:t>SMART OVERTIME SYSTEM v1.46  |  일반 사원 전용 공식 매뉴얼</a:t>
             </a:r>
           </a:p>
           <a:p>
@@ -3195,7 +3195,7 @@
             </a:r>
             <a:br/>
             <a:r>
-              <a:t>사용자 전용 기능 매뉴얼 (v1.45)</a:t>
+              <a:t>사용자 전용 기능 매뉴얼 (v1.46)</a:t>
             </a:r>
           </a:p>
           <a:p>
@@ -3222,7 +3222,7 @@
               </a:defRPr>
             </a:pPr>
             <a:r>
-              <a:t>배포 버전: v1.45 (2026-09-21)  |  PC 모니터 &amp; 스마트폰(모바일) 완벽 지원</a:t>
+              <a:t>배포 버전: v1.46 (2026-09-21)  |  PC 모니터 &amp; 스마트폰(모바일) 완벽 지원</a:t>
             </a:r>
           </a:p>
         </p:txBody>
@@ -3691,7 +3691,7 @@
               </a:defRPr>
             </a:pPr>
             <a:r>
-              <a:t>SUMMARY &amp; Q&amp;A  |  사용자 자주 묻는 질문 답변 (v1.45)</a:t>
+              <a:t>SUMMARY &amp; Q&amp;A  |  사용자 자주 묻는 질문 답변 (v1.46)</a:t>
             </a:r>
           </a:p>
           <a:p>
@@ -5538,7 +5538,7 @@
               </a:defRPr>
             </a:pPr>
             <a:r>
-              <a:t>① v1.45 최신 버전 배지 확인</a:t>
+              <a:t>① v1.46 최신 버전 배지 확인</a:t>
             </a:r>
           </a:p>
           <a:p>
@@ -5553,7 +5553,7 @@
               </a:defRPr>
             </a:pPr>
             <a:r>
-              <a:t>화면 오른쪽 위에 청록색 [v1.45] 배지가 보이면 최신 버전입니다. 클릭 시 신규 릴리즈 이력이 표시됩니다.</a:t>
+              <a:t>화면 오른쪽 위에 청록색 [v1.46] 배지가 보이면 최신 버전입니다. 클릭 시 신규 릴리즈 이력이 표시됩니다.</a:t>
             </a:r>
           </a:p>
           <a:p>
@@ -6799,7 +6799,7 @@
               </a:defRPr>
             </a:pPr>
             <a:r>
-              <a:t>STEP 07  |  특근 4단계 라이프사이클 &amp; 사원 [확정] 피드백 (v1.45 최신)</a:t>
+              <a:t>STEP 07  |  특근 4단계 라이프사이클 &amp; 사원 [확정] 피드백 (v1.46 최신)</a:t>
             </a:r>
           </a:p>
           <a:p>
@@ -7247,7 +7247,7 @@
               </a:defRPr>
             </a:pPr>
             <a:r>
-              <a:t>STEP 08  |  사원 전용 100% 무기명 건의사항 소통함 (v1.45)</a:t>
+              <a:t>STEP 08  |  사원 전용 100% 무기명 건의사항 소통함 (v1.46)</a:t>
             </a:r>
           </a:p>
           <a:p>

--- a/Overtime_User_Manual.pptx
+++ b/Overtime_User_Manual.pptx
@@ -3176,7 +3176,7 @@
               </a:defRPr>
             </a:pPr>
             <a:r>
-              <a:t>SMART OVERTIME SYSTEM v1.46  |  일반 사원 전용 공식 매뉴얼</a:t>
+              <a:t>SMART OVERTIME SYSTEM v1.47  |  일반 사원 전용 공식 매뉴얼</a:t>
             </a:r>
           </a:p>
           <a:p>
@@ -3195,7 +3195,7 @@
             </a:r>
             <a:br/>
             <a:r>
-              <a:t>사용자 전용 기능 매뉴얼 (v1.46)</a:t>
+              <a:t>사용자 전용 기능 매뉴얼 (v1.47)</a:t>
             </a:r>
           </a:p>
           <a:p>
@@ -3222,7 +3222,7 @@
               </a:defRPr>
             </a:pPr>
             <a:r>
-              <a:t>배포 버전: v1.46 (2026-09-21)  |  PC 모니터 &amp; 스마트폰(모바일) 완벽 지원</a:t>
+              <a:t>배포 버전: v1.47 (2026-09-21)  |  PC 모니터 &amp; 스마트폰(모바일) 완벽 지원</a:t>
             </a:r>
           </a:p>
         </p:txBody>
@@ -3691,7 +3691,7 @@
               </a:defRPr>
             </a:pPr>
             <a:r>
-              <a:t>SUMMARY &amp; Q&amp;A  |  사용자 자주 묻는 질문 답변 (v1.46)</a:t>
+              <a:t>SUMMARY &amp; Q&amp;A  |  사용자 자주 묻는 질문 답변 (v1.47)</a:t>
             </a:r>
           </a:p>
           <a:p>
@@ -5538,7 +5538,7 @@
               </a:defRPr>
             </a:pPr>
             <a:r>
-              <a:t>① v1.46 최신 버전 배지 확인</a:t>
+              <a:t>① v1.47 최신 버전 배지 확인</a:t>
             </a:r>
           </a:p>
           <a:p>
@@ -5553,7 +5553,7 @@
               </a:defRPr>
             </a:pPr>
             <a:r>
-              <a:t>화면 오른쪽 위에 청록색 [v1.46] 배지가 보이면 최신 버전입니다. 클릭 시 신규 릴리즈 이력이 표시됩니다.</a:t>
+              <a:t>화면 오른쪽 위에 청록색 [v1.47] 배지가 보이면 최신 버전입니다. 클릭 시 신규 릴리즈 이력이 표시됩니다.</a:t>
             </a:r>
           </a:p>
           <a:p>
@@ -6799,7 +6799,7 @@
               </a:defRPr>
             </a:pPr>
             <a:r>
-              <a:t>STEP 07  |  특근 4단계 라이프사이클 &amp; 사원 [확정] 피드백 (v1.46 최신)</a:t>
+              <a:t>STEP 07  |  특근 4단계 라이프사이클 &amp; 사원 [확정] 피드백 (v1.47 최신)</a:t>
             </a:r>
           </a:p>
           <a:p>
@@ -7247,7 +7247,7 @@
               </a:defRPr>
             </a:pPr>
             <a:r>
-              <a:t>STEP 08  |  사원 전용 100% 무기명 건의사항 소통함 (v1.46)</a:t>
+              <a:t>STEP 08  |  사원 전용 100% 무기명 건의사항 소통함 (v1.47)</a:t>
             </a:r>
           </a:p>
           <a:p>

--- a/Overtime_User_Manual.pptx
+++ b/Overtime_User_Manual.pptx
@@ -14,8 +14,6 @@
     <p:sldId id="262" r:id="rId13"/>
     <p:sldId id="263" r:id="rId14"/>
     <p:sldId id="264" r:id="rId15"/>
-    <p:sldId id="265" r:id="rId16"/>
-    <p:sldId id="266" r:id="rId17"/>
   </p:sldIdLst>
   <p:sldSz cx="12191695" cy="6858000" type="screen4x3"/>
   <p:notesSz cx="6858000" cy="9144000"/>
@@ -3151,8 +3149,8 @@
         </p:nvSpPr>
         <p:spPr>
           <a:xfrm>
-            <a:off x="914400" y="1280160"/>
-            <a:ext cx="10332720" cy="4297680"/>
+            <a:off x="914400" y="1371600"/>
+            <a:ext cx="10332720" cy="4114800"/>
           </a:xfrm>
           <a:prstGeom prst="rect">
             <a:avLst/>
@@ -3176,15 +3174,15 @@
               </a:defRPr>
             </a:pPr>
             <a:r>
-              <a:t>SMART OVERTIME SYSTEM v1.47  |  일반 사원 전용 공식 매뉴얼</a:t>
-            </a:r>
-          </a:p>
-          <a:p>
-            <a:pPr>
-              <a:spcAft>
-                <a:spcPts val="1800"/>
-              </a:spcAft>
-              <a:defRPr sz="3600" b="1">
+              <a:t>SMART OVERTIME SYSTEM v1.54  |  초간편 사용자 매뉴얼</a:t>
+            </a:r>
+          </a:p>
+          <a:p>
+            <a:pPr>
+              <a:spcAft>
+                <a:spcPts val="2000"/>
+              </a:spcAft>
+              <a:defRPr sz="3800" b="1">
                 <a:solidFill>
                   <a:srgbClr val="FFFFFF"/>
                 </a:solidFill>
@@ -3195,22 +3193,22 @@
             </a:r>
             <a:br/>
             <a:r>
-              <a:t>사용자 전용 기능 매뉴얼 (v1.47)</a:t>
-            </a:r>
-          </a:p>
-          <a:p>
-            <a:pPr>
-              <a:spcAft>
-                <a:spcPts val="2400"/>
-              </a:spcAft>
-              <a:defRPr sz="1500">
+              <a:t>그림만 보고 따라 하는 1분 가이드</a:t>
+            </a:r>
+          </a:p>
+          <a:p>
+            <a:pPr>
+              <a:spcAft>
+                <a:spcPts val="2800"/>
+              </a:spcAft>
+              <a:defRPr sz="1600">
                 <a:solidFill>
                   <a:srgbClr val="CBD5E1"/>
                 </a:solidFill>
               </a:defRPr>
             </a:pPr>
             <a:r>
-              <a:t>승인/확정 독립 피드백, 100% 무기명 건의 소통함, 접속 주소 및 접속 방법, 서버 초기화 대기 안내, 사원번호 간편 입장, 스마트 달력 신청까지 누구나 쉽게 따라 할 수 있는 사용자 공식 가이드입니다.</a:t>
+              <a:t>접속 주소부터 사번 로그인, 버튼 용도별 상세 설명, 순차적 신청 및 [특근완료 확정]까지 그림 위주로 한눈에 정리했습니다.</a:t>
             </a:r>
           </a:p>
           <a:p>
@@ -3222,1260 +3220,7 @@
               </a:defRPr>
             </a:pPr>
             <a:r>
-              <a:t>배포 버전: v1.47 (2026-09-21)  |  PC 모니터 &amp; 스마트폰(모바일) 완벽 지원</a:t>
-            </a:r>
-          </a:p>
-        </p:txBody>
-      </p:sp>
-    </p:spTree>
-  </p:cSld>
-  <p:clrMapOvr>
-    <a:masterClrMapping/>
-  </p:clrMapOvr>
-</p:sld>
-</file>
-
-<file path=ppt/slides/slide10.xml><?xml version="1.0" encoding="utf-8"?>
-<p:sld xmlns:a="http://schemas.openxmlformats.org/drawingml/2006/main" xmlns:p="http://schemas.openxmlformats.org/presentationml/2006/main" xmlns:r="http://schemas.openxmlformats.org/officeDocument/2006/relationships">
-  <p:cSld>
-    <p:spTree>
-      <p:nvGrpSpPr>
-        <p:cNvPr id="1" name=""/>
-        <p:cNvGrpSpPr/>
-        <p:nvPr/>
-      </p:nvGrpSpPr>
-      <p:grpSpPr/>
-      <p:sp>
-        <p:nvSpPr>
-          <p:cNvPr id="2" name="TextBox 1"/>
-          <p:cNvSpPr txBox="1"/>
-          <p:nvPr/>
-        </p:nvSpPr>
-        <p:spPr>
-          <a:xfrm>
-            <a:off x="731520" y="365760"/>
-            <a:ext cx="10698480" cy="1005840"/>
-          </a:xfrm>
-          <a:prstGeom prst="rect">
-            <a:avLst/>
-          </a:prstGeom>
-          <a:noFill/>
-        </p:spPr>
-        <p:txBody>
-          <a:bodyPr wrap="square">
-            <a:spAutoFit/>
-          </a:bodyPr>
-          <a:lstStyle/>
-          <a:p>
-            <a:pPr>
-              <a:defRPr sz="1200" b="1">
-                <a:solidFill>
-                  <a:srgbClr val="EA580C"/>
-                </a:solidFill>
-              </a:defRPr>
-            </a:pPr>
-            <a:r>
-              <a:t>STEP 09  |  스마트폰 모바일 및 외부망 접속 심화</a:t>
-            </a:r>
-          </a:p>
-          <a:p>
-            <a:pPr>
-              <a:defRPr sz="2200" b="1">
-                <a:solidFill>
-                  <a:srgbClr val="1E3A8A"/>
-                </a:solidFill>
-              </a:defRPr>
-            </a:pPr>
-            <a:r>
-              <a:t>모바일 및 외부망(LTE/5G/사외) 스마트 활용</a:t>
-            </a:r>
-          </a:p>
-          <a:p>
-            <a:pPr>
-              <a:defRPr sz="1300">
-                <a:solidFill>
-                  <a:srgbClr val="64748B"/>
-                </a:solidFill>
-              </a:defRPr>
-            </a:pPr>
-            <a:r>
-              <a:t>PC 앞이 아니어도 스마트폰으로 특근을 신청하고 실시간 승인 현황을 확인할 수 있습니다.</a:t>
-            </a:r>
-          </a:p>
-        </p:txBody>
-      </p:sp>
-      <p:sp>
-        <p:nvSpPr>
-          <p:cNvPr id="3" name="Rounded Rectangle 2"/>
-          <p:cNvSpPr/>
-          <p:nvPr/>
-        </p:nvSpPr>
-        <p:spPr>
-          <a:xfrm>
-            <a:off x="731520" y="1645920"/>
-            <a:ext cx="3383280" cy="4389120"/>
-          </a:xfrm>
-          <a:prstGeom prst="roundRect">
-            <a:avLst/>
-          </a:prstGeom>
-          <a:solidFill>
-            <a:srgbClr val="FFFFFF"/>
-          </a:solidFill>
-          <a:ln w="25400">
-            <a:solidFill>
-              <a:srgbClr val="CBD5E1"/>
-            </a:solidFill>
-          </a:ln>
-        </p:spPr>
-        <p:style>
-          <a:lnRef idx="1">
-            <a:schemeClr val="accent1"/>
-          </a:lnRef>
-          <a:fillRef idx="3">
-            <a:schemeClr val="accent1"/>
-          </a:fillRef>
-          <a:effectRef idx="2">
-            <a:schemeClr val="accent1"/>
-          </a:effectRef>
-          <a:fontRef idx="minor">
-            <a:schemeClr val="lt1"/>
-          </a:fontRef>
-        </p:style>
-        <p:txBody>
-          <a:bodyPr rtlCol="0" anchor="ctr"/>
-          <a:lstStyle/>
-          <a:p>
-            <a:pPr algn="ctr"/>
-          </a:p>
-        </p:txBody>
-      </p:sp>
-      <p:sp>
-        <p:nvSpPr>
-          <p:cNvPr id="4" name="TextBox 3"/>
-          <p:cNvSpPr txBox="1"/>
-          <p:nvPr/>
-        </p:nvSpPr>
-        <p:spPr>
-          <a:xfrm>
-            <a:off x="914400" y="1828800"/>
-            <a:ext cx="3017520" cy="3931920"/>
-          </a:xfrm>
-          <a:prstGeom prst="rect">
-            <a:avLst/>
-          </a:prstGeom>
-          <a:noFill/>
-        </p:spPr>
-        <p:txBody>
-          <a:bodyPr wrap="square">
-            <a:spAutoFit/>
-          </a:bodyPr>
-          <a:lstStyle/>
-          <a:p>
-            <a:pPr>
-              <a:spcAft>
-                <a:spcPts val="800"/>
-              </a:spcAft>
-              <a:defRPr sz="1200" b="1">
-                <a:solidFill>
-                  <a:srgbClr val="EA580C"/>
-                </a:solidFill>
-              </a:defRPr>
-            </a:pPr>
-            <a:r>
-              <a:t>단계 01</a:t>
-            </a:r>
-          </a:p>
-          <a:p>
-            <a:pPr>
-              <a:spcAft>
-                <a:spcPts val="1400"/>
-              </a:spcAft>
-              <a:defRPr sz="1800" b="1">
-                <a:solidFill>
-                  <a:srgbClr val="1E3A8A"/>
-                </a:solidFill>
-              </a:defRPr>
-            </a:pPr>
-            <a:r>
-              <a:t>1. 외부 접속용 모바일 QR 확인</a:t>
-            </a:r>
-          </a:p>
-          <a:p>
-            <a:pPr>
-              <a:lnSpc>
-                <a:spcPct val="130000"/>
-              </a:lnSpc>
-              <a:defRPr sz="1300">
-                <a:solidFill>
-                  <a:srgbClr val="0F172A"/>
-                </a:solidFill>
-              </a:defRPr>
-            </a:pPr>
-            <a:r>
-              <a:t>화면 상단 [📱 모바일 접속 QR]을 누르면 스마트폰 카메라(LTE/5G)로 즉시 스캔 가능한 외부망 전용 QR 코드가 표시됩니다.</a:t>
-            </a:r>
-          </a:p>
-        </p:txBody>
-      </p:sp>
-      <p:sp>
-        <p:nvSpPr>
-          <p:cNvPr id="5" name="Rounded Rectangle 4"/>
-          <p:cNvSpPr/>
-          <p:nvPr/>
-        </p:nvSpPr>
-        <p:spPr>
-          <a:xfrm>
-            <a:off x="4389120" y="1645920"/>
-            <a:ext cx="3383280" cy="4389120"/>
-          </a:xfrm>
-          <a:prstGeom prst="roundRect">
-            <a:avLst/>
-          </a:prstGeom>
-          <a:solidFill>
-            <a:srgbClr val="FFFFFF"/>
-          </a:solidFill>
-          <a:ln w="25400">
-            <a:solidFill>
-              <a:srgbClr val="CBD5E1"/>
-            </a:solidFill>
-          </a:ln>
-        </p:spPr>
-        <p:style>
-          <a:lnRef idx="1">
-            <a:schemeClr val="accent1"/>
-          </a:lnRef>
-          <a:fillRef idx="3">
-            <a:schemeClr val="accent1"/>
-          </a:fillRef>
-          <a:effectRef idx="2">
-            <a:schemeClr val="accent1"/>
-          </a:effectRef>
-          <a:fontRef idx="minor">
-            <a:schemeClr val="lt1"/>
-          </a:fontRef>
-        </p:style>
-        <p:txBody>
-          <a:bodyPr rtlCol="0" anchor="ctr"/>
-          <a:lstStyle/>
-          <a:p>
-            <a:pPr algn="ctr"/>
-          </a:p>
-        </p:txBody>
-      </p:sp>
-      <p:sp>
-        <p:nvSpPr>
-          <p:cNvPr id="6" name="TextBox 5"/>
-          <p:cNvSpPr txBox="1"/>
-          <p:nvPr/>
-        </p:nvSpPr>
-        <p:spPr>
-          <a:xfrm>
-            <a:off x="4572000" y="1828800"/>
-            <a:ext cx="3017520" cy="3931920"/>
-          </a:xfrm>
-          <a:prstGeom prst="rect">
-            <a:avLst/>
-          </a:prstGeom>
-          <a:noFill/>
-        </p:spPr>
-        <p:txBody>
-          <a:bodyPr wrap="square">
-            <a:spAutoFit/>
-          </a:bodyPr>
-          <a:lstStyle/>
-          <a:p>
-            <a:pPr>
-              <a:spcAft>
-                <a:spcPts val="800"/>
-              </a:spcAft>
-              <a:defRPr sz="1200" b="1">
-                <a:solidFill>
-                  <a:srgbClr val="EA580C"/>
-                </a:solidFill>
-              </a:defRPr>
-            </a:pPr>
-            <a:r>
-              <a:t>단계 02</a:t>
-            </a:r>
-          </a:p>
-          <a:p>
-            <a:pPr>
-              <a:spcAft>
-                <a:spcPts val="1400"/>
-              </a:spcAft>
-              <a:defRPr sz="1800" b="1">
-                <a:solidFill>
-                  <a:srgbClr val="1E3A8A"/>
-                </a:solidFill>
-              </a:defRPr>
-            </a:pPr>
-            <a:r>
-              <a:t>2. 암호화(HTTPS) 보안 터널</a:t>
-            </a:r>
-          </a:p>
-          <a:p>
-            <a:pPr>
-              <a:lnSpc>
-                <a:spcPct val="130000"/>
-              </a:lnSpc>
-              <a:defRPr sz="1300">
-                <a:solidFill>
-                  <a:srgbClr val="0F172A"/>
-                </a:solidFill>
-              </a:defRPr>
-            </a:pPr>
-            <a:r>
-              <a:t>외부 보안 터널(Cloudflare)을 통해 모든 통신이 전송 암호화(SSL/TLS)되어 사외에서도 안전하게 신청할 수 있습니다.</a:t>
-            </a:r>
-          </a:p>
-        </p:txBody>
-      </p:sp>
-      <p:sp>
-        <p:nvSpPr>
-          <p:cNvPr id="7" name="Rounded Rectangle 6"/>
-          <p:cNvSpPr/>
-          <p:nvPr/>
-        </p:nvSpPr>
-        <p:spPr>
-          <a:xfrm>
-            <a:off x="8046720" y="1645920"/>
-            <a:ext cx="3383280" cy="4389120"/>
-          </a:xfrm>
-          <a:prstGeom prst="roundRect">
-            <a:avLst/>
-          </a:prstGeom>
-          <a:solidFill>
-            <a:srgbClr val="FFFFFF"/>
-          </a:solidFill>
-          <a:ln w="25400">
-            <a:solidFill>
-              <a:srgbClr val="CBD5E1"/>
-            </a:solidFill>
-          </a:ln>
-        </p:spPr>
-        <p:style>
-          <a:lnRef idx="1">
-            <a:schemeClr val="accent1"/>
-          </a:lnRef>
-          <a:fillRef idx="3">
-            <a:schemeClr val="accent1"/>
-          </a:fillRef>
-          <a:effectRef idx="2">
-            <a:schemeClr val="accent1"/>
-          </a:effectRef>
-          <a:fontRef idx="minor">
-            <a:schemeClr val="lt1"/>
-          </a:fontRef>
-        </p:style>
-        <p:txBody>
-          <a:bodyPr rtlCol="0" anchor="ctr"/>
-          <a:lstStyle/>
-          <a:p>
-            <a:pPr algn="ctr"/>
-          </a:p>
-        </p:txBody>
-      </p:sp>
-      <p:sp>
-        <p:nvSpPr>
-          <p:cNvPr id="8" name="TextBox 7"/>
-          <p:cNvSpPr txBox="1"/>
-          <p:nvPr/>
-        </p:nvSpPr>
-        <p:spPr>
-          <a:xfrm>
-            <a:off x="8229600" y="1828800"/>
-            <a:ext cx="3017520" cy="3931920"/>
-          </a:xfrm>
-          <a:prstGeom prst="rect">
-            <a:avLst/>
-          </a:prstGeom>
-          <a:noFill/>
-        </p:spPr>
-        <p:txBody>
-          <a:bodyPr wrap="square">
-            <a:spAutoFit/>
-          </a:bodyPr>
-          <a:lstStyle/>
-          <a:p>
-            <a:pPr>
-              <a:spcAft>
-                <a:spcPts val="800"/>
-              </a:spcAft>
-              <a:defRPr sz="1200" b="1">
-                <a:solidFill>
-                  <a:srgbClr val="EA580C"/>
-                </a:solidFill>
-              </a:defRPr>
-            </a:pPr>
-            <a:r>
-              <a:t>단계 03</a:t>
-            </a:r>
-          </a:p>
-          <a:p>
-            <a:pPr>
-              <a:spcAft>
-                <a:spcPts val="1400"/>
-              </a:spcAft>
-              <a:defRPr sz="1800" b="1">
-                <a:solidFill>
-                  <a:srgbClr val="1E3A8A"/>
-                </a:solidFill>
-              </a:defRPr>
-            </a:pPr>
-            <a:r>
-              <a:t>3. 세션 유지 &amp; 홈 화면 추가</a:t>
-            </a:r>
-          </a:p>
-          <a:p>
-            <a:pPr>
-              <a:lnSpc>
-                <a:spcPct val="130000"/>
-              </a:lnSpc>
-              <a:defRPr sz="1300">
-                <a:solidFill>
-                  <a:srgbClr val="0F172A"/>
-                </a:solidFill>
-              </a:defRPr>
-            </a:pPr>
-            <a:r>
-              <a:t>스마트폰 브라우저에서 '홈 화면에 추가'를 누르면 전용 앱처럼 등록되며 24시간 언제 어디서든 즉시 접속됩니다.</a:t>
-            </a:r>
-          </a:p>
-        </p:txBody>
-      </p:sp>
-    </p:spTree>
-  </p:cSld>
-  <p:clrMapOvr>
-    <a:masterClrMapping/>
-  </p:clrMapOvr>
-</p:sld>
-</file>
-
-<file path=ppt/slides/slide11.xml><?xml version="1.0" encoding="utf-8"?>
-<p:sld xmlns:a="http://schemas.openxmlformats.org/drawingml/2006/main" xmlns:p="http://schemas.openxmlformats.org/presentationml/2006/main" xmlns:r="http://schemas.openxmlformats.org/officeDocument/2006/relationships">
-  <p:cSld>
-    <p:spTree>
-      <p:nvGrpSpPr>
-        <p:cNvPr id="1" name=""/>
-        <p:cNvGrpSpPr/>
-        <p:nvPr/>
-      </p:nvGrpSpPr>
-      <p:grpSpPr/>
-      <p:sp>
-        <p:nvSpPr>
-          <p:cNvPr id="2" name="TextBox 1"/>
-          <p:cNvSpPr txBox="1"/>
-          <p:nvPr/>
-        </p:nvSpPr>
-        <p:spPr>
-          <a:xfrm>
-            <a:off x="731520" y="320040"/>
-            <a:ext cx="10698480" cy="914400"/>
-          </a:xfrm>
-          <a:prstGeom prst="rect">
-            <a:avLst/>
-          </a:prstGeom>
-          <a:noFill/>
-        </p:spPr>
-        <p:txBody>
-          <a:bodyPr wrap="square">
-            <a:spAutoFit/>
-          </a:bodyPr>
-          <a:lstStyle/>
-          <a:p>
-            <a:pPr>
-              <a:defRPr sz="1200" b="1">
-                <a:solidFill>
-                  <a:srgbClr val="EA580C"/>
-                </a:solidFill>
-              </a:defRPr>
-            </a:pPr>
-            <a:r>
-              <a:t>SUMMARY &amp; Q&amp;A  |  사용자 자주 묻는 질문 답변 (v1.47)</a:t>
-            </a:r>
-          </a:p>
-          <a:p>
-            <a:pPr>
-              <a:defRPr sz="2200" b="1">
-                <a:solidFill>
-                  <a:srgbClr val="1E3A8A"/>
-                </a:solidFill>
-              </a:defRPr>
-            </a:pPr>
-            <a:r>
-              <a:t>자주 묻는 질문(Q&amp;A)과 사용자 꿀팁 총정리</a:t>
-            </a:r>
-          </a:p>
-          <a:p>
-            <a:pPr>
-              <a:defRPr sz="1250">
-                <a:solidFill>
-                  <a:srgbClr val="64748B"/>
-                </a:solidFill>
-              </a:defRPr>
-            </a:pPr>
-            <a:r>
-              <a:t>궁금한 사항이 있으실 때는 언제든 상단의 [📖 사용자 매뉴얼]을 다운로드하여 확인하세요.</a:t>
-            </a:r>
-          </a:p>
-        </p:txBody>
-      </p:sp>
-      <p:sp>
-        <p:nvSpPr>
-          <p:cNvPr id="3" name="Rounded Rectangle 2"/>
-          <p:cNvSpPr/>
-          <p:nvPr/>
-        </p:nvSpPr>
-        <p:spPr>
-          <a:xfrm>
-            <a:off x="731520" y="1371600"/>
-            <a:ext cx="10728655" cy="603504"/>
-          </a:xfrm>
-          <a:prstGeom prst="roundRect">
-            <a:avLst/>
-          </a:prstGeom>
-          <a:solidFill>
-            <a:srgbClr val="F8FAFC"/>
-          </a:solidFill>
-          <a:ln>
-            <a:solidFill>
-              <a:srgbClr val="E2E8F0"/>
-            </a:solidFill>
-          </a:ln>
-        </p:spPr>
-        <p:style>
-          <a:lnRef idx="1">
-            <a:schemeClr val="accent1"/>
-          </a:lnRef>
-          <a:fillRef idx="3">
-            <a:schemeClr val="accent1"/>
-          </a:fillRef>
-          <a:effectRef idx="2">
-            <a:schemeClr val="accent1"/>
-          </a:effectRef>
-          <a:fontRef idx="minor">
-            <a:schemeClr val="lt1"/>
-          </a:fontRef>
-        </p:style>
-        <p:txBody>
-          <a:bodyPr rtlCol="0" anchor="ctr"/>
-          <a:lstStyle/>
-          <a:p>
-            <a:pPr algn="ctr"/>
-          </a:p>
-        </p:txBody>
-      </p:sp>
-      <p:sp>
-        <p:nvSpPr>
-          <p:cNvPr id="4" name="TextBox 3"/>
-          <p:cNvSpPr txBox="1"/>
-          <p:nvPr/>
-        </p:nvSpPr>
-        <p:spPr>
-          <a:xfrm>
-            <a:off x="914400" y="1408176"/>
-            <a:ext cx="10332720" cy="530352"/>
-          </a:xfrm>
-          <a:prstGeom prst="rect">
-            <a:avLst/>
-          </a:prstGeom>
-          <a:noFill/>
-        </p:spPr>
-        <p:txBody>
-          <a:bodyPr wrap="square">
-            <a:spAutoFit/>
-          </a:bodyPr>
-          <a:lstStyle/>
-          <a:p>
-            <a:pPr>
-              <a:spcAft>
-                <a:spcPts val="100"/>
-              </a:spcAft>
-              <a:defRPr sz="1150" b="1">
-                <a:solidFill>
-                  <a:srgbClr val="1E3A8A"/>
-                </a:solidFill>
-              </a:defRPr>
-            </a:pPr>
-            <a:r>
-              <a:t>Q1. 외부 접속망 주소와 모바일 접속 방법은 어떻게 되나요?</a:t>
-            </a:r>
-          </a:p>
-          <a:p>
-            <a:pPr>
-              <a:defRPr sz="1000">
-                <a:solidFill>
-                  <a:srgbClr val="EA580C"/>
-                </a:solidFill>
-              </a:defRPr>
-            </a:pPr>
-            <a:r>
-              <a:t>👉 관리자가 배포한 외부 보안 주소(https://xxxx.trycloudflare.com)로 접속하거나, 화면 상단 [모바일 접속 QR]을 스마트폰 카메라로 스캔하여 LTE/5G 어디서나 간편하게 접속합니다.</a:t>
-            </a:r>
-          </a:p>
-        </p:txBody>
-      </p:sp>
-      <p:sp>
-        <p:nvSpPr>
-          <p:cNvPr id="5" name="Rounded Rectangle 4"/>
-          <p:cNvSpPr/>
-          <p:nvPr/>
-        </p:nvSpPr>
-        <p:spPr>
-          <a:xfrm>
-            <a:off x="731520" y="2011680"/>
-            <a:ext cx="10728655" cy="603504"/>
-          </a:xfrm>
-          <a:prstGeom prst="roundRect">
-            <a:avLst/>
-          </a:prstGeom>
-          <a:solidFill>
-            <a:srgbClr val="F8FAFC"/>
-          </a:solidFill>
-          <a:ln>
-            <a:solidFill>
-              <a:srgbClr val="E2E8F0"/>
-            </a:solidFill>
-          </a:ln>
-        </p:spPr>
-        <p:style>
-          <a:lnRef idx="1">
-            <a:schemeClr val="accent1"/>
-          </a:lnRef>
-          <a:fillRef idx="3">
-            <a:schemeClr val="accent1"/>
-          </a:fillRef>
-          <a:effectRef idx="2">
-            <a:schemeClr val="accent1"/>
-          </a:effectRef>
-          <a:fontRef idx="minor">
-            <a:schemeClr val="lt1"/>
-          </a:fontRef>
-        </p:style>
-        <p:txBody>
-          <a:bodyPr rtlCol="0" anchor="ctr"/>
-          <a:lstStyle/>
-          <a:p>
-            <a:pPr algn="ctr"/>
-          </a:p>
-        </p:txBody>
-      </p:sp>
-      <p:sp>
-        <p:nvSpPr>
-          <p:cNvPr id="6" name="TextBox 5"/>
-          <p:cNvSpPr txBox="1"/>
-          <p:nvPr/>
-        </p:nvSpPr>
-        <p:spPr>
-          <a:xfrm>
-            <a:off x="914400" y="2048256"/>
-            <a:ext cx="10332720" cy="530352"/>
-          </a:xfrm>
-          <a:prstGeom prst="rect">
-            <a:avLst/>
-          </a:prstGeom>
-          <a:noFill/>
-        </p:spPr>
-        <p:txBody>
-          <a:bodyPr wrap="square">
-            <a:spAutoFit/>
-          </a:bodyPr>
-          <a:lstStyle/>
-          <a:p>
-            <a:pPr>
-              <a:spcAft>
-                <a:spcPts val="100"/>
-              </a:spcAft>
-              <a:defRPr sz="1150" b="1">
-                <a:solidFill>
-                  <a:srgbClr val="1E3A8A"/>
-                </a:solidFill>
-              </a:defRPr>
-            </a:pPr>
-            <a:r>
-              <a:t>Q2. 서버 리부팅 직후 접속이 왜 바로 안 되고 로딩이 도나요?</a:t>
-            </a:r>
-          </a:p>
-          <a:p>
-            <a:pPr>
-              <a:defRPr sz="1000">
-                <a:solidFill>
-                  <a:srgbClr val="EA580C"/>
-                </a:solidFill>
-              </a:defRPr>
-            </a:pPr>
-            <a:r>
-              <a:t>👉 서버 최초 기동 및 리부팅 시에는 데이터베이스 무결성 검증과 자동 백업 생성을 위해 약 10~20초 초기화가 진행되니 새로고침 연타 없이 잠시 대기해주세요.</a:t>
-            </a:r>
-          </a:p>
-        </p:txBody>
-      </p:sp>
-      <p:sp>
-        <p:nvSpPr>
-          <p:cNvPr id="7" name="Rounded Rectangle 6"/>
-          <p:cNvSpPr/>
-          <p:nvPr/>
-        </p:nvSpPr>
-        <p:spPr>
-          <a:xfrm>
-            <a:off x="731520" y="2651760"/>
-            <a:ext cx="10728655" cy="603504"/>
-          </a:xfrm>
-          <a:prstGeom prst="roundRect">
-            <a:avLst/>
-          </a:prstGeom>
-          <a:solidFill>
-            <a:srgbClr val="F8FAFC"/>
-          </a:solidFill>
-          <a:ln>
-            <a:solidFill>
-              <a:srgbClr val="E2E8F0"/>
-            </a:solidFill>
-          </a:ln>
-        </p:spPr>
-        <p:style>
-          <a:lnRef idx="1">
-            <a:schemeClr val="accent1"/>
-          </a:lnRef>
-          <a:fillRef idx="3">
-            <a:schemeClr val="accent1"/>
-          </a:fillRef>
-          <a:effectRef idx="2">
-            <a:schemeClr val="accent1"/>
-          </a:effectRef>
-          <a:fontRef idx="minor">
-            <a:schemeClr val="lt1"/>
-          </a:fontRef>
-        </p:style>
-        <p:txBody>
-          <a:bodyPr rtlCol="0" anchor="ctr"/>
-          <a:lstStyle/>
-          <a:p>
-            <a:pPr algn="ctr"/>
-          </a:p>
-        </p:txBody>
-      </p:sp>
-      <p:sp>
-        <p:nvSpPr>
-          <p:cNvPr id="8" name="TextBox 7"/>
-          <p:cNvSpPr txBox="1"/>
-          <p:nvPr/>
-        </p:nvSpPr>
-        <p:spPr>
-          <a:xfrm>
-            <a:off x="914400" y="2688336"/>
-            <a:ext cx="10332720" cy="530352"/>
-          </a:xfrm>
-          <a:prstGeom prst="rect">
-            <a:avLst/>
-          </a:prstGeom>
-          <a:noFill/>
-        </p:spPr>
-        <p:txBody>
-          <a:bodyPr wrap="square">
-            <a:spAutoFit/>
-          </a:bodyPr>
-          <a:lstStyle/>
-          <a:p>
-            <a:pPr>
-              <a:spcAft>
-                <a:spcPts val="100"/>
-              </a:spcAft>
-              <a:defRPr sz="1150" b="1">
-                <a:solidFill>
-                  <a:srgbClr val="1E3A8A"/>
-                </a:solidFill>
-              </a:defRPr>
-            </a:pPr>
-            <a:r>
-              <a:t>Q3. 재입장할 때 사번을 매번 다시 입력해야 하나요?</a:t>
-            </a:r>
-          </a:p>
-          <a:p>
-            <a:pPr>
-              <a:defRPr sz="1000">
-                <a:solidFill>
-                  <a:srgbClr val="EA580C"/>
-                </a:solidFill>
-              </a:defRPr>
-            </a:pPr>
-            <a:r>
-              <a:t>👉 아닙니다. 브라우저가 사번을 안전하게 기억하고 있으므로 [입장하기] 버튼만 누르면 1초 만에 바로 입장됩니다.</a:t>
-            </a:r>
-          </a:p>
-        </p:txBody>
-      </p:sp>
-      <p:sp>
-        <p:nvSpPr>
-          <p:cNvPr id="9" name="Rounded Rectangle 8"/>
-          <p:cNvSpPr/>
-          <p:nvPr/>
-        </p:nvSpPr>
-        <p:spPr>
-          <a:xfrm>
-            <a:off x="731520" y="3291839"/>
-            <a:ext cx="10728655" cy="603504"/>
-          </a:xfrm>
-          <a:prstGeom prst="roundRect">
-            <a:avLst/>
-          </a:prstGeom>
-          <a:solidFill>
-            <a:srgbClr val="F8FAFC"/>
-          </a:solidFill>
-          <a:ln>
-            <a:solidFill>
-              <a:srgbClr val="E2E8F0"/>
-            </a:solidFill>
-          </a:ln>
-        </p:spPr>
-        <p:style>
-          <a:lnRef idx="1">
-            <a:schemeClr val="accent1"/>
-          </a:lnRef>
-          <a:fillRef idx="3">
-            <a:schemeClr val="accent1"/>
-          </a:fillRef>
-          <a:effectRef idx="2">
-            <a:schemeClr val="accent1"/>
-          </a:effectRef>
-          <a:fontRef idx="minor">
-            <a:schemeClr val="lt1"/>
-          </a:fontRef>
-        </p:style>
-        <p:txBody>
-          <a:bodyPr rtlCol="0" anchor="ctr"/>
-          <a:lstStyle/>
-          <a:p>
-            <a:pPr algn="ctr"/>
-          </a:p>
-        </p:txBody>
-      </p:sp>
-      <p:sp>
-        <p:nvSpPr>
-          <p:cNvPr id="10" name="TextBox 9"/>
-          <p:cNvSpPr txBox="1"/>
-          <p:nvPr/>
-        </p:nvSpPr>
-        <p:spPr>
-          <a:xfrm>
-            <a:off x="914400" y="3328415"/>
-            <a:ext cx="10332720" cy="530352"/>
-          </a:xfrm>
-          <a:prstGeom prst="rect">
-            <a:avLst/>
-          </a:prstGeom>
-          <a:noFill/>
-        </p:spPr>
-        <p:txBody>
-          <a:bodyPr wrap="square">
-            <a:spAutoFit/>
-          </a:bodyPr>
-          <a:lstStyle/>
-          <a:p>
-            <a:pPr>
-              <a:spcAft>
-                <a:spcPts val="100"/>
-              </a:spcAft>
-              <a:defRPr sz="1150" b="1">
-                <a:solidFill>
-                  <a:srgbClr val="1E3A8A"/>
-                </a:solidFill>
-              </a:defRPr>
-            </a:pPr>
-            <a:r>
-              <a:t>Q4. 스마트폰 모바일에서 신청해도 회사 PC와 연동되나요?</a:t>
-            </a:r>
-          </a:p>
-          <a:p>
-            <a:pPr>
-              <a:defRPr sz="1000">
-                <a:solidFill>
-                  <a:srgbClr val="EA580C"/>
-                </a:solidFill>
-              </a:defRPr>
-            </a:pPr>
-            <a:r>
-              <a:t>👉 네, 모바일과 PC는 동일한 중앙 데이터베이스를 공유하므로 사번만 넣으면 100% 실시간 자동 연동됩니다.</a:t>
-            </a:r>
-          </a:p>
-        </p:txBody>
-      </p:sp>
-      <p:sp>
-        <p:nvSpPr>
-          <p:cNvPr id="11" name="Rounded Rectangle 10"/>
-          <p:cNvSpPr/>
-          <p:nvPr/>
-        </p:nvSpPr>
-        <p:spPr>
-          <a:xfrm>
-            <a:off x="731520" y="3931920"/>
-            <a:ext cx="10728655" cy="603504"/>
-          </a:xfrm>
-          <a:prstGeom prst="roundRect">
-            <a:avLst/>
-          </a:prstGeom>
-          <a:solidFill>
-            <a:srgbClr val="F8FAFC"/>
-          </a:solidFill>
-          <a:ln>
-            <a:solidFill>
-              <a:srgbClr val="E2E8F0"/>
-            </a:solidFill>
-          </a:ln>
-        </p:spPr>
-        <p:style>
-          <a:lnRef idx="1">
-            <a:schemeClr val="accent1"/>
-          </a:lnRef>
-          <a:fillRef idx="3">
-            <a:schemeClr val="accent1"/>
-          </a:fillRef>
-          <a:effectRef idx="2">
-            <a:schemeClr val="accent1"/>
-          </a:effectRef>
-          <a:fontRef idx="minor">
-            <a:schemeClr val="lt1"/>
-          </a:fontRef>
-        </p:style>
-        <p:txBody>
-          <a:bodyPr rtlCol="0" anchor="ctr"/>
-          <a:lstStyle/>
-          <a:p>
-            <a:pPr algn="ctr"/>
-          </a:p>
-        </p:txBody>
-      </p:sp>
-      <p:sp>
-        <p:nvSpPr>
-          <p:cNvPr id="12" name="TextBox 11"/>
-          <p:cNvSpPr txBox="1"/>
-          <p:nvPr/>
-        </p:nvSpPr>
-        <p:spPr>
-          <a:xfrm>
-            <a:off x="914400" y="3968496"/>
-            <a:ext cx="10332720" cy="530352"/>
-          </a:xfrm>
-          <a:prstGeom prst="rect">
-            <a:avLst/>
-          </a:prstGeom>
-          <a:noFill/>
-        </p:spPr>
-        <p:txBody>
-          <a:bodyPr wrap="square">
-            <a:spAutoFit/>
-          </a:bodyPr>
-          <a:lstStyle/>
-          <a:p>
-            <a:pPr>
-              <a:spcAft>
-                <a:spcPts val="100"/>
-              </a:spcAft>
-              <a:defRPr sz="1150" b="1">
-                <a:solidFill>
-                  <a:srgbClr val="1E3A8A"/>
-                </a:solidFill>
-              </a:defRPr>
-            </a:pPr>
-            <a:r>
-              <a:t>Q5. 실수로 같은 날짜에 중복 신청하면 어떻게 되나요?</a:t>
-            </a:r>
-          </a:p>
-          <a:p>
-            <a:pPr>
-              <a:defRPr sz="1000">
-                <a:solidFill>
-                  <a:srgbClr val="EA580C"/>
-                </a:solidFill>
-              </a:defRPr>
-            </a:pPr>
-            <a:r>
-              <a:t>👉 시스템에서 동일 날짜 중복 신청을 사전에 감지하여 경고창과 함께 안전하게 차단하므로 안심하셔도 됩니다.</a:t>
-            </a:r>
-          </a:p>
-        </p:txBody>
-      </p:sp>
-      <p:sp>
-        <p:nvSpPr>
-          <p:cNvPr id="13" name="Rounded Rectangle 12"/>
-          <p:cNvSpPr/>
-          <p:nvPr/>
-        </p:nvSpPr>
-        <p:spPr>
-          <a:xfrm>
-            <a:off x="731520" y="4572000"/>
-            <a:ext cx="10728655" cy="603504"/>
-          </a:xfrm>
-          <a:prstGeom prst="roundRect">
-            <a:avLst/>
-          </a:prstGeom>
-          <a:solidFill>
-            <a:srgbClr val="F8FAFC"/>
-          </a:solidFill>
-          <a:ln>
-            <a:solidFill>
-              <a:srgbClr val="E2E8F0"/>
-            </a:solidFill>
-          </a:ln>
-        </p:spPr>
-        <p:style>
-          <a:lnRef idx="1">
-            <a:schemeClr val="accent1"/>
-          </a:lnRef>
-          <a:fillRef idx="3">
-            <a:schemeClr val="accent1"/>
-          </a:fillRef>
-          <a:effectRef idx="2">
-            <a:schemeClr val="accent1"/>
-          </a:effectRef>
-          <a:fontRef idx="minor">
-            <a:schemeClr val="lt1"/>
-          </a:fontRef>
-        </p:style>
-        <p:txBody>
-          <a:bodyPr rtlCol="0" anchor="ctr"/>
-          <a:lstStyle/>
-          <a:p>
-            <a:pPr algn="ctr"/>
-          </a:p>
-        </p:txBody>
-      </p:sp>
-      <p:sp>
-        <p:nvSpPr>
-          <p:cNvPr id="14" name="TextBox 13"/>
-          <p:cNvSpPr txBox="1"/>
-          <p:nvPr/>
-        </p:nvSpPr>
-        <p:spPr>
-          <a:xfrm>
-            <a:off x="914400" y="4608576"/>
-            <a:ext cx="10332720" cy="530352"/>
-          </a:xfrm>
-          <a:prstGeom prst="rect">
-            <a:avLst/>
-          </a:prstGeom>
-          <a:noFill/>
-        </p:spPr>
-        <p:txBody>
-          <a:bodyPr wrap="square">
-            <a:spAutoFit/>
-          </a:bodyPr>
-          <a:lstStyle/>
-          <a:p>
-            <a:pPr>
-              <a:spcAft>
-                <a:spcPts val="100"/>
-              </a:spcAft>
-              <a:defRPr sz="1150" b="1">
-                <a:solidFill>
-                  <a:srgbClr val="1E3A8A"/>
-                </a:solidFill>
-              </a:defRPr>
-            </a:pPr>
-            <a:r>
-              <a:t>Q6. 관리자 승인 여부를 실시간으로 어떻게 확인하나요?</a:t>
-            </a:r>
-          </a:p>
-          <a:p>
-            <a:pPr>
-              <a:defRPr sz="1000">
-                <a:solidFill>
-                  <a:srgbClr val="EA580C"/>
-                </a:solidFill>
-              </a:defRPr>
-            </a:pPr>
-            <a:r>
-              <a:t>👉 '내 신청 내역' 카드에서 초록색 [✓ 확인완료] 도장을 확인하실 수 있으며, 상단 [새로고침]을 누르면 실시간 반영됩니다.</a:t>
-            </a:r>
-          </a:p>
-        </p:txBody>
-      </p:sp>
-      <p:sp>
-        <p:nvSpPr>
-          <p:cNvPr id="15" name="Rounded Rectangle 14"/>
-          <p:cNvSpPr/>
-          <p:nvPr/>
-        </p:nvSpPr>
-        <p:spPr>
-          <a:xfrm>
-            <a:off x="731520" y="5212079"/>
-            <a:ext cx="10728655" cy="603504"/>
-          </a:xfrm>
-          <a:prstGeom prst="roundRect">
-            <a:avLst/>
-          </a:prstGeom>
-          <a:solidFill>
-            <a:srgbClr val="F8FAFC"/>
-          </a:solidFill>
-          <a:ln>
-            <a:solidFill>
-              <a:srgbClr val="E2E8F0"/>
-            </a:solidFill>
-          </a:ln>
-        </p:spPr>
-        <p:style>
-          <a:lnRef idx="1">
-            <a:schemeClr val="accent1"/>
-          </a:lnRef>
-          <a:fillRef idx="3">
-            <a:schemeClr val="accent1"/>
-          </a:fillRef>
-          <a:effectRef idx="2">
-            <a:schemeClr val="accent1"/>
-          </a:effectRef>
-          <a:fontRef idx="minor">
-            <a:schemeClr val="lt1"/>
-          </a:fontRef>
-        </p:style>
-        <p:txBody>
-          <a:bodyPr rtlCol="0" anchor="ctr"/>
-          <a:lstStyle/>
-          <a:p>
-            <a:pPr algn="ctr"/>
-          </a:p>
-        </p:txBody>
-      </p:sp>
-      <p:sp>
-        <p:nvSpPr>
-          <p:cNvPr id="16" name="TextBox 15"/>
-          <p:cNvSpPr txBox="1"/>
-          <p:nvPr/>
-        </p:nvSpPr>
-        <p:spPr>
-          <a:xfrm>
-            <a:off x="914400" y="5248655"/>
-            <a:ext cx="10332720" cy="530352"/>
-          </a:xfrm>
-          <a:prstGeom prst="rect">
-            <a:avLst/>
-          </a:prstGeom>
-          <a:noFill/>
-        </p:spPr>
-        <p:txBody>
-          <a:bodyPr wrap="square">
-            <a:spAutoFit/>
-          </a:bodyPr>
-          <a:lstStyle/>
-          <a:p>
-            <a:pPr>
-              <a:spcAft>
-                <a:spcPts val="100"/>
-              </a:spcAft>
-              <a:defRPr sz="1150" b="1">
-                <a:solidFill>
-                  <a:srgbClr val="1E3A8A"/>
-                </a:solidFill>
-              </a:defRPr>
-            </a:pPr>
-            <a:r>
-              <a:t>Q7. 실제 특근 후 [🎯 특근완료 확정] 버튼은 언제 누르나요?</a:t>
-            </a:r>
-          </a:p>
-          <a:p>
-            <a:pPr>
-              <a:defRPr sz="1000">
-                <a:solidFill>
-                  <a:srgbClr val="EA580C"/>
-                </a:solidFill>
-              </a:defRPr>
-            </a:pPr>
-            <a:r>
-              <a:t>👉 관리자가 사전 승인한 특근에 대해 실제 휴일 근무를 마친 후 '내 신청 내역'에서 [🎯 특근완료 확정]을 누르면 관리자에게 완료 피드백이 전송됩니다.</a:t>
-            </a:r>
-          </a:p>
-        </p:txBody>
-      </p:sp>
-      <p:sp>
-        <p:nvSpPr>
-          <p:cNvPr id="17" name="Rounded Rectangle 16"/>
-          <p:cNvSpPr/>
-          <p:nvPr/>
-        </p:nvSpPr>
-        <p:spPr>
-          <a:xfrm>
-            <a:off x="731520" y="5852159"/>
-            <a:ext cx="10728655" cy="603504"/>
-          </a:xfrm>
-          <a:prstGeom prst="roundRect">
-            <a:avLst/>
-          </a:prstGeom>
-          <a:solidFill>
-            <a:srgbClr val="F8FAFC"/>
-          </a:solidFill>
-          <a:ln>
-            <a:solidFill>
-              <a:srgbClr val="E2E8F0"/>
-            </a:solidFill>
-          </a:ln>
-        </p:spPr>
-        <p:style>
-          <a:lnRef idx="1">
-            <a:schemeClr val="accent1"/>
-          </a:lnRef>
-          <a:fillRef idx="3">
-            <a:schemeClr val="accent1"/>
-          </a:fillRef>
-          <a:effectRef idx="2">
-            <a:schemeClr val="accent1"/>
-          </a:effectRef>
-          <a:fontRef idx="minor">
-            <a:schemeClr val="lt1"/>
-          </a:fontRef>
-        </p:style>
-        <p:txBody>
-          <a:bodyPr rtlCol="0" anchor="ctr"/>
-          <a:lstStyle/>
-          <a:p>
-            <a:pPr algn="ctr"/>
-          </a:p>
-        </p:txBody>
-      </p:sp>
-      <p:sp>
-        <p:nvSpPr>
-          <p:cNvPr id="18" name="TextBox 17"/>
-          <p:cNvSpPr txBox="1"/>
-          <p:nvPr/>
-        </p:nvSpPr>
-        <p:spPr>
-          <a:xfrm>
-            <a:off x="914400" y="5888735"/>
-            <a:ext cx="10332720" cy="530352"/>
-          </a:xfrm>
-          <a:prstGeom prst="rect">
-            <a:avLst/>
-          </a:prstGeom>
-          <a:noFill/>
-        </p:spPr>
-        <p:txBody>
-          <a:bodyPr wrap="square">
-            <a:spAutoFit/>
-          </a:bodyPr>
-          <a:lstStyle/>
-          <a:p>
-            <a:pPr>
-              <a:spcAft>
-                <a:spcPts val="100"/>
-              </a:spcAft>
-              <a:defRPr sz="1150" b="1">
-                <a:solidFill>
-                  <a:srgbClr val="1E3A8A"/>
-                </a:solidFill>
-              </a:defRPr>
-            </a:pPr>
-            <a:r>
-              <a:t>Q8. 건의사항 소통함은 정말로 작성자가 누구인지 알 수 없나요?</a:t>
-            </a:r>
-          </a:p>
-          <a:p>
-            <a:pPr>
-              <a:defRPr sz="1000">
-                <a:solidFill>
-                  <a:srgbClr val="EA580C"/>
-                </a:solidFill>
-              </a:defRPr>
-            </a:pPr>
-            <a:r>
-              <a:t>👉 네, 100% 무기명입니다! 데이터베이스에 사번, 성명, IP 등 사용자 식별 컬럼이 아예 존재하지 않도록 설계되어 절대 추적되지 않습니다.</a:t>
+              <a:t>최신 릴리즈: v1.54  |  사내 PC 및 스마트폰 모바일(LTE/5G) 완벽 지원</a:t>
             </a:r>
           </a:p>
         </p:txBody>
@@ -4506,8 +3251,8 @@
         </p:nvSpPr>
         <p:spPr>
           <a:xfrm>
-            <a:off x="731520" y="365760"/>
-            <a:ext cx="10698480" cy="1005840"/>
+            <a:off x="548640" y="320040"/>
+            <a:ext cx="11155680" cy="914400"/>
           </a:xfrm>
           <a:prstGeom prst="rect">
             <a:avLst/>
@@ -4528,7 +3273,7 @@
               </a:defRPr>
             </a:pPr>
             <a:r>
-              <a:t>STEP 01  |  외부 접속망(HTTPS) 및 모바일 접속 가이드</a:t>
+              <a:t>STEP 01  |  그림 보고 바로 따라 하기</a:t>
             </a:r>
           </a:p>
           <a:p>
@@ -4540,7 +3285,7 @@
               </a:defRPr>
             </a:pPr>
             <a:r>
-              <a:t>외부 접속망(HTTPS) 및 모바일 전용 QR 접속 가이드</a:t>
+              <a:t>초기 접속 주소 및 3대 접속 경로 안내</a:t>
             </a:r>
           </a:p>
           <a:p>
@@ -4552,7 +3297,7 @@
               </a:defRPr>
             </a:pPr>
             <a:r>
-              <a:t>사내외 어디서나(LTE/5G/자택/PC) 지정된 외부 보안 링크와 전용 QR 코드로 간편하게 접속합니다.</a:t>
+              <a:t>사내 업무 PC, 사외 인터넷, 스마트폰 모바일 중 편한 경로로 접속하세요.</a:t>
             </a:r>
           </a:p>
         </p:txBody>
@@ -4565,18 +3310,18 @@
         </p:nvSpPr>
         <p:spPr>
           <a:xfrm>
-            <a:off x="731520" y="1508760"/>
-            <a:ext cx="3383280" cy="4937760"/>
+            <a:off x="548640" y="1325880"/>
+            <a:ext cx="3200400" cy="5212080"/>
           </a:xfrm>
           <a:prstGeom prst="roundRect">
             <a:avLst/>
           </a:prstGeom>
           <a:solidFill>
-            <a:srgbClr val="FFFFFF"/>
+            <a:srgbClr val="F8FAFC"/>
           </a:solidFill>
-          <a:ln w="25400">
+          <a:ln>
             <a:solidFill>
-              <a:srgbClr val="CBD5E1"/>
+              <a:srgbClr val="E2E8F0"/>
             </a:solidFill>
           </a:ln>
         </p:spPr>
@@ -4604,68 +3349,14 @@
       </p:sp>
       <p:sp>
         <p:nvSpPr>
-          <p:cNvPr id="4" name="Rounded Rectangle 3"/>
-          <p:cNvSpPr/>
-          <p:nvPr/>
-        </p:nvSpPr>
-        <p:spPr>
-          <a:xfrm>
-            <a:off x="960120" y="1691640"/>
-            <a:ext cx="2926080" cy="411480"/>
-          </a:xfrm>
-          <a:prstGeom prst="roundRect">
-            <a:avLst/>
-          </a:prstGeom>
-          <a:solidFill>
-            <a:srgbClr val="F1F5F9"/>
-          </a:solidFill>
-          <a:ln>
-            <a:solidFill>
-              <a:srgbClr val="CBD5E1"/>
-            </a:solidFill>
-          </a:ln>
-        </p:spPr>
-        <p:style>
-          <a:lnRef idx="1">
-            <a:schemeClr val="accent1"/>
-          </a:lnRef>
-          <a:fillRef idx="3">
-            <a:schemeClr val="accent1"/>
-          </a:fillRef>
-          <a:effectRef idx="2">
-            <a:schemeClr val="accent1"/>
-          </a:effectRef>
-          <a:fontRef idx="minor">
-            <a:schemeClr val="lt1"/>
-          </a:fontRef>
-        </p:style>
-        <p:txBody>
-          <a:bodyPr rtlCol="0" anchor="ctr"/>
-          <a:lstStyle/>
-          <a:p>
-            <a:pPr algn="ctr">
-              <a:defRPr sz="1100" b="1">
-                <a:solidFill>
-                  <a:srgbClr val="EA580C"/>
-                </a:solidFill>
-              </a:defRPr>
-            </a:pPr>
-            <a:r>
-              <a:t>접속 방법 01</a:t>
-            </a:r>
-          </a:p>
-        </p:txBody>
-      </p:sp>
-      <p:sp>
-        <p:nvSpPr>
-          <p:cNvPr id="5" name="TextBox 4"/>
+          <p:cNvPr id="4" name="TextBox 3"/>
           <p:cNvSpPr txBox="1"/>
           <p:nvPr/>
         </p:nvSpPr>
         <p:spPr>
           <a:xfrm>
-            <a:off x="914400" y="2194560"/>
-            <a:ext cx="3017520" cy="4114800"/>
+            <a:off x="685800" y="1463040"/>
+            <a:ext cx="2926080" cy="4937760"/>
           </a:xfrm>
           <a:prstGeom prst="rect">
             <a:avLst/>
@@ -4680,420 +3371,149 @@
           <a:p>
             <a:pPr>
               <a:spcAft>
-                <a:spcPts val="1000"/>
-              </a:spcAft>
-              <a:defRPr sz="1700" b="1">
-                <a:solidFill>
-                  <a:srgbClr val="1E3A8A"/>
-                </a:solidFill>
-              </a:defRPr>
-            </a:pPr>
-            <a:r>
-              <a:t>1. 외부 보안 링크 접속 (PC / 태블릿)</a:t>
-            </a:r>
-          </a:p>
-          <a:p>
-            <a:pPr>
-              <a:spcAft>
-                <a:spcPts val="1200"/>
+                <a:spcPts val="200"/>
               </a:spcAft>
               <a:defRPr sz="1200" b="1">
                 <a:solidFill>
-                  <a:srgbClr val="2563EB"/>
-                </a:solidFill>
-              </a:defRPr>
-            </a:pPr>
-            <a:r>
-              <a:t>▶ https://xxxx.trycloudflare.com</a:t>
-            </a:r>
-            <a:br/>
-            <a:r>
-              <a:t>(관리자 발급 공식 외부 보안 링크)</a:t>
-            </a:r>
-          </a:p>
-          <a:p>
-            <a:pPr>
-              <a:lnSpc>
-                <a:spcPct val="135000"/>
-              </a:lnSpc>
-              <a:defRPr sz="1150">
+                  <a:srgbClr val="EA580C"/>
+                </a:solidFill>
+              </a:defRPr>
+            </a:pPr>
+            <a:r>
+              <a:t>① 사내 PC 접속 (회사 랜선/Wi-Fi)</a:t>
+            </a:r>
+          </a:p>
+          <a:p>
+            <a:pPr>
+              <a:spcAft>
+                <a:spcPts val="800"/>
+              </a:spcAft>
+              <a:defRPr sz="1050">
                 <a:solidFill>
                   <a:srgbClr val="0F172A"/>
                 </a:solidFill>
               </a:defRPr>
             </a:pPr>
             <a:r>
-              <a:t>• 사내외 어디서나 PC 및 노트북 웹브라우저(Chrome, Edge 권장) 주소창에 보안 HTTPS 링크를 입력하여 접속합니다.</a:t>
-            </a:r>
-            <a:br/>
-            <a:r>
-              <a:t>• 별도의 사내망 연결이나 VPN 설치 없이 24시간 안전한 전송 구간 암호화(HTTPS) 터널을 통해 어디서든 열립니다.</a:t>
-            </a:r>
-            <a:br/>
-            <a:r>
-              <a:t>• 브라우저 상단 즐겨찾기(북마크 ★)에 등록해 두시면 매번 주소를 입력하지 않고 원클릭으로 즉시 접속됩니다.</a:t>
-            </a:r>
-          </a:p>
-        </p:txBody>
-      </p:sp>
-      <p:sp>
-        <p:nvSpPr>
-          <p:cNvPr id="6" name="Rounded Rectangle 5"/>
-          <p:cNvSpPr/>
+              <a:t>사내 PC 브라우저(Chrome/Edge) 주소창에 사내 IP 주소를 입력합니다. [즐겨찾기 ★] 등록 시 매번 원클릭!</a:t>
+            </a:r>
+          </a:p>
+          <a:p>
+            <a:pPr>
+              <a:spcAft>
+                <a:spcPts val="200"/>
+              </a:spcAft>
+              <a:defRPr sz="1200" b="1">
+                <a:solidFill>
+                  <a:srgbClr val="EA580C"/>
+                </a:solidFill>
+              </a:defRPr>
+            </a:pPr>
+            <a:r>
+              <a:t>② 사외 원격 접속 (자택/LTE/출장)</a:t>
+            </a:r>
+          </a:p>
+          <a:p>
+            <a:pPr>
+              <a:spcAft>
+                <a:spcPts val="800"/>
+              </a:spcAft>
+              <a:defRPr sz="1050">
+                <a:solidFill>
+                  <a:srgbClr val="0F172A"/>
+                </a:solidFill>
+              </a:defRPr>
+            </a:pPr>
+            <a:r>
+              <a:t>관리자가 공유한 보안 링크(https://xxxx.trycloudflare.com)를 클릭하여 어디서나 접속합니다.</a:t>
+            </a:r>
+          </a:p>
+          <a:p>
+            <a:pPr>
+              <a:spcAft>
+                <a:spcPts val="200"/>
+              </a:spcAft>
+              <a:defRPr sz="1200" b="1">
+                <a:solidFill>
+                  <a:srgbClr val="EA580C"/>
+                </a:solidFill>
+              </a:defRPr>
+            </a:pPr>
+            <a:r>
+              <a:t>③ 스마트폰 모바일 (원클릭 QR)</a:t>
+            </a:r>
+          </a:p>
+          <a:p>
+            <a:pPr>
+              <a:spcAft>
+                <a:spcPts val="800"/>
+              </a:spcAft>
+              <a:defRPr sz="1050">
+                <a:solidFill>
+                  <a:srgbClr val="0F172A"/>
+                </a:solidFill>
+              </a:defRPr>
+            </a:pPr>
+            <a:r>
+              <a:t>화면 상단 [📱 모바일 접속 QR]을 스마트폰 기본 카메라로 비추면 1초 만에 모바일 웹이 열립니다.</a:t>
+            </a:r>
+          </a:p>
+          <a:p>
+            <a:pPr>
+              <a:spcAft>
+                <a:spcPts val="200"/>
+              </a:spcAft>
+              <a:defRPr sz="1200" b="1">
+                <a:solidFill>
+                  <a:srgbClr val="EA580C"/>
+                </a:solidFill>
+              </a:defRPr>
+            </a:pPr>
+            <a:r>
+              <a:t>★ 100% 실시간 DB 자동 동기화</a:t>
+            </a:r>
+          </a:p>
+          <a:p>
+            <a:pPr>
+              <a:spcAft>
+                <a:spcPts val="800"/>
+              </a:spcAft>
+              <a:defRPr sz="1050">
+                <a:solidFill>
+                  <a:srgbClr val="0F172A"/>
+                </a:solidFill>
+              </a:defRPr>
+            </a:pPr>
+            <a:r>
+              <a:t>PC, 사외, 스마트폰 어디서 접속하든 본인 사번만 입력하면 동일한 데이터가 완벽 동기화됩니다.</a:t>
+            </a:r>
+          </a:p>
+        </p:txBody>
+      </p:sp>
+      <p:pic>
+        <p:nvPicPr>
+          <p:cNvPr id="5" name="Picture 4" descr="mockup_access_methods.png"/>
+          <p:cNvPicPr>
+            <a:picLocks noChangeAspect="1"/>
+          </p:cNvPicPr>
           <p:nvPr/>
-        </p:nvSpPr>
-        <p:spPr>
-          <a:xfrm>
-            <a:off x="4389120" y="1508760"/>
-            <a:ext cx="3383280" cy="4937760"/>
-          </a:xfrm>
-          <a:prstGeom prst="roundRect">
-            <a:avLst/>
-          </a:prstGeom>
-          <a:solidFill>
-            <a:srgbClr val="FFFFFF"/>
-          </a:solidFill>
-          <a:ln w="25400">
-            <a:solidFill>
-              <a:srgbClr val="CBD5E1"/>
-            </a:solidFill>
-          </a:ln>
-        </p:spPr>
-        <p:style>
-          <a:lnRef idx="1">
-            <a:schemeClr val="accent1"/>
-          </a:lnRef>
-          <a:fillRef idx="3">
-            <a:schemeClr val="accent1"/>
-          </a:fillRef>
-          <a:effectRef idx="2">
-            <a:schemeClr val="accent1"/>
-          </a:effectRef>
-          <a:fontRef idx="minor">
-            <a:schemeClr val="lt1"/>
-          </a:fontRef>
-        </p:style>
-        <p:txBody>
-          <a:bodyPr rtlCol="0" anchor="ctr"/>
-          <a:lstStyle/>
-          <a:p>
-            <a:pPr algn="ctr"/>
-          </a:p>
-        </p:txBody>
-      </p:sp>
-      <p:sp>
-        <p:nvSpPr>
-          <p:cNvPr id="7" name="Rounded Rectangle 6"/>
-          <p:cNvSpPr/>
-          <p:nvPr/>
-        </p:nvSpPr>
-        <p:spPr>
-          <a:xfrm>
-            <a:off x="4617720" y="1691640"/>
-            <a:ext cx="2926080" cy="411480"/>
-          </a:xfrm>
-          <a:prstGeom prst="roundRect">
-            <a:avLst/>
-          </a:prstGeom>
-          <a:solidFill>
-            <a:srgbClr val="F1F5F9"/>
-          </a:solidFill>
-          <a:ln>
-            <a:solidFill>
-              <a:srgbClr val="CBD5E1"/>
-            </a:solidFill>
-          </a:ln>
-        </p:spPr>
-        <p:style>
-          <a:lnRef idx="1">
-            <a:schemeClr val="accent1"/>
-          </a:lnRef>
-          <a:fillRef idx="3">
-            <a:schemeClr val="accent1"/>
-          </a:fillRef>
-          <a:effectRef idx="2">
-            <a:schemeClr val="accent1"/>
-          </a:effectRef>
-          <a:fontRef idx="minor">
-            <a:schemeClr val="lt1"/>
-          </a:fontRef>
-        </p:style>
-        <p:txBody>
-          <a:bodyPr rtlCol="0" anchor="ctr"/>
-          <a:lstStyle/>
-          <a:p>
-            <a:pPr algn="ctr">
-              <a:defRPr sz="1100" b="1">
-                <a:solidFill>
-                  <a:srgbClr val="EA580C"/>
-                </a:solidFill>
-              </a:defRPr>
-            </a:pPr>
-            <a:r>
-              <a:t>접속 방법 02</a:t>
-            </a:r>
-          </a:p>
-        </p:txBody>
-      </p:sp>
-      <p:sp>
-        <p:nvSpPr>
-          <p:cNvPr id="8" name="TextBox 7"/>
-          <p:cNvSpPr txBox="1"/>
-          <p:nvPr/>
-        </p:nvSpPr>
-        <p:spPr>
-          <a:xfrm>
-            <a:off x="4572000" y="2194560"/>
-            <a:ext cx="3017520" cy="4114800"/>
+        </p:nvPicPr>
+        <p:blipFill>
+          <a:blip r:embed="rId2"/>
+          <a:stretch>
+            <a:fillRect/>
+          </a:stretch>
+        </p:blipFill>
+        <p:spPr>
+          <a:xfrm>
+            <a:off x="3931920" y="1325880"/>
+            <a:ext cx="7772400" cy="5212080"/>
           </a:xfrm>
           <a:prstGeom prst="rect">
             <a:avLst/>
           </a:prstGeom>
-          <a:noFill/>
-        </p:spPr>
-        <p:txBody>
-          <a:bodyPr wrap="square">
-            <a:spAutoFit/>
-          </a:bodyPr>
-          <a:lstStyle/>
-          <a:p>
-            <a:pPr>
-              <a:spcAft>
-                <a:spcPts val="1000"/>
-              </a:spcAft>
-              <a:defRPr sz="1700" b="1">
-                <a:solidFill>
-                  <a:srgbClr val="1E3A8A"/>
-                </a:solidFill>
-              </a:defRPr>
-            </a:pPr>
-            <a:r>
-              <a:t>2. 외부 모바일 QR 스캔 접속</a:t>
-            </a:r>
-          </a:p>
-          <a:p>
-            <a:pPr>
-              <a:spcAft>
-                <a:spcPts val="1200"/>
-              </a:spcAft>
-              <a:defRPr sz="1200" b="1">
-                <a:solidFill>
-                  <a:srgbClr val="2563EB"/>
-                </a:solidFill>
-              </a:defRPr>
-            </a:pPr>
-            <a:r>
-              <a:t>▶ 화면 상단 [📱 모바일 QR] 스캔</a:t>
-            </a:r>
-            <a:br/>
-            <a:r>
-              <a:t>(스마트폰 LTE / 5G 전용)</a:t>
-            </a:r>
-          </a:p>
-          <a:p>
-            <a:pPr>
-              <a:lnSpc>
-                <a:spcPct val="135000"/>
-              </a:lnSpc>
-              <a:defRPr sz="1150">
-                <a:solidFill>
-                  <a:srgbClr val="0F172A"/>
-                </a:solidFill>
-              </a:defRPr>
-            </a:pPr>
-            <a:r>
-              <a:t>• 스마트폰 기본 카메라 앱을 켜고 화면 상단 [📱 모바일 접속 QR]을 비추면 외부망 접속 링크가 즉시 나타납니다.</a:t>
-            </a:r>
-            <a:br/>
-            <a:r>
-              <a:t>• 사내 Wi-Fi 연결 여부와 상관없이 LTE/5G 데이터망으로 언제 어디서나 이동 중에도 특근 신청 및 조회가 가능합니다.</a:t>
-            </a:r>
-            <a:br/>
-            <a:r>
-              <a:t>• 스마트폰에서 신청한 내역은 PC 관리자 화면 및 대시보드와 100% 실시간 동일하게 동기화됩니다.</a:t>
-            </a:r>
-          </a:p>
-        </p:txBody>
-      </p:sp>
-      <p:sp>
-        <p:nvSpPr>
-          <p:cNvPr id="9" name="Rounded Rectangle 8"/>
-          <p:cNvSpPr/>
-          <p:nvPr/>
-        </p:nvSpPr>
-        <p:spPr>
-          <a:xfrm>
-            <a:off x="8046720" y="1508760"/>
-            <a:ext cx="3383280" cy="4937760"/>
-          </a:xfrm>
-          <a:prstGeom prst="roundRect">
-            <a:avLst/>
-          </a:prstGeom>
-          <a:solidFill>
-            <a:srgbClr val="FFFFFF"/>
-          </a:solidFill>
-          <a:ln w="25400">
-            <a:solidFill>
-              <a:srgbClr val="CBD5E1"/>
-            </a:solidFill>
-          </a:ln>
-        </p:spPr>
-        <p:style>
-          <a:lnRef idx="1">
-            <a:schemeClr val="accent1"/>
-          </a:lnRef>
-          <a:fillRef idx="3">
-            <a:schemeClr val="accent1"/>
-          </a:fillRef>
-          <a:effectRef idx="2">
-            <a:schemeClr val="accent1"/>
-          </a:effectRef>
-          <a:fontRef idx="minor">
-            <a:schemeClr val="lt1"/>
-          </a:fontRef>
-        </p:style>
-        <p:txBody>
-          <a:bodyPr rtlCol="0" anchor="ctr"/>
-          <a:lstStyle/>
-          <a:p>
-            <a:pPr algn="ctr"/>
-          </a:p>
-        </p:txBody>
-      </p:sp>
-      <p:sp>
-        <p:nvSpPr>
-          <p:cNvPr id="10" name="Rounded Rectangle 9"/>
-          <p:cNvSpPr/>
-          <p:nvPr/>
-        </p:nvSpPr>
-        <p:spPr>
-          <a:xfrm>
-            <a:off x="8275320" y="1691640"/>
-            <a:ext cx="2926080" cy="411480"/>
-          </a:xfrm>
-          <a:prstGeom prst="roundRect">
-            <a:avLst/>
-          </a:prstGeom>
-          <a:solidFill>
-            <a:srgbClr val="F1F5F9"/>
-          </a:solidFill>
-          <a:ln>
-            <a:solidFill>
-              <a:srgbClr val="CBD5E1"/>
-            </a:solidFill>
-          </a:ln>
-        </p:spPr>
-        <p:style>
-          <a:lnRef idx="1">
-            <a:schemeClr val="accent1"/>
-          </a:lnRef>
-          <a:fillRef idx="3">
-            <a:schemeClr val="accent1"/>
-          </a:fillRef>
-          <a:effectRef idx="2">
-            <a:schemeClr val="accent1"/>
-          </a:effectRef>
-          <a:fontRef idx="minor">
-            <a:schemeClr val="lt1"/>
-          </a:fontRef>
-        </p:style>
-        <p:txBody>
-          <a:bodyPr rtlCol="0" anchor="ctr"/>
-          <a:lstStyle/>
-          <a:p>
-            <a:pPr algn="ctr">
-              <a:defRPr sz="1100" b="1">
-                <a:solidFill>
-                  <a:srgbClr val="EA580C"/>
-                </a:solidFill>
-              </a:defRPr>
-            </a:pPr>
-            <a:r>
-              <a:t>접속 방법 03</a:t>
-            </a:r>
-          </a:p>
-        </p:txBody>
-      </p:sp>
-      <p:sp>
-        <p:nvSpPr>
-          <p:cNvPr id="11" name="TextBox 10"/>
-          <p:cNvSpPr txBox="1"/>
-          <p:nvPr/>
-        </p:nvSpPr>
-        <p:spPr>
-          <a:xfrm>
-            <a:off x="8229600" y="2194560"/>
-            <a:ext cx="3017520" cy="4114800"/>
-          </a:xfrm>
-          <a:prstGeom prst="rect">
-            <a:avLst/>
-          </a:prstGeom>
-          <a:noFill/>
-        </p:spPr>
-        <p:txBody>
-          <a:bodyPr wrap="square">
-            <a:spAutoFit/>
-          </a:bodyPr>
-          <a:lstStyle/>
-          <a:p>
-            <a:pPr>
-              <a:spcAft>
-                <a:spcPts val="1000"/>
-              </a:spcAft>
-              <a:defRPr sz="1700" b="1">
-                <a:solidFill>
-                  <a:srgbClr val="1E3A8A"/>
-                </a:solidFill>
-              </a:defRPr>
-            </a:pPr>
-            <a:r>
-              <a:t>3. 스마트폰 홈 화면 추가 (앱 모드)</a:t>
-            </a:r>
-          </a:p>
-          <a:p>
-            <a:pPr>
-              <a:spcAft>
-                <a:spcPts val="1200"/>
-              </a:spcAft>
-              <a:defRPr sz="1200" b="1">
-                <a:solidFill>
-                  <a:srgbClr val="2563EB"/>
-                </a:solidFill>
-              </a:defRPr>
-            </a:pPr>
-            <a:r>
-              <a:t>▶ 브라우저 메뉴 ▶ [홈 화면에 추가]</a:t>
-            </a:r>
-            <a:br/>
-            <a:r>
-              <a:t>(바탕화면 원클릭 간편 실행)</a:t>
-            </a:r>
-          </a:p>
-          <a:p>
-            <a:pPr>
-              <a:lnSpc>
-                <a:spcPct val="135000"/>
-              </a:lnSpc>
-              <a:defRPr sz="1150">
-                <a:solidFill>
-                  <a:srgbClr val="0F172A"/>
-                </a:solidFill>
-              </a:defRPr>
-            </a:pPr>
-            <a:r>
-              <a:t>• 스마트폰 브라우저 메뉴에서 [홈 화면에 추가]를 터치하시면 스마트폰 바탕화면에 전용 앱 아이콘이 생성됩니다.</a:t>
-            </a:r>
-            <a:br/>
-            <a:r>
-              <a:t>• 매번 주소를 치거나 QR을 찍을 필요 없이 앱처럼 터치 한 번으로 1초 만에 시스템에 바로 입장할 수 있습니다.</a:t>
-            </a:r>
-            <a:br/>
-            <a:r>
-              <a:t>• 로그인 세션이 안전하게 유지되어 언제든 빠르게 본인 특근 일정과 승인 도장을 확인하실 수 있습니다.</a:t>
-            </a:r>
-          </a:p>
-        </p:txBody>
-      </p:sp>
+        </p:spPr>
+      </p:pic>
     </p:spTree>
   </p:cSld>
   <p:clrMapOvr>
@@ -5121,7 +3541,7 @@
         <p:spPr>
           <a:xfrm>
             <a:off x="548640" y="320040"/>
-            <a:ext cx="11155680" cy="1005840"/>
+            <a:ext cx="11155680" cy="914400"/>
           </a:xfrm>
           <a:prstGeom prst="rect">
             <a:avLst/>
@@ -5142,7 +3562,7 @@
               </a:defRPr>
             </a:pPr>
             <a:r>
-              <a:t>STEP 02  |  화면 구성 및 번호별 기능 가이드</a:t>
+              <a:t>STEP 02  |  그림 보고 바로 따라 하기</a:t>
             </a:r>
           </a:p>
           <a:p>
@@ -5154,7 +3574,7 @@
               </a:defRPr>
             </a:pPr>
             <a:r>
-              <a:t>최초 접속 및 서버 리부팅 시 초기화 대기 안내</a:t>
+              <a:t>사원번호로 초간편 1초 입장하기</a:t>
             </a:r>
           </a:p>
           <a:p>
@@ -5166,7 +3586,7 @@
               </a:defRPr>
             </a:pPr>
             <a:r>
-              <a:t>서버 최초 기동 또는 리부팅 직후에는 약 10~20초 동안 안전 초기화가 진행되므로 잠시 기다려주세요.</a:t>
+              <a:t>복잡한 비밀번호 없이 사번 6자리 입력만으로 빠르고 안전하게 입장합니다.</a:t>
             </a:r>
           </a:p>
         </p:txBody>
@@ -5179,8 +3599,8 @@
         </p:nvSpPr>
         <p:spPr>
           <a:xfrm>
-            <a:off x="548640" y="1417320"/>
-            <a:ext cx="3474720" cy="5166360"/>
+            <a:off x="548640" y="1325880"/>
+            <a:ext cx="3200400" cy="5212080"/>
           </a:xfrm>
           <a:prstGeom prst="roundRect">
             <a:avLst/>
@@ -5224,8 +3644,8 @@
         </p:nvSpPr>
         <p:spPr>
           <a:xfrm>
-            <a:off x="685800" y="1554480"/>
-            <a:ext cx="3200400" cy="4892040"/>
+            <a:off x="685800" y="1463040"/>
+            <a:ext cx="2926080" cy="4937760"/>
           </a:xfrm>
           <a:prstGeom prst="rect">
             <a:avLst/>
@@ -5242,14 +3662,14 @@
               <a:spcAft>
                 <a:spcPts val="200"/>
               </a:spcAft>
-              <a:defRPr sz="1250" b="1">
+              <a:defRPr sz="1200" b="1">
                 <a:solidFill>
                   <a:srgbClr val="EA580C"/>
                 </a:solidFill>
               </a:defRPr>
             </a:pPr>
             <a:r>
-              <a:t>① 외부 보안 접속 주소 입력 &amp; 연결</a:t>
+              <a:t>① 사원번호 6자리 숫자 입력</a:t>
             </a:r>
           </a:p>
           <a:p>
@@ -5264,7 +3684,7 @@
               </a:defRPr>
             </a:pPr>
             <a:r>
-              <a:t>배포된 외부 보안 링크(HTTPS)를 브라우저에 입력하여 첫 접속을 시작합니다.</a:t>
+              <a:t>비밀번호 없이 본인 사원번호 6자리를 입력창에 입력합니다.</a:t>
             </a:r>
           </a:p>
           <a:p>
@@ -5272,14 +3692,14 @@
               <a:spcAft>
                 <a:spcPts val="200"/>
               </a:spcAft>
-              <a:defRPr sz="1250" b="1">
+              <a:defRPr sz="1200" b="1">
                 <a:solidFill>
                   <a:srgbClr val="EA580C"/>
                 </a:solidFill>
               </a:defRPr>
             </a:pPr>
             <a:r>
-              <a:t>② 약 10~20초 초기 구동 대기</a:t>
+              <a:t>② [입장하기 →] 원클릭 이동</a:t>
             </a:r>
           </a:p>
           <a:p>
@@ -5294,7 +3714,7 @@
               </a:defRPr>
             </a:pPr>
             <a:r>
-              <a:t>서버 최초 기동 또는 PC 리부팅 직후 1회에 한해 보안 터널 및 DB 초기화(약 10~20초) 대기 시간이 발생합니다.</a:t>
+              <a:t>입력 후 파란색 버튼을 누르면 즉시 대시보드로 이동합니다.</a:t>
             </a:r>
           </a:p>
           <a:p>
@@ -5302,14 +3722,14 @@
               <a:spcAft>
                 <a:spcPts val="200"/>
               </a:spcAft>
-              <a:defRPr sz="1250" b="1">
+              <a:defRPr sz="1200" b="1">
                 <a:solidFill>
                   <a:srgbClr val="EA580C"/>
                 </a:solidFill>
               </a:defRPr>
             </a:pPr>
             <a:r>
-              <a:t>③ DB 무결성 &amp; 자동 백업 진행</a:t>
+              <a:t>③ 브라우저 자동 기억 기능 탑재</a:t>
             </a:r>
           </a:p>
           <a:p>
@@ -5324,7 +3744,7 @@
               </a:defRPr>
             </a:pPr>
             <a:r>
-              <a:t>데이터 유실 방지를 위한 SQLite WAL 무결성 검증 및 백업이 안전하게 수행됩니다.</a:t>
+              <a:t>다음 접속 시에는 사번이 기억되어 [입장하기]만 누르면 1초 만에 바로 진입합니다.</a:t>
             </a:r>
           </a:p>
           <a:p>
@@ -5332,14 +3752,14 @@
               <a:spcAft>
                 <a:spcPts val="200"/>
               </a:spcAft>
-              <a:defRPr sz="1250" b="1">
+              <a:defRPr sz="1200" b="1">
                 <a:solidFill>
                   <a:srgbClr val="EA580C"/>
                 </a:solidFill>
               </a:defRPr>
             </a:pPr>
             <a:r>
-              <a:t>④ 새로고침(F5) 연타 금지!</a:t>
+              <a:t>④ 미등록 사번 최초 1회 간편 등록</a:t>
             </a:r>
           </a:p>
           <a:p>
@@ -5354,14 +3774,14 @@
               </a:defRPr>
             </a:pPr>
             <a:r>
-              <a:t>외부망 연결 초기화 중 새로고침을 연타하지 마시고 잠시 대기하시면 로그인 화면으로 자동 전환됩니다.</a:t>
+              <a:t>처음 방문한 사번은 성명과 소속 부서를 선택하면 즉시 등록되어 입장합니다.</a:t>
             </a:r>
           </a:p>
         </p:txBody>
       </p:sp>
       <p:pic>
         <p:nvPicPr>
-          <p:cNvPr id="5" name="Picture 4" descr="mockup_server_init.png"/>
+          <p:cNvPr id="5" name="Picture 4" descr="mockup_login.png"/>
           <p:cNvPicPr>
             <a:picLocks noChangeAspect="1"/>
           </p:cNvPicPr>
@@ -5375,8 +3795,8 @@
         </p:blipFill>
         <p:spPr>
           <a:xfrm>
-            <a:off x="4160520" y="1417320"/>
-            <a:ext cx="7543800" cy="5166360"/>
+            <a:off x="3931920" y="1325880"/>
+            <a:ext cx="7772400" cy="5212080"/>
           </a:xfrm>
           <a:prstGeom prst="rect">
             <a:avLst/>
@@ -5410,7 +3830,7 @@
         <p:spPr>
           <a:xfrm>
             <a:off x="548640" y="320040"/>
-            <a:ext cx="11155680" cy="1005840"/>
+            <a:ext cx="11155680" cy="914400"/>
           </a:xfrm>
           <a:prstGeom prst="rect">
             <a:avLst/>
@@ -5431,7 +3851,7 @@
               </a:defRPr>
             </a:pPr>
             <a:r>
-              <a:t>STEP 03  |  화면 구성 및 번호별 기능 가이드</a:t>
+              <a:t>STEP 03  |  그림 보고 바로 따라 하기</a:t>
             </a:r>
           </a:p>
           <a:p>
@@ -5443,7 +3863,7 @@
               </a:defRPr>
             </a:pPr>
             <a:r>
-              <a:t>사원번호로 간편 입장하기</a:t>
+              <a:t>화면 기능 및 주요 선택 버튼 상세 가이드</a:t>
             </a:r>
           </a:p>
           <a:p>
@@ -5455,7 +3875,7 @@
               </a:defRPr>
             </a:pPr>
             <a:r>
-              <a:t>비밀번호 없이 사원번호 6자리 입력만으로 빠르고 안전하게 입장합니다.</a:t>
+              <a:t>어떤 상황에서 어떤 버튼을 사용하는지 직관적으로 확인하세요.</a:t>
             </a:r>
           </a:p>
         </p:txBody>
@@ -5468,8 +3888,8 @@
         </p:nvSpPr>
         <p:spPr>
           <a:xfrm>
-            <a:off x="548640" y="1417320"/>
-            <a:ext cx="3474720" cy="5166360"/>
+            <a:off x="548640" y="1325880"/>
+            <a:ext cx="3200400" cy="5212080"/>
           </a:xfrm>
           <a:prstGeom prst="roundRect">
             <a:avLst/>
@@ -5513,8 +3933,8 @@
         </p:nvSpPr>
         <p:spPr>
           <a:xfrm>
-            <a:off x="685800" y="1554480"/>
-            <a:ext cx="3200400" cy="4892040"/>
+            <a:off x="685800" y="1463040"/>
+            <a:ext cx="2926080" cy="4937760"/>
           </a:xfrm>
           <a:prstGeom prst="rect">
             <a:avLst/>
@@ -5531,14 +3951,14 @@
               <a:spcAft>
                 <a:spcPts val="200"/>
               </a:spcAft>
-              <a:defRPr sz="1250" b="1">
+              <a:defRPr sz="1200" b="1">
                 <a:solidFill>
                   <a:srgbClr val="EA580C"/>
                 </a:solidFill>
               </a:defRPr>
             </a:pPr>
             <a:r>
-              <a:t>① v1.47 최신 버전 배지 확인</a:t>
+              <a:t>🔄 [새로고침] 버튼</a:t>
             </a:r>
           </a:p>
           <a:p>
@@ -5553,7 +3973,7 @@
               </a:defRPr>
             </a:pPr>
             <a:r>
-              <a:t>화면 오른쪽 위에 청록색 [v1.47] 배지가 보이면 최신 버전입니다. 클릭 시 신규 릴리즈 이력이 표시됩니다.</a:t>
+              <a:t>관리자가 내 특근을 승인했는지 실시간 상태를 즉시 확인할 때 누릅니다.</a:t>
             </a:r>
           </a:p>
           <a:p>
@@ -5561,14 +3981,14 @@
               <a:spcAft>
                 <a:spcPts val="200"/>
               </a:spcAft>
-              <a:defRPr sz="1250" b="1">
+              <a:defRPr sz="1200" b="1">
                 <a:solidFill>
                   <a:srgbClr val="EA580C"/>
                 </a:solidFill>
               </a:defRPr>
             </a:pPr>
             <a:r>
-              <a:t>② 사원번호 6자리 숫자 입력</a:t>
+              <a:t>📱 [모바일 접속 QR] 버튼</a:t>
             </a:r>
           </a:p>
           <a:p>
@@ -5583,7 +4003,7 @@
               </a:defRPr>
             </a:pPr>
             <a:r>
-              <a:t>본인의 6자리 사원번호를 입력창에 기재합니다. 복잡한 비밀번호 없이 빠르게 입장 가능합니다.</a:t>
+              <a:t>스마트폰 카메라로 찍어 내 폰에서 편하게 신청하고 싶을 때 누릅니다.</a:t>
             </a:r>
           </a:p>
           <a:p>
@@ -5591,14 +4011,14 @@
               <a:spcAft>
                 <a:spcPts val="200"/>
               </a:spcAft>
-              <a:defRPr sz="1250" b="1">
+              <a:defRPr sz="1200" b="1">
                 <a:solidFill>
                   <a:srgbClr val="EA580C"/>
                 </a:solidFill>
               </a:defRPr>
             </a:pPr>
             <a:r>
-              <a:t>③ [입장하기] 원클릭 이동</a:t>
+              <a:t>💡 [건의사항 소통함] 버튼</a:t>
             </a:r>
           </a:p>
           <a:p>
@@ -5613,7 +4033,7 @@
               </a:defRPr>
             </a:pPr>
             <a:r>
-              <a:t>입력 후 [입장하기]를 누르면 등록된 이름과 소속팀이 자동 확인되어 대시보드로 즉시 입장합니다.</a:t>
+              <a:t>사번/이름 노출 없이 100% 무기명으로 회사/부서에 의견을 낼 때 누릅니다.</a:t>
             </a:r>
           </a:p>
           <a:p>
@@ -5621,14 +4041,14 @@
               <a:spcAft>
                 <a:spcPts val="200"/>
               </a:spcAft>
-              <a:defRPr sz="1250" b="1">
+              <a:defRPr sz="1200" b="1">
                 <a:solidFill>
                   <a:srgbClr val="EA580C"/>
                 </a:solidFill>
               </a:defRPr>
             </a:pPr>
             <a:r>
-              <a:t>④ 미등록 사번 1초 즉시 등록</a:t>
+              <a:t>📋 [목록] vs 📅 [달력] 전환</a:t>
             </a:r>
           </a:p>
           <a:p>
@@ -5643,14 +4063,44 @@
               </a:defRPr>
             </a:pPr>
             <a:r>
-              <a:t>처음 방문한 사번은 신규 등록창이 나타나며, 성명과 소속 부서를 선택하면 즉시 등록되어 입장합니다.</a:t>
+              <a:t>내 특근 내역을 표(리스트) 형태나 달력 형태로 바꿔보고 싶을 때 누릅니다.</a:t>
+            </a:r>
+          </a:p>
+          <a:p>
+            <a:pPr>
+              <a:spcAft>
+                <a:spcPts val="200"/>
+              </a:spcAft>
+              <a:defRPr sz="1200" b="1">
+                <a:solidFill>
+                  <a:srgbClr val="EA580C"/>
+                </a:solidFill>
+              </a:defRPr>
+            </a:pPr>
+            <a:r>
+              <a:t>🎯 [특근완료 확정] 버튼 (핵심!)</a:t>
+            </a:r>
+          </a:p>
+          <a:p>
+            <a:pPr>
+              <a:spcAft>
+                <a:spcPts val="800"/>
+              </a:spcAft>
+              <a:defRPr sz="1050">
+                <a:solidFill>
+                  <a:srgbClr val="0F172A"/>
+                </a:solidFill>
+              </a:defRPr>
+            </a:pPr>
+            <a:r>
+              <a:t>실제 휴일 근무를 마친 후, 출근 완료 피드백을 관리자에게 보낼 때 누릅니다.</a:t>
             </a:r>
           </a:p>
         </p:txBody>
       </p:sp>
       <p:pic>
         <p:nvPicPr>
-          <p:cNvPr id="5" name="Picture 4" descr="mockup_login.png"/>
+          <p:cNvPr id="5" name="Picture 4" descr="mockup_dashboard_buttons.png"/>
           <p:cNvPicPr>
             <a:picLocks noChangeAspect="1"/>
           </p:cNvPicPr>
@@ -5664,8 +4114,8 @@
         </p:blipFill>
         <p:spPr>
           <a:xfrm>
-            <a:off x="4160520" y="1417320"/>
-            <a:ext cx="7543800" cy="5166360"/>
+            <a:off x="3931920" y="1325880"/>
+            <a:ext cx="7772400" cy="5212080"/>
           </a:xfrm>
           <a:prstGeom prst="rect">
             <a:avLst/>
@@ -5698,8 +4148,8 @@
         </p:nvSpPr>
         <p:spPr>
           <a:xfrm>
-            <a:off x="731520" y="365760"/>
-            <a:ext cx="10698480" cy="1005840"/>
+            <a:off x="548640" y="320040"/>
+            <a:ext cx="11155680" cy="914400"/>
           </a:xfrm>
           <a:prstGeom prst="rect">
             <a:avLst/>
@@ -5720,7 +4170,7 @@
               </a:defRPr>
             </a:pPr>
             <a:r>
-              <a:t>STEP 04  |  재입장(재접속) 시 핵심 유의사항 가이드</a:t>
+              <a:t>STEP 04  |  그림 보고 바로 따라 하기</a:t>
             </a:r>
           </a:p>
           <a:p>
@@ -5732,7 +4182,7 @@
               </a:defRPr>
             </a:pPr>
             <a:r>
-              <a:t>다시 접속(재입장)할 때 꼭 알아두어야 할 4대 핵심 가이드</a:t>
+              <a:t>특근 신청 순서 및 선택 버튼 상세 가이드</a:t>
             </a:r>
           </a:p>
           <a:p>
@@ -5744,7 +4194,7 @@
               </a:defRPr>
             </a:pPr>
             <a:r>
-              <a:t>사번 자동 완성, 멀티 디바이스 실시간 동기화, 최신 상태 갱신 및 공용 PC 보안 수칙을 확인하세요.</a:t>
+              <a:t>달력 날짜 콕 ➔ 특근분류 선택 ➔ 예시 입력 ➔ 저장 원클릭으로 10초 만에 신청!</a:t>
             </a:r>
           </a:p>
         </p:txBody>
@@ -5757,18 +4207,18 @@
         </p:nvSpPr>
         <p:spPr>
           <a:xfrm>
-            <a:off x="731520" y="1508760"/>
-            <a:ext cx="5212080" cy="2377440"/>
+            <a:off x="548640" y="1325880"/>
+            <a:ext cx="3200400" cy="5212080"/>
           </a:xfrm>
           <a:prstGeom prst="roundRect">
             <a:avLst/>
           </a:prstGeom>
           <a:solidFill>
-            <a:srgbClr val="FFFFFF"/>
+            <a:srgbClr val="F8FAFC"/>
           </a:solidFill>
-          <a:ln w="19050">
+          <a:ln>
             <a:solidFill>
-              <a:srgbClr val="CBD5E1"/>
+              <a:srgbClr val="E2E8F0"/>
             </a:solidFill>
           </a:ln>
         </p:spPr>
@@ -5802,8 +4252,8 @@
         </p:nvSpPr>
         <p:spPr>
           <a:xfrm>
-            <a:off x="914400" y="1645920"/>
-            <a:ext cx="4846320" cy="2103120"/>
+            <a:off x="685800" y="1463040"/>
+            <a:ext cx="2926080" cy="4937760"/>
           </a:xfrm>
           <a:prstGeom prst="rect">
             <a:avLst/>
@@ -5818,361 +4268,157 @@
           <a:p>
             <a:pPr>
               <a:spcAft>
+                <a:spcPts val="200"/>
+              </a:spcAft>
+              <a:defRPr sz="1200" b="1">
+                <a:solidFill>
+                  <a:srgbClr val="EA580C"/>
+                </a:solidFill>
+              </a:defRPr>
+            </a:pPr>
+            <a:r>
+              <a:t>1단계. 달력 일할 날짜 콕 누르기</a:t>
+            </a:r>
+          </a:p>
+          <a:p>
+            <a:pPr>
+              <a:spcAft>
                 <a:spcPts val="800"/>
               </a:spcAft>
-              <a:defRPr sz="1500" b="1">
-                <a:solidFill>
-                  <a:srgbClr val="1E3A8A"/>
-                </a:solidFill>
-              </a:defRPr>
-            </a:pPr>
-            <a:r>
-              <a:t>유의사항 01  |  1. 사원번호 자동 완성 (원클릭 재입장)</a:t>
-            </a:r>
-          </a:p>
-          <a:p>
-            <a:pPr>
-              <a:lnSpc>
-                <a:spcPct val="130000"/>
-              </a:lnSpc>
-              <a:defRPr sz="1150">
+              <a:defRPr sz="1050">
                 <a:solidFill>
                   <a:srgbClr val="0F172A"/>
                 </a:solidFill>
               </a:defRPr>
             </a:pPr>
             <a:r>
-              <a:t>• 브라우저 로컬 저장소(LocalStorage)에 직전에 로그인했던 본인 사번 6자리가 안전하게 기억됩니다.</a:t>
+              <a:t>우측 달력에서 일할 토/일요일을 클릭하면 시작일과 종료일이 자동 세팅됩니다.</a:t>
+            </a:r>
+          </a:p>
+          <a:p>
+            <a:pPr>
+              <a:spcAft>
+                <a:spcPts val="200"/>
+              </a:spcAft>
+              <a:defRPr sz="1200" b="1">
+                <a:solidFill>
+                  <a:srgbClr val="EA580C"/>
+                </a:solidFill>
+              </a:defRPr>
+            </a:pPr>
+            <a:r>
+              <a:t>2단계. 특근 분류 버튼 선택 (★)</a:t>
+            </a:r>
+          </a:p>
+          <a:p>
+            <a:pPr>
+              <a:spcAft>
+                <a:spcPts val="800"/>
+              </a:spcAft>
+              <a:defRPr sz="1050">
+                <a:solidFill>
+                  <a:srgbClr val="0F172A"/>
+                </a:solidFill>
+              </a:defRPr>
+            </a:pPr>
+            <a:r>
+              <a:t>● 일반휴일: 주말 나와서 정상 특근할 때</a:t>
             </a:r>
             <a:br/>
             <a:r>
-              <a:t>• 창을 닫았다가 다시 열었을 때 사번을 재입력할 필요 없이 [입장하기] 버튼만 누르면 1초 만에 바로 진입합니다.</a:t>
+              <a:t>● 대체근무: 평일 쉬고 주말 일할 때</a:t>
             </a:r>
             <a:br/>
             <a:r>
-              <a:t>• 다른 사번으로 로그인해야 할 때는 입력창의 숫자를 지우고 새 사번을 입력하시면 됩니다.</a:t>
-            </a:r>
-          </a:p>
-        </p:txBody>
-      </p:sp>
-      <p:sp>
-        <p:nvSpPr>
-          <p:cNvPr id="5" name="Rounded Rectangle 4"/>
-          <p:cNvSpPr/>
+              <a:t>● 법정휴일: 설날/추석/공휴일 근무 시</a:t>
+            </a:r>
+          </a:p>
+          <a:p>
+            <a:pPr>
+              <a:spcAft>
+                <a:spcPts val="200"/>
+              </a:spcAft>
+              <a:defRPr sz="1200" b="1">
+                <a:solidFill>
+                  <a:srgbClr val="EA580C"/>
+                </a:solidFill>
+              </a:defRPr>
+            </a:pPr>
+            <a:r>
+              <a:t>3단계. 항목 입력 (선택적 항목 예시)</a:t>
+            </a:r>
+          </a:p>
+          <a:p>
+            <a:pPr>
+              <a:spcAft>
+                <a:spcPts val="800"/>
+              </a:spcAft>
+              <a:defRPr sz="1050">
+                <a:solidFill>
+                  <a:srgbClr val="0F172A"/>
+                </a:solidFill>
+              </a:defRPr>
+            </a:pPr>
+            <a:r>
+              <a:t>프로젝트(BT2601-L1), 장소(5층 제어실), 사유(설비 점검)를 예시 참고하여 기재합니다.</a:t>
+            </a:r>
+          </a:p>
+          <a:p>
+            <a:pPr>
+              <a:spcAft>
+                <a:spcPts val="200"/>
+              </a:spcAft>
+              <a:defRPr sz="1200" b="1">
+                <a:solidFill>
+                  <a:srgbClr val="EA580C"/>
+                </a:solidFill>
+              </a:defRPr>
+            </a:pPr>
+            <a:r>
+              <a:t>4단계. [💾 특근 신청 저장하기] 클릭</a:t>
+            </a:r>
+          </a:p>
+          <a:p>
+            <a:pPr>
+              <a:spcAft>
+                <a:spcPts val="800"/>
+              </a:spcAft>
+              <a:defRPr sz="1050">
+                <a:solidFill>
+                  <a:srgbClr val="0F172A"/>
+                </a:solidFill>
+              </a:defRPr>
+            </a:pPr>
+            <a:r>
+              <a:t>초록색 저장 버튼을 누르면 신청 즉시 달력과 내역에 바로 등록 완료됩니다!</a:t>
+            </a:r>
+          </a:p>
+        </p:txBody>
+      </p:sp>
+      <p:pic>
+        <p:nvPicPr>
+          <p:cNvPr id="5" name="Picture 4" descr="mockup_apply_flow.png"/>
+          <p:cNvPicPr>
+            <a:picLocks noChangeAspect="1"/>
+          </p:cNvPicPr>
           <p:nvPr/>
-        </p:nvSpPr>
-        <p:spPr>
-          <a:xfrm>
-            <a:off x="6217920" y="1508760"/>
-            <a:ext cx="5212080" cy="2377440"/>
-          </a:xfrm>
-          <a:prstGeom prst="roundRect">
-            <a:avLst/>
-          </a:prstGeom>
-          <a:solidFill>
-            <a:srgbClr val="FFFFFF"/>
-          </a:solidFill>
-          <a:ln w="19050">
-            <a:solidFill>
-              <a:srgbClr val="CBD5E1"/>
-            </a:solidFill>
-          </a:ln>
-        </p:spPr>
-        <p:style>
-          <a:lnRef idx="1">
-            <a:schemeClr val="accent1"/>
-          </a:lnRef>
-          <a:fillRef idx="3">
-            <a:schemeClr val="accent1"/>
-          </a:fillRef>
-          <a:effectRef idx="2">
-            <a:schemeClr val="accent1"/>
-          </a:effectRef>
-          <a:fontRef idx="minor">
-            <a:schemeClr val="lt1"/>
-          </a:fontRef>
-        </p:style>
-        <p:txBody>
-          <a:bodyPr rtlCol="0" anchor="ctr"/>
-          <a:lstStyle/>
-          <a:p>
-            <a:pPr algn="ctr"/>
-          </a:p>
-        </p:txBody>
-      </p:sp>
-      <p:sp>
-        <p:nvSpPr>
-          <p:cNvPr id="6" name="TextBox 5"/>
-          <p:cNvSpPr txBox="1"/>
-          <p:nvPr/>
-        </p:nvSpPr>
-        <p:spPr>
-          <a:xfrm>
-            <a:off x="6400800" y="1645920"/>
-            <a:ext cx="4846320" cy="2103120"/>
+        </p:nvPicPr>
+        <p:blipFill>
+          <a:blip r:embed="rId2"/>
+          <a:stretch>
+            <a:fillRect/>
+          </a:stretch>
+        </p:blipFill>
+        <p:spPr>
+          <a:xfrm>
+            <a:off x="3931920" y="1325880"/>
+            <a:ext cx="7772400" cy="5212080"/>
           </a:xfrm>
           <a:prstGeom prst="rect">
             <a:avLst/>
           </a:prstGeom>
-          <a:noFill/>
-        </p:spPr>
-        <p:txBody>
-          <a:bodyPr wrap="square">
-            <a:spAutoFit/>
-          </a:bodyPr>
-          <a:lstStyle/>
-          <a:p>
-            <a:pPr>
-              <a:spcAft>
-                <a:spcPts val="800"/>
-              </a:spcAft>
-              <a:defRPr sz="1500" b="1">
-                <a:solidFill>
-                  <a:srgbClr val="1E3A8A"/>
-                </a:solidFill>
-              </a:defRPr>
-            </a:pPr>
-            <a:r>
-              <a:t>유의사항 02  |  2. PC ↔ 스마트폰 실시간 100% 동기화</a:t>
-            </a:r>
-          </a:p>
-          <a:p>
-            <a:pPr>
-              <a:lnSpc>
-                <a:spcPct val="130000"/>
-              </a:lnSpc>
-              <a:defRPr sz="1150">
-                <a:solidFill>
-                  <a:srgbClr val="0F172A"/>
-                </a:solidFill>
-              </a:defRPr>
-            </a:pPr>
-            <a:r>
-              <a:t>• 스마트폰(모바일)에서 신청한 내역을 회사 PC에서 열어도, 반대로 PC에서 신청한 내역을 폰에서 열어도 동일합니다.</a:t>
-            </a:r>
-            <a:br/>
-            <a:r>
-              <a:t>• 중앙 데이터베이스(data/overtime.db)를 실시간 공유하므로 어떤 기기에서 재입장하더라도 본인 데이터가 완벽 유지됩니다.</a:t>
-            </a:r>
-            <a:br/>
-            <a:r>
-              <a:t>• 기기를 교체하더라도 회원가입 없이 본인 사번만 입력하면 기존 내역을 즉시 조회할 수 있습니다.</a:t>
-            </a:r>
-          </a:p>
-        </p:txBody>
-      </p:sp>
-      <p:sp>
-        <p:nvSpPr>
-          <p:cNvPr id="7" name="Rounded Rectangle 6"/>
-          <p:cNvSpPr/>
-          <p:nvPr/>
-        </p:nvSpPr>
-        <p:spPr>
-          <a:xfrm>
-            <a:off x="731520" y="4069080"/>
-            <a:ext cx="5212080" cy="2377440"/>
-          </a:xfrm>
-          <a:prstGeom prst="roundRect">
-            <a:avLst/>
-          </a:prstGeom>
-          <a:solidFill>
-            <a:srgbClr val="FFFFFF"/>
-          </a:solidFill>
-          <a:ln w="19050">
-            <a:solidFill>
-              <a:srgbClr val="CBD5E1"/>
-            </a:solidFill>
-          </a:ln>
-        </p:spPr>
-        <p:style>
-          <a:lnRef idx="1">
-            <a:schemeClr val="accent1"/>
-          </a:lnRef>
-          <a:fillRef idx="3">
-            <a:schemeClr val="accent1"/>
-          </a:fillRef>
-          <a:effectRef idx="2">
-            <a:schemeClr val="accent1"/>
-          </a:effectRef>
-          <a:fontRef idx="minor">
-            <a:schemeClr val="lt1"/>
-          </a:fontRef>
-        </p:style>
-        <p:txBody>
-          <a:bodyPr rtlCol="0" anchor="ctr"/>
-          <a:lstStyle/>
-          <a:p>
-            <a:pPr algn="ctr"/>
-          </a:p>
-        </p:txBody>
-      </p:sp>
-      <p:sp>
-        <p:nvSpPr>
-          <p:cNvPr id="8" name="TextBox 7"/>
-          <p:cNvSpPr txBox="1"/>
-          <p:nvPr/>
-        </p:nvSpPr>
-        <p:spPr>
-          <a:xfrm>
-            <a:off x="914400" y="4206240"/>
-            <a:ext cx="4846320" cy="2103120"/>
-          </a:xfrm>
-          <a:prstGeom prst="rect">
-            <a:avLst/>
-          </a:prstGeom>
-          <a:noFill/>
-        </p:spPr>
-        <p:txBody>
-          <a:bodyPr wrap="square">
-            <a:spAutoFit/>
-          </a:bodyPr>
-          <a:lstStyle/>
-          <a:p>
-            <a:pPr>
-              <a:spcAft>
-                <a:spcPts val="800"/>
-              </a:spcAft>
-              <a:defRPr sz="1500" b="1">
-                <a:solidFill>
-                  <a:srgbClr val="1E3A8A"/>
-                </a:solidFill>
-              </a:defRPr>
-            </a:pPr>
-            <a:r>
-              <a:t>유의사항 03  |  3. 재입장 시 [새로고침] 1회 권장 (상태 동기화)</a:t>
-            </a:r>
-          </a:p>
-          <a:p>
-            <a:pPr>
-              <a:lnSpc>
-                <a:spcPct val="130000"/>
-              </a:lnSpc>
-              <a:defRPr sz="1150">
-                <a:solidFill>
-                  <a:srgbClr val="0F172A"/>
-                </a:solidFill>
-              </a:defRPr>
-            </a:pPr>
-            <a:r>
-              <a:t>• 브라우저 탭을 백그라운드에 켜두었거나 다시 접속했을 때는 화면 상단 [🔄 새로고침] 버튼 또는 F5를 1회 눌러주세요.</a:t>
-            </a:r>
-            <a:br/>
-            <a:r>
-              <a:t>• 부서 관리자가 승인 도장을 새로 찍었거나 팀원 일정이 변경되었을 때 1초 만에 최신 상태로 화면이 새로고침됩니다.</a:t>
-            </a:r>
-            <a:br/>
-            <a:r>
-              <a:t>• 네트워크 일시 지연이 발생할 때도 상단 새로고침 버튼을 누르면 즉시 정상 회복됩니다.</a:t>
-            </a:r>
-          </a:p>
-        </p:txBody>
-      </p:sp>
-      <p:sp>
-        <p:nvSpPr>
-          <p:cNvPr id="9" name="Rounded Rectangle 8"/>
-          <p:cNvSpPr/>
-          <p:nvPr/>
-        </p:nvSpPr>
-        <p:spPr>
-          <a:xfrm>
-            <a:off x="6217920" y="4069080"/>
-            <a:ext cx="5212080" cy="2377440"/>
-          </a:xfrm>
-          <a:prstGeom prst="roundRect">
-            <a:avLst/>
-          </a:prstGeom>
-          <a:solidFill>
-            <a:srgbClr val="FFFFFF"/>
-          </a:solidFill>
-          <a:ln w="19050">
-            <a:solidFill>
-              <a:srgbClr val="CBD5E1"/>
-            </a:solidFill>
-          </a:ln>
-        </p:spPr>
-        <p:style>
-          <a:lnRef idx="1">
-            <a:schemeClr val="accent1"/>
-          </a:lnRef>
-          <a:fillRef idx="3">
-            <a:schemeClr val="accent1"/>
-          </a:fillRef>
-          <a:effectRef idx="2">
-            <a:schemeClr val="accent1"/>
-          </a:effectRef>
-          <a:fontRef idx="minor">
-            <a:schemeClr val="lt1"/>
-          </a:fontRef>
-        </p:style>
-        <p:txBody>
-          <a:bodyPr rtlCol="0" anchor="ctr"/>
-          <a:lstStyle/>
-          <a:p>
-            <a:pPr algn="ctr"/>
-          </a:p>
-        </p:txBody>
-      </p:sp>
-      <p:sp>
-        <p:nvSpPr>
-          <p:cNvPr id="10" name="TextBox 9"/>
-          <p:cNvSpPr txBox="1"/>
-          <p:nvPr/>
-        </p:nvSpPr>
-        <p:spPr>
-          <a:xfrm>
-            <a:off x="6400800" y="4206240"/>
-            <a:ext cx="4846320" cy="2103120"/>
-          </a:xfrm>
-          <a:prstGeom prst="rect">
-            <a:avLst/>
-          </a:prstGeom>
-          <a:noFill/>
-        </p:spPr>
-        <p:txBody>
-          <a:bodyPr wrap="square">
-            <a:spAutoFit/>
-          </a:bodyPr>
-          <a:lstStyle/>
-          <a:p>
-            <a:pPr>
-              <a:spcAft>
-                <a:spcPts val="800"/>
-              </a:spcAft>
-              <a:defRPr sz="1500" b="1">
-                <a:solidFill>
-                  <a:srgbClr val="1E3A8A"/>
-                </a:solidFill>
-              </a:defRPr>
-            </a:pPr>
-            <a:r>
-              <a:t>유의사항 04  |  4. 공용 PC 보안 수칙 &amp; 중복 신청 방지 유의</a:t>
-            </a:r>
-          </a:p>
-          <a:p>
-            <a:pPr>
-              <a:lnSpc>
-                <a:spcPct val="130000"/>
-              </a:lnSpc>
-              <a:defRPr sz="1150">
-                <a:solidFill>
-                  <a:srgbClr val="0F172A"/>
-                </a:solidFill>
-              </a:defRPr>
-            </a:pPr>
-            <a:r>
-              <a:t>• 회의실, 공용 작업장 PC 등 여러 사람이 함께 쓰는 PC에서는 본인 신청 후 반드시 브라우저 탭을 닫아주세요.</a:t>
-            </a:r>
-            <a:br/>
-            <a:r>
-              <a:t>• 다른 동료가 연이어 사용할 때는 사원번호 입력창에 본인 사번을 새로 덮어쓰고 입장하도록 안내합니다.</a:t>
-            </a:r>
-            <a:br/>
-            <a:r>
-              <a:t>• 동일한 날짜에는 시스템이 중복 신청을 사전에 원천 차단하므로, 날짜 변경 시에는 '내 신청 내역'에서 [수정] 버튼을 이용하세요.</a:t>
-            </a:r>
-          </a:p>
-        </p:txBody>
-      </p:sp>
+        </p:spPr>
+      </p:pic>
     </p:spTree>
   </p:cSld>
   <p:clrMapOvr>
@@ -6200,7 +4446,7 @@
         <p:spPr>
           <a:xfrm>
             <a:off x="548640" y="320040"/>
-            <a:ext cx="11155680" cy="1005840"/>
+            <a:ext cx="11155680" cy="914400"/>
           </a:xfrm>
           <a:prstGeom prst="rect">
             <a:avLst/>
@@ -6221,7 +4467,7 @@
               </a:defRPr>
             </a:pPr>
             <a:r>
-              <a:t>STEP 05  |  화면 구성 및 번호별 기능 가이드</a:t>
+              <a:t>STEP 05  |  그림 보고 바로 따라 하기</a:t>
             </a:r>
           </a:p>
           <a:p>
@@ -6233,7 +4479,7 @@
               </a:defRPr>
             </a:pPr>
             <a:r>
-              <a:t>스마트 달력 기반 특근 신청</a:t>
+              <a:t>나의 특근 내역 점검 및 [🎯 특근완료 확정]</a:t>
             </a:r>
           </a:p>
           <a:p>
@@ -6245,7 +4491,7 @@
               </a:defRPr>
             </a:pPr>
             <a:r>
-              <a:t>일반휴일 및 이번 주 토요일이 기본 선택되어 몇 초 만에 신청이 완료됩니다.</a:t>
+              <a:t>관리자 승인 확인부터 수정/취소, 실제 근무 후 완료 피드백까지 한눈에 관리!</a:t>
             </a:r>
           </a:p>
         </p:txBody>
@@ -6258,8 +4504,8 @@
         </p:nvSpPr>
         <p:spPr>
           <a:xfrm>
-            <a:off x="548640" y="1417320"/>
-            <a:ext cx="3474720" cy="5166360"/>
+            <a:off x="548640" y="1325880"/>
+            <a:ext cx="3200400" cy="5212080"/>
           </a:xfrm>
           <a:prstGeom prst="roundRect">
             <a:avLst/>
@@ -6303,8 +4549,8 @@
         </p:nvSpPr>
         <p:spPr>
           <a:xfrm>
-            <a:off x="685800" y="1554480"/>
-            <a:ext cx="3200400" cy="4892040"/>
+            <a:off x="685800" y="1463040"/>
+            <a:ext cx="2926080" cy="4937760"/>
           </a:xfrm>
           <a:prstGeom prst="rect">
             <a:avLst/>
@@ -6321,14 +4567,14 @@
               <a:spcAft>
                 <a:spcPts val="200"/>
               </a:spcAft>
-              <a:defRPr sz="1250" b="1">
+              <a:defRPr sz="1200" b="1">
                 <a:solidFill>
                   <a:srgbClr val="EA580C"/>
                 </a:solidFill>
               </a:defRPr>
             </a:pPr>
             <a:r>
-              <a:t>① [일반휴일] 기본 선택 &amp; 토요일 자동 세팅</a:t>
+              <a:t>① 승인 확인: 초록색 [✓ 승인완료]</a:t>
             </a:r>
           </a:p>
           <a:p>
@@ -6343,7 +4589,7 @@
               </a:defRPr>
             </a:pPr>
             <a:r>
-              <a:t>주말 특근에 가장 많이 쓰이는 '일반휴일'이 디폴트로 선택되며, 시작일/종료일이 이번 주 토요일로 자동 설정됩니다.</a:t>
+              <a:t>관리자가 사전 승인하면 내 신청 내역에 [✓ 승인완료] 배지가 표시됩니다.</a:t>
             </a:r>
           </a:p>
           <a:p>
@@ -6351,14 +4597,14 @@
               <a:spcAft>
                 <a:spcPts val="200"/>
               </a:spcAft>
-              <a:defRPr sz="1250" b="1">
+              <a:defRPr sz="1200" b="1">
                 <a:solidFill>
                   <a:srgbClr val="EA580C"/>
                 </a:solidFill>
               </a:defRPr>
             </a:pPr>
             <a:r>
-              <a:t>② 시작일/종료일 상호 자동 동기화</a:t>
+              <a:t>② 일정 변경 및 취소: [수정] / [취소]</a:t>
             </a:r>
           </a:p>
           <a:p>
@@ -6373,7 +4619,7 @@
               </a:defRPr>
             </a:pPr>
             <a:r>
-              <a:t>시작일(또는 종료일)을 선택하면 다른 날짜도 동일하게 자동 변경되며, 이후 두 번째 날짜를 변경해 2단계로 자유롭게 범위를 설정합니다.</a:t>
+              <a:t>일정이나 사유를 고칠 때는 [수정], 특근이 취소되었을 때는 [취소]를 누릅니다.</a:t>
             </a:r>
           </a:p>
           <a:p>
@@ -6381,14 +4627,14 @@
               <a:spcAft>
                 <a:spcPts val="200"/>
               </a:spcAft>
-              <a:defRPr sz="1250" b="1">
+              <a:defRPr sz="1200" b="1">
                 <a:solidFill>
                   <a:srgbClr val="EA580C"/>
                 </a:solidFill>
               </a:defRPr>
             </a:pPr>
             <a:r>
-              <a:t>③ 프로젝트번호/장소/사유 입력 가이드</a:t>
+              <a:t>③ ★ [🎯 특근완료 확정] (필독!)</a:t>
             </a:r>
           </a:p>
           <a:p>
@@ -6403,7 +4649,7 @@
               </a:defRPr>
             </a:pPr>
             <a:r>
-              <a:t>프로젝트번호(예: BT2601-L1), 근무장소(예: 본사5층), 특근사유(예: 프로그램 개발) 예시 가이드가 기본 제공됩니다.</a:t>
+              <a:t>실제 휴일 근무를 마치고 퇴근 시 눌러 관리자에게 '출근 완료'를 최종 보고합니다.</a:t>
             </a:r>
           </a:p>
           <a:p>
@@ -6411,14 +4657,14 @@
               <a:spcAft>
                 <a:spcPts val="200"/>
               </a:spcAft>
-              <a:defRPr sz="1250" b="1">
+              <a:defRPr sz="1200" b="1">
                 <a:solidFill>
                   <a:srgbClr val="EA580C"/>
                 </a:solidFill>
               </a:defRPr>
             </a:pPr>
             <a:r>
-              <a:t>④ 달력 인터랙티브 날짜 선택 &amp; 중복 방지</a:t>
+              <a:t>④ 4단계 라이프사이클 안심 진행</a:t>
             </a:r>
           </a:p>
           <a:p>
@@ -6433,14 +4679,14 @@
               </a:defRPr>
             </a:pPr>
             <a:r>
-              <a:t>오른쪽 달력에서 날짜를 터치하여 선택할 수 있으며, 동일한 날짜에 중복 신청하는 실수를 사전에 원천 차단합니다.</a:t>
+              <a:t>승인대기 ➔ 승인완료 ➔ 확정완료 ➔ 검토완료 순서로 투명하게 처리됩니다.</a:t>
             </a:r>
           </a:p>
         </p:txBody>
       </p:sp>
       <p:pic>
         <p:nvPicPr>
-          <p:cNvPr id="5" name="Picture 4" descr="mockup_apply.png"/>
+          <p:cNvPr id="5" name="Picture 4" descr="mockup_my_records_guide.png"/>
           <p:cNvPicPr>
             <a:picLocks noChangeAspect="1"/>
           </p:cNvPicPr>
@@ -6454,8 +4700,8 @@
         </p:blipFill>
         <p:spPr>
           <a:xfrm>
-            <a:off x="4160520" y="1417320"/>
-            <a:ext cx="7543800" cy="5166360"/>
+            <a:off x="3931920" y="1325880"/>
+            <a:ext cx="7772400" cy="5212080"/>
           </a:xfrm>
           <a:prstGeom prst="rect">
             <a:avLst/>
@@ -6489,7 +4735,7 @@
         <p:spPr>
           <a:xfrm>
             <a:off x="548640" y="320040"/>
-            <a:ext cx="11155680" cy="1005840"/>
+            <a:ext cx="11155680" cy="914400"/>
           </a:xfrm>
           <a:prstGeom prst="rect">
             <a:avLst/>
@@ -6510,7 +4756,7 @@
               </a:defRPr>
             </a:pPr>
             <a:r>
-              <a:t>STEP 06  |  화면 구성 및 번호별 기능 가이드</a:t>
+              <a:t>STEP 06  |  그림 보고 바로 따라 하기</a:t>
             </a:r>
           </a:p>
           <a:p>
@@ -6522,7 +4768,7 @@
               </a:defRPr>
             </a:pPr>
             <a:r>
-              <a:t>나의 특근 신청 내역 및 다차원 검색</a:t>
+              <a:t>스마트폰 모바일 1분 퀵 가이드</a:t>
             </a:r>
           </a:p>
           <a:p>
@@ -6534,7 +4780,7 @@
               </a:defRPr>
             </a:pPr>
             <a:r>
-              <a:t>다양한 검색 조건과 개인 달력 뷰로 본인의 특근 일정을 편리하게 확인합니다.</a:t>
+              <a:t>앱 설치 없이 카메라 QR 스캔 ➔ 사번 로그인 ➔ 터치 신청으로 어디서나 간편하게!</a:t>
             </a:r>
           </a:p>
         </p:txBody>
@@ -6547,8 +4793,8 @@
         </p:nvSpPr>
         <p:spPr>
           <a:xfrm>
-            <a:off x="548640" y="1417320"/>
-            <a:ext cx="3474720" cy="5166360"/>
+            <a:off x="548640" y="1325880"/>
+            <a:ext cx="3200400" cy="5212080"/>
           </a:xfrm>
           <a:prstGeom prst="roundRect">
             <a:avLst/>
@@ -6592,8 +4838,8 @@
         </p:nvSpPr>
         <p:spPr>
           <a:xfrm>
-            <a:off x="685800" y="1554480"/>
-            <a:ext cx="3200400" cy="4892040"/>
+            <a:off x="685800" y="1463040"/>
+            <a:ext cx="2926080" cy="4937760"/>
           </a:xfrm>
           <a:prstGeom prst="rect">
             <a:avLst/>
@@ -6610,14 +4856,14 @@
               <a:spcAft>
                 <a:spcPts val="200"/>
               </a:spcAft>
-              <a:defRPr sz="1250" b="1">
+              <a:defRPr sz="1200" b="1">
                 <a:solidFill>
                   <a:srgbClr val="EA580C"/>
                 </a:solidFill>
               </a:defRPr>
             </a:pPr>
             <a:r>
-              <a:t>① 실시간 검색 결과 통계 요약 바</a:t>
+              <a:t>① 카메라로 상단 QR 비추기</a:t>
             </a:r>
           </a:p>
           <a:p>
@@ -6632,7 +4878,7 @@
               </a:defRPr>
             </a:pPr>
             <a:r>
-              <a:t>검색 조건에 맞춰 총 건수(총 일수), 승인완료/대기 건수, 일반/법정/대체근무별 수량이 미니 통계 칩으로 실시간 집계 표시됩니다.</a:t>
+              <a:t>별도 앱 설치 없이 기본 카메라로 QR 코드를 비추면 1초 만에 모바일 웹이 열립니다.</a:t>
             </a:r>
           </a:p>
           <a:p>
@@ -6640,14 +4886,14 @@
               <a:spcAft>
                 <a:spcPts val="200"/>
               </a:spcAft>
-              <a:defRPr sz="1250" b="1">
+              <a:defRPr sz="1200" b="1">
                 <a:solidFill>
                   <a:srgbClr val="EA580C"/>
                 </a:solidFill>
               </a:defRPr>
             </a:pPr>
             <a:r>
-              <a:t>② 다차원 검색 필터</a:t>
+              <a:t>② 사번 6자리 터치 로그인</a:t>
             </a:r>
           </a:p>
           <a:p>
@@ -6662,7 +4908,7 @@
               </a:defRPr>
             </a:pPr>
             <a:r>
-              <a:t>조회기간, 특근구분, 승인상태 및 프로젝트/장소/사유 통합 키워드 검색으로 원하는 특근을 즉시 찾습니다.</a:t>
+              <a:t>스마트폰에서도 사번 자동 기억이 지원되어 매번 재입력할 필요 없습니다.</a:t>
             </a:r>
           </a:p>
           <a:p>
@@ -6670,14 +4916,14 @@
               <a:spcAft>
                 <a:spcPts val="200"/>
               </a:spcAft>
-              <a:defRPr sz="1250" b="1">
+              <a:defRPr sz="1200" b="1">
                 <a:solidFill>
                   <a:srgbClr val="EA580C"/>
                 </a:solidFill>
               </a:defRPr>
             </a:pPr>
             <a:r>
-              <a:t>③ 목록 보기 ↔ 개인 달력 보기 전환</a:t>
+              <a:t>③ 달력 날짜 터치 &amp; 신청 저장</a:t>
             </a:r>
           </a:p>
           <a:p>
@@ -6692,7 +4938,7 @@
               </a:defRPr>
             </a:pPr>
             <a:r>
-              <a:t>신청 내역을 카드 리스트 형태뿐만 아니라 개인 전용 월간 달력 형태로도 한눈에 확인할 수 있습니다.</a:t>
+              <a:t>이동 중이나 자택에서도 손가락 터치 2번으로 10초 만에 특근을 신청합니다.</a:t>
             </a:r>
           </a:p>
           <a:p>
@@ -6700,14 +4946,14 @@
               <a:spcAft>
                 <a:spcPts val="200"/>
               </a:spcAft>
-              <a:defRPr sz="1250" b="1">
+              <a:defRPr sz="1200" b="1">
                 <a:solidFill>
                   <a:srgbClr val="EA580C"/>
                 </a:solidFill>
               </a:defRPr>
             </a:pPr>
             <a:r>
-              <a:t>④ 승인 상태 및 대체휴일 명확 표시 &amp; 수정/취소</a:t>
+              <a:t>★ [홈 화면에 추가] (전용 앱 등록)</a:t>
             </a:r>
           </a:p>
           <a:p>
@@ -6722,14 +4968,14 @@
               </a:defRPr>
             </a:pPr>
             <a:r>
-              <a:t>관리자 승인 시 [✓ 확인완료] 표시, 대휴 일수 안내, 일정 변경 시 [수정], 취소 시 [삭제] 및 이력이 안전 보존됩니다.</a:t>
+              <a:t>브라우저 메뉴에서 홈 화면 추가 시 스마트폰 앱 아이콘으로 등록되어 바로 실행됩니다.</a:t>
             </a:r>
           </a:p>
         </p:txBody>
       </p:sp>
       <p:pic>
         <p:nvPicPr>
-          <p:cNvPr id="5" name="Picture 4" descr="mockup_my.png"/>
+          <p:cNvPr id="5" name="Picture 4" descr="mockup_mobile_flow.png"/>
           <p:cNvPicPr>
             <a:picLocks noChangeAspect="1"/>
           </p:cNvPicPr>
@@ -6743,8 +4989,8 @@
         </p:blipFill>
         <p:spPr>
           <a:xfrm>
-            <a:off x="4160520" y="1417320"/>
-            <a:ext cx="7543800" cy="5166360"/>
+            <a:off x="3931920" y="1325880"/>
+            <a:ext cx="7772400" cy="5212080"/>
           </a:xfrm>
           <a:prstGeom prst="rect">
             <a:avLst/>
@@ -6777,8 +5023,8 @@
         </p:nvSpPr>
         <p:spPr>
           <a:xfrm>
-            <a:off x="731520" y="365760"/>
-            <a:ext cx="10698480" cy="1005840"/>
+            <a:off x="548640" y="320040"/>
+            <a:ext cx="11155680" cy="914400"/>
           </a:xfrm>
           <a:prstGeom prst="rect">
             <a:avLst/>
@@ -6799,7 +5045,7 @@
               </a:defRPr>
             </a:pPr>
             <a:r>
-              <a:t>STEP 07  |  특근 4단계 라이프사이클 &amp; 사원 [확정] 피드백 (v1.47 최신)</a:t>
+              <a:t>STEP 07  |  그림 보고 바로 따라 하기</a:t>
             </a:r>
           </a:p>
           <a:p>
@@ -6811,7 +5057,7 @@
               </a:defRPr>
             </a:pPr>
             <a:r>
-              <a:t>특근 4단계 라이프사이클 &amp; 승인/확정 독립 운영</a:t>
+              <a:t>사원 전용 100% 무기명 건의사항 소통함</a:t>
             </a:r>
           </a:p>
           <a:p>
@@ -6823,7 +5069,7 @@
               </a:defRPr>
             </a:pPr>
             <a:r>
-              <a:t>신청 후 승인이 없어도 사원이 즉시 확정 가능! 승인과 확정이 분리된 유연한 피드백 체계</a:t>
+              <a:t>사번 노출 걱정 제로! 자유로운 의견 제안과 관리자 공식 답변 확인을 지원합니다.</a:t>
             </a:r>
           </a:p>
         </p:txBody>
@@ -6836,18 +5082,18 @@
         </p:nvSpPr>
         <p:spPr>
           <a:xfrm>
-            <a:off x="731520" y="1645920"/>
-            <a:ext cx="3383280" cy="4389120"/>
+            <a:off x="548640" y="1325880"/>
+            <a:ext cx="3200400" cy="5212080"/>
           </a:xfrm>
           <a:prstGeom prst="roundRect">
             <a:avLst/>
           </a:prstGeom>
           <a:solidFill>
-            <a:srgbClr val="FFFFFF"/>
+            <a:srgbClr val="F8FAFC"/>
           </a:solidFill>
-          <a:ln w="25400">
+          <a:ln>
             <a:solidFill>
-              <a:srgbClr val="CBD5E1"/>
+              <a:srgbClr val="E2E8F0"/>
             </a:solidFill>
           </a:ln>
         </p:spPr>
@@ -6881,8 +5127,8 @@
         </p:nvSpPr>
         <p:spPr>
           <a:xfrm>
-            <a:off x="914400" y="1828800"/>
-            <a:ext cx="3017520" cy="3931920"/>
+            <a:off x="685800" y="1463040"/>
+            <a:ext cx="2926080" cy="4937760"/>
           </a:xfrm>
           <a:prstGeom prst="rect">
             <a:avLst/>
@@ -6897,8 +5143,38 @@
           <a:p>
             <a:pPr>
               <a:spcAft>
+                <a:spcPts val="200"/>
+              </a:spcAft>
+              <a:defRPr sz="1200" b="1">
+                <a:solidFill>
+                  <a:srgbClr val="EA580C"/>
+                </a:solidFill>
+              </a:defRPr>
+            </a:pPr>
+            <a:r>
+              <a:t>① 화면 상단 [💡 건의사항 소통함] 클릭</a:t>
+            </a:r>
+          </a:p>
+          <a:p>
+            <a:pPr>
+              <a:spcAft>
                 <a:spcPts val="800"/>
               </a:spcAft>
+              <a:defRPr sz="1050">
+                <a:solidFill>
+                  <a:srgbClr val="0F172A"/>
+                </a:solidFill>
+              </a:defRPr>
+            </a:pPr>
+            <a:r>
+              <a:t>언제든 상단 노란색 소통함 버튼을 누르면 무기명 팝업창이 열립니다.</a:t>
+            </a:r>
+          </a:p>
+          <a:p>
+            <a:pPr>
+              <a:spcAft>
+                <a:spcPts val="200"/>
+              </a:spcAft>
               <a:defRPr sz="1200" b="1">
                 <a:solidFill>
                   <a:srgbClr val="EA580C"/>
@@ -6906,299 +5182,110 @@
               </a:defRPr>
             </a:pPr>
             <a:r>
-              <a:t>핵심 절차 01</a:t>
-            </a:r>
-          </a:p>
-          <a:p>
-            <a:pPr>
-              <a:spcAft>
-                <a:spcPts val="1400"/>
-              </a:spcAft>
-              <a:defRPr sz="1800" b="1">
-                <a:solidFill>
-                  <a:srgbClr val="1E3A8A"/>
-                </a:solidFill>
-              </a:defRPr>
-            </a:pPr>
-            <a:r>
-              <a:t>1. 승인과 확정의 독립 분리 체계</a:t>
-            </a:r>
-          </a:p>
-          <a:p>
-            <a:pPr>
-              <a:lnSpc>
-                <a:spcPct val="135000"/>
-              </a:lnSpc>
-              <a:defRPr sz="1250">
+              <a:t>② 100% 무기명 보장 (추적 불가)</a:t>
+            </a:r>
+          </a:p>
+          <a:p>
+            <a:pPr>
+              <a:spcAft>
+                <a:spcPts val="800"/>
+              </a:spcAft>
+              <a:defRPr sz="1050">
                 <a:solidFill>
                   <a:srgbClr val="0F172A"/>
                 </a:solidFill>
               </a:defRPr>
             </a:pPr>
             <a:r>
-              <a:t>• 1단계 [신청]: 본인이 특근 일정을 등록한 대기 상태</a:t>
-            </a:r>
-            <a:br/>
-            <a:r>
-              <a:t>• [승인]과 [확정]은 별개로 독립 관리되어 사전 승인이 없어도 사원이 직접 완료 확정 가능!</a:t>
-            </a:r>
-            <a:br/>
-            <a:r>
-              <a:t>• 승인 상태(✅ 승인/⏳ 대기)와 확정 상태(🎯 확정/⚪ 미확정)가 개별 독립 배지로 동시 표시</a:t>
-            </a:r>
-            <a:br/>
-            <a:r>
-              <a:t>• 관리자가 최종 검토 마감하면 🟣 [검토완료] 상태로 안전하게 확정됩니다.</a:t>
-            </a:r>
-          </a:p>
-        </p:txBody>
-      </p:sp>
-      <p:sp>
-        <p:nvSpPr>
-          <p:cNvPr id="5" name="Rounded Rectangle 4"/>
-          <p:cNvSpPr/>
+              <a:t>데이터베이스에 사번, 성명, IP 컬럼 자체가 존재하지 않아 완전 익명이 보장됩니다.</a:t>
+            </a:r>
+          </a:p>
+          <a:p>
+            <a:pPr>
+              <a:spcAft>
+                <a:spcPts val="200"/>
+              </a:spcAft>
+              <a:defRPr sz="1200" b="1">
+                <a:solidFill>
+                  <a:srgbClr val="EA580C"/>
+                </a:solidFill>
+              </a:defRPr>
+            </a:pPr>
+            <a:r>
+              <a:t>③ 자유로운 의견 및 건의 등록</a:t>
+            </a:r>
+          </a:p>
+          <a:p>
+            <a:pPr>
+              <a:spcAft>
+                <a:spcPts val="800"/>
+              </a:spcAft>
+              <a:defRPr sz="1050">
+                <a:solidFill>
+                  <a:srgbClr val="0F172A"/>
+                </a:solidFill>
+              </a:defRPr>
+            </a:pPr>
+            <a:r>
+              <a:t>휴일 식사, 휴게실 냉난방, 근무환경 개선 등 바라는 점을 솔직하게 작성합니다.</a:t>
+            </a:r>
+          </a:p>
+          <a:p>
+            <a:pPr>
+              <a:spcAft>
+                <a:spcPts val="200"/>
+              </a:spcAft>
+              <a:defRPr sz="1200" b="1">
+                <a:solidFill>
+                  <a:srgbClr val="EA580C"/>
+                </a:solidFill>
+              </a:defRPr>
+            </a:pPr>
+            <a:r>
+              <a:t>④ 관리자 공식 답변 확인</a:t>
+            </a:r>
+          </a:p>
+          <a:p>
+            <a:pPr>
+              <a:spcAft>
+                <a:spcPts val="800"/>
+              </a:spcAft>
+              <a:defRPr sz="1050">
+                <a:solidFill>
+                  <a:srgbClr val="0F172A"/>
+                </a:solidFill>
+              </a:defRPr>
+            </a:pPr>
+            <a:r>
+              <a:t>소통함 팝업 내에서 회사의 공식 검토 결과와 답변을 확인하실 수 있습니다.</a:t>
+            </a:r>
+          </a:p>
+        </p:txBody>
+      </p:sp>
+      <p:pic>
+        <p:nvPicPr>
+          <p:cNvPr id="5" name="Picture 4" descr="mockup_suggestion_box.png"/>
+          <p:cNvPicPr>
+            <a:picLocks noChangeAspect="1"/>
+          </p:cNvPicPr>
           <p:nvPr/>
-        </p:nvSpPr>
-        <p:spPr>
-          <a:xfrm>
-            <a:off x="4389120" y="1645920"/>
-            <a:ext cx="3383280" cy="4389120"/>
-          </a:xfrm>
-          <a:prstGeom prst="roundRect">
-            <a:avLst/>
-          </a:prstGeom>
-          <a:solidFill>
-            <a:srgbClr val="FFFFFF"/>
-          </a:solidFill>
-          <a:ln w="25400">
-            <a:solidFill>
-              <a:srgbClr val="CBD5E1"/>
-            </a:solidFill>
-          </a:ln>
-        </p:spPr>
-        <p:style>
-          <a:lnRef idx="1">
-            <a:schemeClr val="accent1"/>
-          </a:lnRef>
-          <a:fillRef idx="3">
-            <a:schemeClr val="accent1"/>
-          </a:fillRef>
-          <a:effectRef idx="2">
-            <a:schemeClr val="accent1"/>
-          </a:effectRef>
-          <a:fontRef idx="minor">
-            <a:schemeClr val="lt1"/>
-          </a:fontRef>
-        </p:style>
-        <p:txBody>
-          <a:bodyPr rtlCol="0" anchor="ctr"/>
-          <a:lstStyle/>
-          <a:p>
-            <a:pPr algn="ctr"/>
-          </a:p>
-        </p:txBody>
-      </p:sp>
-      <p:sp>
-        <p:nvSpPr>
-          <p:cNvPr id="6" name="TextBox 5"/>
-          <p:cNvSpPr txBox="1"/>
-          <p:nvPr/>
-        </p:nvSpPr>
-        <p:spPr>
-          <a:xfrm>
-            <a:off x="4572000" y="1828800"/>
-            <a:ext cx="3017520" cy="3931920"/>
+        </p:nvPicPr>
+        <p:blipFill>
+          <a:blip r:embed="rId2"/>
+          <a:stretch>
+            <a:fillRect/>
+          </a:stretch>
+        </p:blipFill>
+        <p:spPr>
+          <a:xfrm>
+            <a:off x="3931920" y="1325880"/>
+            <a:ext cx="7772400" cy="5212080"/>
           </a:xfrm>
           <a:prstGeom prst="rect">
             <a:avLst/>
           </a:prstGeom>
-          <a:noFill/>
-        </p:spPr>
-        <p:txBody>
-          <a:bodyPr wrap="square">
-            <a:spAutoFit/>
-          </a:bodyPr>
-          <a:lstStyle/>
-          <a:p>
-            <a:pPr>
-              <a:spcAft>
-                <a:spcPts val="800"/>
-              </a:spcAft>
-              <a:defRPr sz="1200" b="1">
-                <a:solidFill>
-                  <a:srgbClr val="EA580C"/>
-                </a:solidFill>
-              </a:defRPr>
-            </a:pPr>
-            <a:r>
-              <a:t>핵심 절차 02</a:t>
-            </a:r>
-          </a:p>
-          <a:p>
-            <a:pPr>
-              <a:spcAft>
-                <a:spcPts val="1400"/>
-              </a:spcAft>
-              <a:defRPr sz="1800" b="1">
-                <a:solidFill>
-                  <a:srgbClr val="1E3A8A"/>
-                </a:solidFill>
-              </a:defRPr>
-            </a:pPr>
-            <a:r>
-              <a:t>2. 사원의 [🎯 특근완료 확정] 피드백</a:t>
-            </a:r>
-          </a:p>
-          <a:p>
-            <a:pPr>
-              <a:lnSpc>
-                <a:spcPct val="135000"/>
-              </a:lnSpc>
-              <a:defRPr sz="1250">
-                <a:solidFill>
-                  <a:srgbClr val="0F172A"/>
-                </a:solidFill>
-              </a:defRPr>
-            </a:pPr>
-            <a:r>
-              <a:t>• 실제 특근을 마치면 '내 신청 내역'으로 이동합니다.</a:t>
-            </a:r>
-            <a:br/>
-            <a:r>
-              <a:t>• 관리자 사전 승인 유무와 상관없이 [🎯 특근완료 확정] 버튼을 클릭!</a:t>
-            </a:r>
-            <a:br/>
-            <a:r>
-              <a:t>• 확정 즉시 [🎯 특근확정] 배지가 부여되며, 잘못 누른 경우 [🎯 확정취소]로 되돌릴 수 있습니다.</a:t>
-            </a:r>
-            <a:br/>
-            <a:r>
-              <a:t>• 팝업 확인 시 오류 없이 한글 완료 메시지가 안내됩니다.</a:t>
-            </a:r>
-          </a:p>
-        </p:txBody>
-      </p:sp>
-      <p:sp>
-        <p:nvSpPr>
-          <p:cNvPr id="7" name="Rounded Rectangle 6"/>
-          <p:cNvSpPr/>
-          <p:nvPr/>
-        </p:nvSpPr>
-        <p:spPr>
-          <a:xfrm>
-            <a:off x="8046720" y="1645920"/>
-            <a:ext cx="3383280" cy="4389120"/>
-          </a:xfrm>
-          <a:prstGeom prst="roundRect">
-            <a:avLst/>
-          </a:prstGeom>
-          <a:solidFill>
-            <a:srgbClr val="FFFFFF"/>
-          </a:solidFill>
-          <a:ln w="25400">
-            <a:solidFill>
-              <a:srgbClr val="CBD5E1"/>
-            </a:solidFill>
-          </a:ln>
-        </p:spPr>
-        <p:style>
-          <a:lnRef idx="1">
-            <a:schemeClr val="accent1"/>
-          </a:lnRef>
-          <a:fillRef idx="3">
-            <a:schemeClr val="accent1"/>
-          </a:fillRef>
-          <a:effectRef idx="2">
-            <a:schemeClr val="accent1"/>
-          </a:effectRef>
-          <a:fontRef idx="minor">
-            <a:schemeClr val="lt1"/>
-          </a:fontRef>
-        </p:style>
-        <p:txBody>
-          <a:bodyPr rtlCol="0" anchor="ctr"/>
-          <a:lstStyle/>
-          <a:p>
-            <a:pPr algn="ctr"/>
-          </a:p>
-        </p:txBody>
-      </p:sp>
-      <p:sp>
-        <p:nvSpPr>
-          <p:cNvPr id="8" name="TextBox 7"/>
-          <p:cNvSpPr txBox="1"/>
-          <p:nvPr/>
-        </p:nvSpPr>
-        <p:spPr>
-          <a:xfrm>
-            <a:off x="8229600" y="1828800"/>
-            <a:ext cx="3017520" cy="3931920"/>
-          </a:xfrm>
-          <a:prstGeom prst="rect">
-            <a:avLst/>
-          </a:prstGeom>
-          <a:noFill/>
-        </p:spPr>
-        <p:txBody>
-          <a:bodyPr wrap="square">
-            <a:spAutoFit/>
-          </a:bodyPr>
-          <a:lstStyle/>
-          <a:p>
-            <a:pPr>
-              <a:spcAft>
-                <a:spcPts val="800"/>
-              </a:spcAft>
-              <a:defRPr sz="1200" b="1">
-                <a:solidFill>
-                  <a:srgbClr val="EA580C"/>
-                </a:solidFill>
-              </a:defRPr>
-            </a:pPr>
-            <a:r>
-              <a:t>핵심 절차 03</a:t>
-            </a:r>
-          </a:p>
-          <a:p>
-            <a:pPr>
-              <a:spcAft>
-                <a:spcPts val="1400"/>
-              </a:spcAft>
-              <a:defRPr sz="1800" b="1">
-                <a:solidFill>
-                  <a:srgbClr val="1E3A8A"/>
-                </a:solidFill>
-              </a:defRPr>
-            </a:pPr>
-            <a:r>
-              <a:t>3. 진행상태 배지 &amp; 최종특근일 반영</a:t>
-            </a:r>
-          </a:p>
-          <a:p>
-            <a:pPr>
-              <a:lnSpc>
-                <a:spcPct val="135000"/>
-              </a:lnSpc>
-              <a:defRPr sz="1250">
-                <a:solidFill>
-                  <a:srgbClr val="0F172A"/>
-                </a:solidFill>
-              </a:defRPr>
-            </a:pPr>
-            <a:r>
-              <a:t>• 확정 즉시 카드 상단에 [🎯 특근확정] 배지가 부여되어 진행 현황을 즉시 파악합니다.</a:t>
-            </a:r>
-            <a:br/>
-            <a:r>
-              <a:t>• 정산 엑셀 파일의 [확정단계 (일)]에 실시간 반영되어 급여/휴무 정산 누락을 방지합니다.</a:t>
-            </a:r>
-            <a:br/>
-            <a:r>
-              <a:t>• 관리자의 최종 검토가 완료되면 [🟣 검토완료]로 최종 종결됩니다.</a:t>
-            </a:r>
-          </a:p>
-        </p:txBody>
-      </p:sp>
+        </p:spPr>
+      </p:pic>
     </p:spTree>
   </p:cSld>
   <p:clrMapOvr>
@@ -7225,8 +5312,8 @@
         </p:nvSpPr>
         <p:spPr>
           <a:xfrm>
-            <a:off x="731520" y="365760"/>
-            <a:ext cx="10698480" cy="1005840"/>
+            <a:off x="731520" y="320040"/>
+            <a:ext cx="10698480" cy="914400"/>
           </a:xfrm>
           <a:prstGeom prst="rect">
             <a:avLst/>
@@ -7247,7 +5334,7 @@
               </a:defRPr>
             </a:pPr>
             <a:r>
-              <a:t>STEP 08  |  사원 전용 100% 무기명 건의사항 소통함 (v1.47)</a:t>
+              <a:t>SUMMARY &amp; Q&amp;A  |  사용자 자주 묻는 질문 5문 5답 (v1.54)</a:t>
             </a:r>
           </a:p>
           <a:p>
@@ -7259,19 +5346,19 @@
               </a:defRPr>
             </a:pPr>
             <a:r>
-              <a:t>100% 무기명 건의사항 소통함 및 공식 답변 피드백</a:t>
-            </a:r>
-          </a:p>
-          <a:p>
-            <a:pPr>
-              <a:defRPr sz="1300">
+              <a:t>자주 묻는 질문(Q&amp;A) 핵심 요약</a:t>
+            </a:r>
+          </a:p>
+          <a:p>
+            <a:pPr>
+              <a:defRPr sz="1250">
                 <a:solidFill>
                   <a:srgbClr val="64748B"/>
                 </a:solidFill>
               </a:defRPr>
             </a:pPr>
             <a:r>
-              <a:t>사번/성명 일체 미수집 원칙! 사원들의 솔직한 불편사항과 개선 요청을 자유롭게 나눕니다.</a:t>
+              <a:t>궁금한 사항이 있으실 때는 언제든 상단 [📖 사용자 매뉴얼]을 다운로드하여 확인하세요.</a:t>
             </a:r>
           </a:p>
         </p:txBody>
@@ -7284,18 +5371,18 @@
         </p:nvSpPr>
         <p:spPr>
           <a:xfrm>
-            <a:off x="731520" y="1645920"/>
-            <a:ext cx="3383280" cy="4389120"/>
+            <a:off x="731520" y="1371600"/>
+            <a:ext cx="10728655" cy="868680"/>
           </a:xfrm>
           <a:prstGeom prst="roundRect">
             <a:avLst/>
           </a:prstGeom>
           <a:solidFill>
-            <a:srgbClr val="FFFFFF"/>
+            <a:srgbClr val="F8FAFC"/>
           </a:solidFill>
-          <a:ln w="25400">
+          <a:ln>
             <a:solidFill>
-              <a:srgbClr val="CBD5E1"/>
+              <a:srgbClr val="E2E8F0"/>
             </a:solidFill>
           </a:ln>
         </p:spPr>
@@ -7329,8 +5416,8 @@
         </p:nvSpPr>
         <p:spPr>
           <a:xfrm>
-            <a:off x="914400" y="1828800"/>
-            <a:ext cx="3017520" cy="3931920"/>
+            <a:off x="914400" y="1444752"/>
+            <a:ext cx="10332720" cy="731520"/>
           </a:xfrm>
           <a:prstGeom prst="rect">
             <a:avLst/>
@@ -7345,54 +5432,28 @@
           <a:p>
             <a:pPr>
               <a:spcAft>
-                <a:spcPts val="800"/>
-              </a:spcAft>
-              <a:defRPr sz="1200" b="1">
+                <a:spcPts val="200"/>
+              </a:spcAft>
+              <a:defRPr sz="1250" b="1">
+                <a:solidFill>
+                  <a:srgbClr val="1E3A8A"/>
+                </a:solidFill>
+              </a:defRPr>
+            </a:pPr>
+            <a:r>
+              <a:t>Q1. 사외 접속 주소와 모바일 접속 방법은 어떻게 되나요?</a:t>
+            </a:r>
+          </a:p>
+          <a:p>
+            <a:pPr>
+              <a:defRPr sz="1100">
                 <a:solidFill>
                   <a:srgbClr val="EA580C"/>
                 </a:solidFill>
               </a:defRPr>
             </a:pPr>
             <a:r>
-              <a:t>소통 원칙 01</a:t>
-            </a:r>
-          </a:p>
-          <a:p>
-            <a:pPr>
-              <a:spcAft>
-                <a:spcPts val="1400"/>
-              </a:spcAft>
-              <a:defRPr sz="1800" b="1">
-                <a:solidFill>
-                  <a:srgbClr val="1E3A8A"/>
-                </a:solidFill>
-              </a:defRPr>
-            </a:pPr>
-            <a:r>
-              <a:t>1. 100% 완전 무기명(익명) 보장</a:t>
-            </a:r>
-          </a:p>
-          <a:p>
-            <a:pPr>
-              <a:lnSpc>
-                <a:spcPct val="135000"/>
-              </a:lnSpc>
-              <a:defRPr sz="1250">
-                <a:solidFill>
-                  <a:srgbClr val="0F172A"/>
-                </a:solidFill>
-              </a:defRPr>
-            </a:pPr>
-            <a:r>
-              <a:t>• 시스템 DB에 사원번호, 성명, IP 등 작성자 식별 정보를 일체 저장하지 않습니다.</a:t>
-            </a:r>
-            <a:br/>
-            <a:r>
-              <a:t>• 누구의 눈치도 볼 필요 없이 시스템 오류, 근무환경 개선, 건의사항을 자유롭게 작성할 수 있습니다.</a:t>
-            </a:r>
-            <a:br/>
-            <a:r>
-              <a:t>• 오직 건의 내용과 접수 일시만 등록되므로 안심하고 이용하세요.</a:t>
+              <a:t>👉 관리자가 배포한 외부 HTTPS 보안 주소로 접속하거나, 화면 상단 [📱 모바일 접속 QR]을 스마트폰 카메라로 스캔하여 간편 접속합니다.</a:t>
             </a:r>
           </a:p>
         </p:txBody>
@@ -7405,18 +5466,18 @@
         </p:nvSpPr>
         <p:spPr>
           <a:xfrm>
-            <a:off x="4389120" y="1645920"/>
-            <a:ext cx="3383280" cy="4389120"/>
+            <a:off x="731520" y="2377440"/>
+            <a:ext cx="10728655" cy="868680"/>
           </a:xfrm>
           <a:prstGeom prst="roundRect">
             <a:avLst/>
           </a:prstGeom>
           <a:solidFill>
-            <a:srgbClr val="FFFFFF"/>
+            <a:srgbClr val="F8FAFC"/>
           </a:solidFill>
-          <a:ln w="25400">
+          <a:ln>
             <a:solidFill>
-              <a:srgbClr val="CBD5E1"/>
+              <a:srgbClr val="E2E8F0"/>
             </a:solidFill>
           </a:ln>
         </p:spPr>
@@ -7450,8 +5511,8 @@
         </p:nvSpPr>
         <p:spPr>
           <a:xfrm>
-            <a:off x="4572000" y="1828800"/>
-            <a:ext cx="3017520" cy="3931920"/>
+            <a:off x="914400" y="2450592"/>
+            <a:ext cx="10332720" cy="731520"/>
           </a:xfrm>
           <a:prstGeom prst="rect">
             <a:avLst/>
@@ -7466,54 +5527,28 @@
           <a:p>
             <a:pPr>
               <a:spcAft>
-                <a:spcPts val="800"/>
-              </a:spcAft>
-              <a:defRPr sz="1200" b="1">
+                <a:spcPts val="200"/>
+              </a:spcAft>
+              <a:defRPr sz="1250" b="1">
+                <a:solidFill>
+                  <a:srgbClr val="1E3A8A"/>
+                </a:solidFill>
+              </a:defRPr>
+            </a:pPr>
+            <a:r>
+              <a:t>Q2. 재입장할 때 사번을 매번 다시 입력해야 하나요?</a:t>
+            </a:r>
+          </a:p>
+          <a:p>
+            <a:pPr>
+              <a:defRPr sz="1100">
                 <a:solidFill>
                   <a:srgbClr val="EA580C"/>
                 </a:solidFill>
               </a:defRPr>
             </a:pPr>
             <a:r>
-              <a:t>소통 원칙 02</a:t>
-            </a:r>
-          </a:p>
-          <a:p>
-            <a:pPr>
-              <a:spcAft>
-                <a:spcPts val="1400"/>
-              </a:spcAft>
-              <a:defRPr sz="1800" b="1">
-                <a:solidFill>
-                  <a:srgbClr val="1E3A8A"/>
-                </a:solidFill>
-              </a:defRPr>
-            </a:pPr>
-            <a:r>
-              <a:t>2. [💡 건의사항 소통함] 원클릭 등록</a:t>
-            </a:r>
-          </a:p>
-          <a:p>
-            <a:pPr>
-              <a:lnSpc>
-                <a:spcPct val="135000"/>
-              </a:lnSpc>
-              <a:defRPr sz="1250">
-                <a:solidFill>
-                  <a:srgbClr val="0F172A"/>
-                </a:solidFill>
-              </a:defRPr>
-            </a:pPr>
-            <a:r>
-              <a:t>• 화면 우측 상단의 [💡 건의사항 소통함] 버튼을 클릭합니다.</a:t>
-            </a:r>
-            <a:br/>
-            <a:r>
-              <a:t>• 분류(시스템 개선, 오류/버그 신고, 근무환경/복지, 기타)를 선택하고 제목과 내용을 작성합니다.</a:t>
-            </a:r>
-            <a:br/>
-            <a:r>
-              <a:t>• [💡 무기명 건의 접수하기] 버튼을 누르면 1초 만에 즉시 등록됩니다.</a:t>
+              <a:t>👉 아닙니다! 브라우저가 사번을 안전하게 기억하고 있으므로 [입장하기] 버튼만 누르면 1초 만에 바로 입장됩니다.</a:t>
             </a:r>
           </a:p>
         </p:txBody>
@@ -7526,18 +5561,18 @@
         </p:nvSpPr>
         <p:spPr>
           <a:xfrm>
-            <a:off x="8046720" y="1645920"/>
-            <a:ext cx="3383280" cy="4389120"/>
+            <a:off x="731520" y="3383280"/>
+            <a:ext cx="10728655" cy="868680"/>
           </a:xfrm>
           <a:prstGeom prst="roundRect">
             <a:avLst/>
           </a:prstGeom>
           <a:solidFill>
-            <a:srgbClr val="FFFFFF"/>
+            <a:srgbClr val="F8FAFC"/>
           </a:solidFill>
-          <a:ln w="25400">
+          <a:ln>
             <a:solidFill>
-              <a:srgbClr val="CBD5E1"/>
+              <a:srgbClr val="E2E8F0"/>
             </a:solidFill>
           </a:ln>
         </p:spPr>
@@ -7571,8 +5606,8 @@
         </p:nvSpPr>
         <p:spPr>
           <a:xfrm>
-            <a:off x="8229600" y="1828800"/>
-            <a:ext cx="3017520" cy="3931920"/>
+            <a:off x="914400" y="3456432"/>
+            <a:ext cx="10332720" cy="731520"/>
           </a:xfrm>
           <a:prstGeom prst="rect">
             <a:avLst/>
@@ -7587,54 +5622,218 @@
           <a:p>
             <a:pPr>
               <a:spcAft>
-                <a:spcPts val="800"/>
-              </a:spcAft>
-              <a:defRPr sz="1200" b="1">
+                <a:spcPts val="200"/>
+              </a:spcAft>
+              <a:defRPr sz="1250" b="1">
+                <a:solidFill>
+                  <a:srgbClr val="1E3A8A"/>
+                </a:solidFill>
+              </a:defRPr>
+            </a:pPr>
+            <a:r>
+              <a:t>Q3. 실수로 같은 날짜에 중복 신청하면 어떻게 되나요?</a:t>
+            </a:r>
+          </a:p>
+          <a:p>
+            <a:pPr>
+              <a:defRPr sz="1100">
                 <a:solidFill>
                   <a:srgbClr val="EA580C"/>
                 </a:solidFill>
               </a:defRPr>
             </a:pPr>
             <a:r>
-              <a:t>소통 원칙 03</a:t>
-            </a:r>
-          </a:p>
-          <a:p>
-            <a:pPr>
-              <a:spcAft>
-                <a:spcPts val="1400"/>
-              </a:spcAft>
-              <a:defRPr sz="1800" b="1">
+              <a:t>👉 시스템이 동일 날짜 중복 신청을 사전에 감지하여 경고창과 함께 안전 차단하므로 안심하셔도 됩니다. 수정은 [수정] 버튼을 누르세요.</a:t>
+            </a:r>
+          </a:p>
+        </p:txBody>
+      </p:sp>
+      <p:sp>
+        <p:nvSpPr>
+          <p:cNvPr id="9" name="Rounded Rectangle 8"/>
+          <p:cNvSpPr/>
+          <p:nvPr/>
+        </p:nvSpPr>
+        <p:spPr>
+          <a:xfrm>
+            <a:off x="731520" y="4389120"/>
+            <a:ext cx="10728655" cy="868680"/>
+          </a:xfrm>
+          <a:prstGeom prst="roundRect">
+            <a:avLst/>
+          </a:prstGeom>
+          <a:solidFill>
+            <a:srgbClr val="F8FAFC"/>
+          </a:solidFill>
+          <a:ln>
+            <a:solidFill>
+              <a:srgbClr val="E2E8F0"/>
+            </a:solidFill>
+          </a:ln>
+        </p:spPr>
+        <p:style>
+          <a:lnRef idx="1">
+            <a:schemeClr val="accent1"/>
+          </a:lnRef>
+          <a:fillRef idx="3">
+            <a:schemeClr val="accent1"/>
+          </a:fillRef>
+          <a:effectRef idx="2">
+            <a:schemeClr val="accent1"/>
+          </a:effectRef>
+          <a:fontRef idx="minor">
+            <a:schemeClr val="lt1"/>
+          </a:fontRef>
+        </p:style>
+        <p:txBody>
+          <a:bodyPr rtlCol="0" anchor="ctr"/>
+          <a:lstStyle/>
+          <a:p>
+            <a:pPr algn="ctr"/>
+          </a:p>
+        </p:txBody>
+      </p:sp>
+      <p:sp>
+        <p:nvSpPr>
+          <p:cNvPr id="10" name="TextBox 9"/>
+          <p:cNvSpPr txBox="1"/>
+          <p:nvPr/>
+        </p:nvSpPr>
+        <p:spPr>
+          <a:xfrm>
+            <a:off x="914400" y="4462272"/>
+            <a:ext cx="10332720" cy="731520"/>
+          </a:xfrm>
+          <a:prstGeom prst="rect">
+            <a:avLst/>
+          </a:prstGeom>
+          <a:noFill/>
+        </p:spPr>
+        <p:txBody>
+          <a:bodyPr wrap="square">
+            <a:spAutoFit/>
+          </a:bodyPr>
+          <a:lstStyle/>
+          <a:p>
+            <a:pPr>
+              <a:spcAft>
+                <a:spcPts val="200"/>
+              </a:spcAft>
+              <a:defRPr sz="1250" b="1">
                 <a:solidFill>
                   <a:srgbClr val="1E3A8A"/>
                 </a:solidFill>
               </a:defRPr>
             </a:pPr>
             <a:r>
-              <a:t>3. 실시간 접수 목록 &amp; 관리자 답변</a:t>
-            </a:r>
-          </a:p>
-          <a:p>
-            <a:pPr>
-              <a:lnSpc>
-                <a:spcPct val="135000"/>
-              </a:lnSpc>
-              <a:defRPr sz="1250">
-                <a:solidFill>
-                  <a:srgbClr val="0F172A"/>
-                </a:solidFill>
-              </a:defRPr>
-            </a:pPr>
-            <a:r>
-              <a:t>• 등록된 모든 건의사항은 소통함 모달 하단 목록에서 실시간으로 투명하게 열람됩니다.</a:t>
-            </a:r>
-            <a:br/>
-            <a:r>
-              <a:t>• 관리자가 조치 상태(접수완료, 검토중, 처리완료, 보류)를 갱신하고 공식 답변을 등록합니다.</a:t>
-            </a:r>
-            <a:br/>
-            <a:r>
-              <a:t>• 사원들의 목소리가 실제 시스템 및 부서 운영 개선에 즉각 반영됩니다.</a:t>
+              <a:t>Q4. 실제 특근 후 [🎯 특근완료 확정] 버튼은 꼭 눌러야 하나요?</a:t>
+            </a:r>
+          </a:p>
+          <a:p>
+            <a:pPr>
+              <a:defRPr sz="1100">
+                <a:solidFill>
+                  <a:srgbClr val="EA580C"/>
+                </a:solidFill>
+              </a:defRPr>
+            </a:pPr>
+            <a:r>
+              <a:t>👉 네! 실제 휴일 근무를 마친 후 [확정]을 누르면 관리자에게 '출근 완료' 피드백이 전송되어 최종 정산에 정확히 반영됩니다.</a:t>
+            </a:r>
+          </a:p>
+        </p:txBody>
+      </p:sp>
+      <p:sp>
+        <p:nvSpPr>
+          <p:cNvPr id="11" name="Rounded Rectangle 10"/>
+          <p:cNvSpPr/>
+          <p:nvPr/>
+        </p:nvSpPr>
+        <p:spPr>
+          <a:xfrm>
+            <a:off x="731520" y="5394960"/>
+            <a:ext cx="10728655" cy="868680"/>
+          </a:xfrm>
+          <a:prstGeom prst="roundRect">
+            <a:avLst/>
+          </a:prstGeom>
+          <a:solidFill>
+            <a:srgbClr val="F8FAFC"/>
+          </a:solidFill>
+          <a:ln>
+            <a:solidFill>
+              <a:srgbClr val="E2E8F0"/>
+            </a:solidFill>
+          </a:ln>
+        </p:spPr>
+        <p:style>
+          <a:lnRef idx="1">
+            <a:schemeClr val="accent1"/>
+          </a:lnRef>
+          <a:fillRef idx="3">
+            <a:schemeClr val="accent1"/>
+          </a:fillRef>
+          <a:effectRef idx="2">
+            <a:schemeClr val="accent1"/>
+          </a:effectRef>
+          <a:fontRef idx="minor">
+            <a:schemeClr val="lt1"/>
+          </a:fontRef>
+        </p:style>
+        <p:txBody>
+          <a:bodyPr rtlCol="0" anchor="ctr"/>
+          <a:lstStyle/>
+          <a:p>
+            <a:pPr algn="ctr"/>
+          </a:p>
+        </p:txBody>
+      </p:sp>
+      <p:sp>
+        <p:nvSpPr>
+          <p:cNvPr id="12" name="TextBox 11"/>
+          <p:cNvSpPr txBox="1"/>
+          <p:nvPr/>
+        </p:nvSpPr>
+        <p:spPr>
+          <a:xfrm>
+            <a:off x="914400" y="5468112"/>
+            <a:ext cx="10332720" cy="731520"/>
+          </a:xfrm>
+          <a:prstGeom prst="rect">
+            <a:avLst/>
+          </a:prstGeom>
+          <a:noFill/>
+        </p:spPr>
+        <p:txBody>
+          <a:bodyPr wrap="square">
+            <a:spAutoFit/>
+          </a:bodyPr>
+          <a:lstStyle/>
+          <a:p>
+            <a:pPr>
+              <a:spcAft>
+                <a:spcPts val="200"/>
+              </a:spcAft>
+              <a:defRPr sz="1250" b="1">
+                <a:solidFill>
+                  <a:srgbClr val="1E3A8A"/>
+                </a:solidFill>
+              </a:defRPr>
+            </a:pPr>
+            <a:r>
+              <a:t>Q5. 건의사항 소통함은 정말로 작성자가 누구인지 알 수 없나요?</a:t>
+            </a:r>
+          </a:p>
+          <a:p>
+            <a:pPr>
+              <a:defRPr sz="1100">
+                <a:solidFill>
+                  <a:srgbClr val="EA580C"/>
+                </a:solidFill>
+              </a:defRPr>
+            </a:pPr>
+            <a:r>
+              <a:t>👉 네, 100% 무기명입니다! 데이터베이스에 사번, 성명, IP 등 사용자 식별 컬럼이 아예 존재하지 않도록 설계되어 절대 추적되지 않습니다.</a:t>
             </a:r>
           </a:p>
         </p:txBody>

--- a/Overtime_User_Manual.pptx
+++ b/Overtime_User_Manual.pptx
@@ -3285,7 +3285,7 @@
               </a:defRPr>
             </a:pPr>
             <a:r>
-              <a:t>초기 접속 주소 및 3대 접속 경로 안내</a:t>
+              <a:t>스마트 특근 시스템 공식 웹 접속 안내</a:t>
             </a:r>
           </a:p>
           <a:p>
@@ -3297,7 +3297,7 @@
               </a:defRPr>
             </a:pPr>
             <a:r>
-              <a:t>사내 업무 PC, 사외 인터넷, 스마트폰 모바일 중 편한 경로로 접속하세요.</a:t>
+              <a:t>PC, 노트북, 스마트폰 모바일 어디서나 공식 웹주소 하나로 간편하게 접속하세요.</a:t>
             </a:r>
           </a:p>
         </p:txBody>
@@ -3355,8 +3355,8 @@
         </p:nvSpPr>
         <p:spPr>
           <a:xfrm>
-            <a:off x="685800" y="1463040"/>
-            <a:ext cx="2926080" cy="4937760"/>
+            <a:off x="685800" y="1417320"/>
+            <a:ext cx="2926080" cy="4297680"/>
           </a:xfrm>
           <a:prstGeom prst="rect">
             <a:avLst/>
@@ -3380,13 +3380,53 @@
               </a:defRPr>
             </a:pPr>
             <a:r>
-              <a:t>① 사내 PC 접속 (회사 랜선/Wi-Fi)</a:t>
-            </a:r>
-          </a:p>
-          <a:p>
-            <a:pPr>
-              <a:spcAft>
-                <a:spcPts val="800"/>
+              <a:t>🌐 통합 웹 접속 공식 주소</a:t>
+            </a:r>
+          </a:p>
+          <a:p>
+            <a:pPr>
+              <a:spcAft>
+                <a:spcPts val="600"/>
+              </a:spcAft>
+            </a:pPr>
+            <a:r>
+              <a:rPr sz="1050" b="1" u="sng">
+                <a:solidFill>
+                  <a:srgbClr val="2563EB"/>
+                </a:solidFill>
+                <a:hlinkClick r:id="rId2"/>
+              </a:rPr>
+              <a:t>https://team-overtime-manager.onrender.com/</a:t>
+            </a:r>
+            <a:r>
+              <a:rPr sz="950">
+                <a:solidFill>
+                  <a:srgbClr val="64748B"/>
+                </a:solidFill>
+              </a:rPr>
+              <a:t>
+(주소 클릭 시 시스템 웹페이지로 즉시 이동합니다.)</a:t>
+            </a:r>
+          </a:p>
+          <a:p>
+            <a:pPr>
+              <a:spcAft>
+                <a:spcPts val="200"/>
+              </a:spcAft>
+              <a:defRPr sz="1200" b="1">
+                <a:solidFill>
+                  <a:srgbClr val="EA580C"/>
+                </a:solidFill>
+              </a:defRPr>
+            </a:pPr>
+            <a:r>
+              <a:t>🖥️ PC 브라우저 접속 (사내 / 자택)</a:t>
+            </a:r>
+          </a:p>
+          <a:p>
+            <a:pPr>
+              <a:spcAft>
+                <a:spcPts val="600"/>
               </a:spcAft>
               <a:defRPr sz="1050">
                 <a:solidFill>
@@ -3395,7 +3435,7 @@
               </a:defRPr>
             </a:pPr>
             <a:r>
-              <a:t>사내 PC 브라우저(Chrome/Edge) 주소창에 사내 IP 주소를 입력합니다. [즐겨찾기 ★] 등록 시 매번 원클릭!</a:t>
+              <a:t>Chrome, Edge 등 웹 브라우저를 열고 위 주소를 입력하여 접속합니다. [즐겨찾기 ★] 등록 시 매번 원클릭으로 열 수 있습니다.</a:t>
             </a:r>
           </a:p>
           <a:p>
@@ -3410,13 +3450,13 @@
               </a:defRPr>
             </a:pPr>
             <a:r>
-              <a:t>② 사외 원격 접속 (자택/LTE/출장)</a:t>
-            </a:r>
-          </a:p>
-          <a:p>
-            <a:pPr>
-              <a:spcAft>
-                <a:spcPts val="800"/>
+              <a:t>📱 스마트폰 모바일 접속 (LTE / 5G / Wi-Fi)</a:t>
+            </a:r>
+          </a:p>
+          <a:p>
+            <a:pPr>
+              <a:spcAft>
+                <a:spcPts val="600"/>
               </a:spcAft>
               <a:defRPr sz="1050">
                 <a:solidFill>
@@ -3425,7 +3465,7 @@
               </a:defRPr>
             </a:pPr>
             <a:r>
-              <a:t>관리자가 공유한 보안 링크(https://xxxx.trycloudflare.com)를 클릭하여 어디서나 접속합니다.</a:t>
+              <a:t>스마트폰 기본 브라우저(Safari, Chrome, 삼성인터넷)로 접속하시면 모바일 최적화 화면이 자동으로 지원됩니다.</a:t>
             </a:r>
           </a:p>
           <a:p>
@@ -3440,13 +3480,13 @@
               </a:defRPr>
             </a:pPr>
             <a:r>
-              <a:t>③ 스마트폰 모바일 (원클릭 QR)</a:t>
-            </a:r>
-          </a:p>
-          <a:p>
-            <a:pPr>
-              <a:spcAft>
-                <a:spcPts val="800"/>
+              <a:t>★ 모바일 홈 화면 바로가기 추가 팁</a:t>
+            </a:r>
+          </a:p>
+          <a:p>
+            <a:pPr>
+              <a:spcAft>
+                <a:spcPts val="600"/>
               </a:spcAft>
               <a:defRPr sz="1050">
                 <a:solidFill>
@@ -3455,51 +3495,79 @@
               </a:defRPr>
             </a:pPr>
             <a:r>
-              <a:t>화면 상단 [📱 모바일 접속 QR]을 스마트폰 기본 카메라로 비추면 1초 만에 모바일 웹이 열립니다.</a:t>
-            </a:r>
-          </a:p>
-          <a:p>
-            <a:pPr>
-              <a:spcAft>
-                <a:spcPts val="200"/>
-              </a:spcAft>
-              <a:defRPr sz="1200" b="1">
-                <a:solidFill>
-                  <a:srgbClr val="EA580C"/>
-                </a:solidFill>
-              </a:defRPr>
-            </a:pPr>
-            <a:r>
-              <a:t>★ 100% 실시간 DB 자동 동기화</a:t>
-            </a:r>
-          </a:p>
-          <a:p>
-            <a:pPr>
-              <a:spcAft>
-                <a:spcPts val="800"/>
-              </a:spcAft>
-              <a:defRPr sz="1050">
-                <a:solidFill>
-                  <a:srgbClr val="0F172A"/>
-                </a:solidFill>
-              </a:defRPr>
-            </a:pPr>
-            <a:r>
-              <a:t>PC, 사외, 스마트폰 어디서 접속하든 본인 사번만 입력하면 동일한 데이터가 완벽 동기화됩니다.</a:t>
+              <a:t>스마트폰 브라우저 메뉴(⋮ 또는 공유)에서 [홈 화면에 추가]를 누르면 전용 앱 아이콘처럼 1초 만에 실행됩니다.</a:t>
+            </a:r>
+          </a:p>
+        </p:txBody>
+      </p:sp>
+      <p:sp>
+        <p:nvSpPr>
+          <p:cNvPr id="5" name="Rounded Rectangle 4">
+            <a:hlinkClick r:id="rId2"/>
+          </p:cNvPr>
+          <p:cNvSpPr/>
+          <p:nvPr/>
+        </p:nvSpPr>
+        <p:spPr>
+          <a:xfrm>
+            <a:off x="685800" y="5833872"/>
+            <a:ext cx="2926080" cy="566928"/>
+          </a:xfrm>
+          <a:prstGeom prst="roundRect">
+            <a:avLst/>
+          </a:prstGeom>
+          <a:solidFill>
+            <a:srgbClr val="1E3A8A"/>
+          </a:solidFill>
+          <a:ln w="19050">
+            <a:solidFill>
+              <a:srgbClr val="EA580C"/>
+            </a:solidFill>
+          </a:ln>
+        </p:spPr>
+        <p:style>
+          <a:lnRef idx="1">
+            <a:schemeClr val="accent1"/>
+          </a:lnRef>
+          <a:fillRef idx="3">
+            <a:schemeClr val="accent1"/>
+          </a:fillRef>
+          <a:effectRef idx="2">
+            <a:schemeClr val="accent1"/>
+          </a:effectRef>
+          <a:fontRef idx="minor">
+            <a:schemeClr val="lt1"/>
+          </a:fontRef>
+        </p:style>
+        <p:txBody>
+          <a:bodyPr rtlCol="0" anchor="ctr" wrap="none"/>
+          <a:lstStyle/>
+          <a:p>
+            <a:pPr algn="ctr"/>
+            <a:r>
+              <a:rPr sz="1200" b="1">
+                <a:solidFill>
+                  <a:srgbClr val="FFFFFF"/>
+                </a:solidFill>
+                <a:hlinkClick r:id="rId2"/>
+              </a:rPr>
+              <a:t>🌐 웹페이지 바로 접속하기 (클릭)</a:t>
             </a:r>
           </a:p>
         </p:txBody>
       </p:sp>
       <p:pic>
         <p:nvPicPr>
-          <p:cNvPr id="5" name="Picture 4" descr="mockup_access_methods.png"/>
+          <p:cNvPr id="6" name="Picture 5" descr="mockup_access_methods.png">
+            <a:hlinkClick r:id="rId2"/>
+          </p:cNvPr>
           <p:cNvPicPr>
             <a:picLocks noChangeAspect="1"/>
           </p:cNvPicPr>
           <p:nvPr/>
         </p:nvPicPr>
         <p:blipFill>
-          <a:blip r:embed="rId2"/>
+          <a:blip r:embed="rId3"/>
           <a:stretch>
             <a:fillRect/>
           </a:stretch>
@@ -3644,7 +3712,7 @@
         </p:nvSpPr>
         <p:spPr>
           <a:xfrm>
-            <a:off x="685800" y="1463040"/>
+            <a:off x="685800" y="1417320"/>
             <a:ext cx="2926080" cy="4937760"/>
           </a:xfrm>
           <a:prstGeom prst="rect">
@@ -3675,7 +3743,7 @@
           <a:p>
             <a:pPr>
               <a:spcAft>
-                <a:spcPts val="800"/>
+                <a:spcPts val="600"/>
               </a:spcAft>
               <a:defRPr sz="1050">
                 <a:solidFill>
@@ -3705,7 +3773,7 @@
           <a:p>
             <a:pPr>
               <a:spcAft>
-                <a:spcPts val="800"/>
+                <a:spcPts val="600"/>
               </a:spcAft>
               <a:defRPr sz="1050">
                 <a:solidFill>
@@ -3735,7 +3803,7 @@
           <a:p>
             <a:pPr>
               <a:spcAft>
-                <a:spcPts val="800"/>
+                <a:spcPts val="600"/>
               </a:spcAft>
               <a:defRPr sz="1050">
                 <a:solidFill>
@@ -3765,7 +3833,7 @@
           <a:p>
             <a:pPr>
               <a:spcAft>
-                <a:spcPts val="800"/>
+                <a:spcPts val="600"/>
               </a:spcAft>
               <a:defRPr sz="1050">
                 <a:solidFill>
@@ -3933,7 +4001,7 @@
         </p:nvSpPr>
         <p:spPr>
           <a:xfrm>
-            <a:off x="685800" y="1463040"/>
+            <a:off x="685800" y="1417320"/>
             <a:ext cx="2926080" cy="4937760"/>
           </a:xfrm>
           <a:prstGeom prst="rect">
@@ -3964,7 +4032,7 @@
           <a:p>
             <a:pPr>
               <a:spcAft>
-                <a:spcPts val="800"/>
+                <a:spcPts val="600"/>
               </a:spcAft>
               <a:defRPr sz="1050">
                 <a:solidFill>
@@ -3994,7 +4062,7 @@
           <a:p>
             <a:pPr>
               <a:spcAft>
-                <a:spcPts val="800"/>
+                <a:spcPts val="600"/>
               </a:spcAft>
               <a:defRPr sz="1050">
                 <a:solidFill>
@@ -4024,7 +4092,7 @@
           <a:p>
             <a:pPr>
               <a:spcAft>
-                <a:spcPts val="800"/>
+                <a:spcPts val="600"/>
               </a:spcAft>
               <a:defRPr sz="1050">
                 <a:solidFill>
@@ -4054,7 +4122,7 @@
           <a:p>
             <a:pPr>
               <a:spcAft>
-                <a:spcPts val="800"/>
+                <a:spcPts val="600"/>
               </a:spcAft>
               <a:defRPr sz="1050">
                 <a:solidFill>
@@ -4084,7 +4152,7 @@
           <a:p>
             <a:pPr>
               <a:spcAft>
-                <a:spcPts val="800"/>
+                <a:spcPts val="600"/>
               </a:spcAft>
               <a:defRPr sz="1050">
                 <a:solidFill>
@@ -4252,7 +4320,7 @@
         </p:nvSpPr>
         <p:spPr>
           <a:xfrm>
-            <a:off x="685800" y="1463040"/>
+            <a:off x="685800" y="1417320"/>
             <a:ext cx="2926080" cy="4937760"/>
           </a:xfrm>
           <a:prstGeom prst="rect">
@@ -4283,7 +4351,7 @@
           <a:p>
             <a:pPr>
               <a:spcAft>
-                <a:spcPts val="800"/>
+                <a:spcPts val="600"/>
               </a:spcAft>
               <a:defRPr sz="1050">
                 <a:solidFill>
@@ -4313,7 +4381,7 @@
           <a:p>
             <a:pPr>
               <a:spcAft>
-                <a:spcPts val="800"/>
+                <a:spcPts val="600"/>
               </a:spcAft>
               <a:defRPr sz="1050">
                 <a:solidFill>
@@ -4351,7 +4419,7 @@
           <a:p>
             <a:pPr>
               <a:spcAft>
-                <a:spcPts val="800"/>
+                <a:spcPts val="600"/>
               </a:spcAft>
               <a:defRPr sz="1050">
                 <a:solidFill>
@@ -4381,7 +4449,7 @@
           <a:p>
             <a:pPr>
               <a:spcAft>
-                <a:spcPts val="800"/>
+                <a:spcPts val="600"/>
               </a:spcAft>
               <a:defRPr sz="1050">
                 <a:solidFill>
@@ -4549,7 +4617,7 @@
         </p:nvSpPr>
         <p:spPr>
           <a:xfrm>
-            <a:off x="685800" y="1463040"/>
+            <a:off x="685800" y="1417320"/>
             <a:ext cx="2926080" cy="4937760"/>
           </a:xfrm>
           <a:prstGeom prst="rect">
@@ -4580,7 +4648,7 @@
           <a:p>
             <a:pPr>
               <a:spcAft>
-                <a:spcPts val="800"/>
+                <a:spcPts val="600"/>
               </a:spcAft>
               <a:defRPr sz="1050">
                 <a:solidFill>
@@ -4610,7 +4678,7 @@
           <a:p>
             <a:pPr>
               <a:spcAft>
-                <a:spcPts val="800"/>
+                <a:spcPts val="600"/>
               </a:spcAft>
               <a:defRPr sz="1050">
                 <a:solidFill>
@@ -4640,7 +4708,7 @@
           <a:p>
             <a:pPr>
               <a:spcAft>
-                <a:spcPts val="800"/>
+                <a:spcPts val="600"/>
               </a:spcAft>
               <a:defRPr sz="1050">
                 <a:solidFill>
@@ -4670,7 +4738,7 @@
           <a:p>
             <a:pPr>
               <a:spcAft>
-                <a:spcPts val="800"/>
+                <a:spcPts val="600"/>
               </a:spcAft>
               <a:defRPr sz="1050">
                 <a:solidFill>
@@ -4838,7 +4906,7 @@
         </p:nvSpPr>
         <p:spPr>
           <a:xfrm>
-            <a:off x="685800" y="1463040"/>
+            <a:off x="685800" y="1417320"/>
             <a:ext cx="2926080" cy="4937760"/>
           </a:xfrm>
           <a:prstGeom prst="rect">
@@ -4869,7 +4937,7 @@
           <a:p>
             <a:pPr>
               <a:spcAft>
-                <a:spcPts val="800"/>
+                <a:spcPts val="600"/>
               </a:spcAft>
               <a:defRPr sz="1050">
                 <a:solidFill>
@@ -4899,7 +4967,7 @@
           <a:p>
             <a:pPr>
               <a:spcAft>
-                <a:spcPts val="800"/>
+                <a:spcPts val="600"/>
               </a:spcAft>
               <a:defRPr sz="1050">
                 <a:solidFill>
@@ -4929,7 +4997,7 @@
           <a:p>
             <a:pPr>
               <a:spcAft>
-                <a:spcPts val="800"/>
+                <a:spcPts val="600"/>
               </a:spcAft>
               <a:defRPr sz="1050">
                 <a:solidFill>
@@ -4959,7 +5027,7 @@
           <a:p>
             <a:pPr>
               <a:spcAft>
-                <a:spcPts val="800"/>
+                <a:spcPts val="600"/>
               </a:spcAft>
               <a:defRPr sz="1050">
                 <a:solidFill>
@@ -5127,7 +5195,7 @@
         </p:nvSpPr>
         <p:spPr>
           <a:xfrm>
-            <a:off x="685800" y="1463040"/>
+            <a:off x="685800" y="1417320"/>
             <a:ext cx="2926080" cy="4937760"/>
           </a:xfrm>
           <a:prstGeom prst="rect">
@@ -5158,7 +5226,7 @@
           <a:p>
             <a:pPr>
               <a:spcAft>
-                <a:spcPts val="800"/>
+                <a:spcPts val="600"/>
               </a:spcAft>
               <a:defRPr sz="1050">
                 <a:solidFill>
@@ -5188,7 +5256,7 @@
           <a:p>
             <a:pPr>
               <a:spcAft>
-                <a:spcPts val="800"/>
+                <a:spcPts val="600"/>
               </a:spcAft>
               <a:defRPr sz="1050">
                 <a:solidFill>
@@ -5218,7 +5286,7 @@
           <a:p>
             <a:pPr>
               <a:spcAft>
-                <a:spcPts val="800"/>
+                <a:spcPts val="600"/>
               </a:spcAft>
               <a:defRPr sz="1050">
                 <a:solidFill>
@@ -5248,7 +5316,7 @@
           <a:p>
             <a:pPr>
               <a:spcAft>
-                <a:spcPts val="800"/>
+                <a:spcPts val="600"/>
               </a:spcAft>
               <a:defRPr sz="1050">
                 <a:solidFill>
